--- a/submission/Presentation.pptx
+++ b/submission/Presentation.pptx
@@ -2,24 +2,25 @@
 <file path=ppt/presentation.xml><?xml version="1.0" encoding="utf-8"?>
 <p:presentation xmlns:p="http://schemas.openxmlformats.org/presentationml/2006/main">
   <p:sldMasterIdLst>
-    <p:sldMasterId xmlns:r="http://schemas.openxmlformats.org/officeDocument/2006/relationships" id="2147483648" r:id="Rf20acc66a76f441a"/>
+    <p:sldMasterId xmlns:r="http://schemas.openxmlformats.org/officeDocument/2006/relationships" id="2147483648" r:id="Rb92d2e1d86204d03"/>
   </p:sldMasterIdLst>
   <p:notesMasterIdLst>
-    <p:notesMasterId xmlns:r="http://schemas.openxmlformats.org/officeDocument/2006/relationships" r:id="R2c4577f800e940fc"/>
+    <p:notesMasterId xmlns:r="http://schemas.openxmlformats.org/officeDocument/2006/relationships" r:id="Ra014d4a013174d86"/>
   </p:notesMasterIdLst>
   <p:sldIdLst>
-    <p:sldId xmlns:r="http://schemas.openxmlformats.org/officeDocument/2006/relationships" id="256" r:id="Rd41184789c4745b0"/>
-    <p:sldId xmlns:r="http://schemas.openxmlformats.org/officeDocument/2006/relationships" id="257" r:id="Ra5871262ce774ca5"/>
-    <p:sldId xmlns:r="http://schemas.openxmlformats.org/officeDocument/2006/relationships" id="258" r:id="R168bc2d2772341bc"/>
-    <p:sldId xmlns:r="http://schemas.openxmlformats.org/officeDocument/2006/relationships" id="259" r:id="R68da5f8d7cac408b"/>
-    <p:sldId xmlns:r="http://schemas.openxmlformats.org/officeDocument/2006/relationships" id="260" r:id="Rbc799c0da4e84cb4"/>
-    <p:sldId xmlns:r="http://schemas.openxmlformats.org/officeDocument/2006/relationships" id="261" r:id="R034beac553164e1a"/>
-    <p:sldId xmlns:r="http://schemas.openxmlformats.org/officeDocument/2006/relationships" id="262" r:id="R847b942c468e409a"/>
-    <p:sldId xmlns:r="http://schemas.openxmlformats.org/officeDocument/2006/relationships" id="263" r:id="Rb699acf68c3c4c27"/>
-    <p:sldId xmlns:r="http://schemas.openxmlformats.org/officeDocument/2006/relationships" id="264" r:id="R567d5a8fcab64377"/>
-    <p:sldId xmlns:r="http://schemas.openxmlformats.org/officeDocument/2006/relationships" id="265" r:id="Rb582f514c6a84ef2"/>
-    <p:sldId xmlns:r="http://schemas.openxmlformats.org/officeDocument/2006/relationships" id="266" r:id="Rc65d0ff11b564dc8"/>
-    <p:sldId xmlns:r="http://schemas.openxmlformats.org/officeDocument/2006/relationships" id="267" r:id="R2d11ded12eb4438c"/>
+    <p:sldId xmlns:r="http://schemas.openxmlformats.org/officeDocument/2006/relationships" id="256" r:id="Rc1301c6f81d2484d"/>
+    <p:sldId xmlns:r="http://schemas.openxmlformats.org/officeDocument/2006/relationships" id="257" r:id="R1f5c96ca0c6c44fa"/>
+    <p:sldId xmlns:r="http://schemas.openxmlformats.org/officeDocument/2006/relationships" id="258" r:id="R7a9b74d9cd1e426c"/>
+    <p:sldId xmlns:r="http://schemas.openxmlformats.org/officeDocument/2006/relationships" id="259" r:id="R2ef09d284a2f47c1"/>
+    <p:sldId xmlns:r="http://schemas.openxmlformats.org/officeDocument/2006/relationships" id="260" r:id="R47a910f56c24425a"/>
+    <p:sldId xmlns:r="http://schemas.openxmlformats.org/officeDocument/2006/relationships" id="261" r:id="R933946f7113d4430"/>
+    <p:sldId xmlns:r="http://schemas.openxmlformats.org/officeDocument/2006/relationships" id="262" r:id="R79ace0a2732146c6"/>
+    <p:sldId xmlns:r="http://schemas.openxmlformats.org/officeDocument/2006/relationships" id="263" r:id="R591d9c3901b140a8"/>
+    <p:sldId xmlns:r="http://schemas.openxmlformats.org/officeDocument/2006/relationships" id="264" r:id="R09c3f852262f46e3"/>
+    <p:sldId xmlns:r="http://schemas.openxmlformats.org/officeDocument/2006/relationships" id="265" r:id="R46d665602a5e4846"/>
+    <p:sldId xmlns:r="http://schemas.openxmlformats.org/officeDocument/2006/relationships" id="266" r:id="R178069f1cb2e4e9e"/>
+    <p:sldId xmlns:r="http://schemas.openxmlformats.org/officeDocument/2006/relationships" id="267" r:id="Rd018cffb3d044e57"/>
+    <p:sldId xmlns:r="http://schemas.openxmlformats.org/officeDocument/2006/relationships" id="268" r:id="Rbf2576b6012640ea"/>
   </p:sldIdLst>
   <p:sldSz cx="12192000" cy="6858000"/>
   <p:notesSz cx="6858000" cy="9144000"/>
@@ -453,7 +454,7 @@
           <a:lstStyle xmlns:a="http://schemas.openxmlformats.org/drawingml/2006/main"/>
           <a:p xmlns:a="http://schemas.openxmlformats.org/drawingml/2006/main">
             <a:r>
-              <a:t>Introduce the allotted topic. This is a C99 compiler front end with a separate output preview interpreter. Add the actual group number, names and roll numbers before presentation. The topic and date come from the supplied assignment.</a:t>
+              <a:t>Introduce the assigned String Processing Language topic. All front-end phases and preview execution run in JavaScript in the browser. Add actual group details before presenting.</a:t>
             </a:r>
           </a:p>
         </p:txBody>
@@ -523,7 +524,7 @@
           <a:lstStyle xmlns:a="http://schemas.openxmlformats.org/drawingml/2006/main"/>
           <a:p xmlns:a="http://schemas.openxmlformats.org/drawingml/2006/main">
             <a:r>
-              <a:t>Source: screenshots/transcripts/07_semantic_errors.txt. The error example deliberately returns 1. Show examples/lexical_error.str and examples/syntax_error.str during the live demonstration as well. No compilation error permits the interpreter to run.</a:t>
+              <a:t>Source: actual browser capture and screenshots/results/07_semantic_errors.json. The example collects three semantic errors. Also demonstrate the lexical and syntax error examples. Click a diagnostic location to select source.</a:t>
             </a:r>
           </a:p>
         </p:txBody>
@@ -593,7 +594,7 @@
           <a:lstStyle xmlns:a="http://schemas.openxmlformats.org/drawingml/2006/main"/>
           <a:p xmlns:a="http://schemas.openxmlformats.org/drawingml/2006/main">
             <a:r>
-              <a:t>Source: tests/test_compiler.py and local test execution. 26 test methods pass, some with multiple cases. Python is only a development test runner. The implementation uses standard C99. A fresh clone requires a C compiler. No machine-code generation is implemented.</a:t>
+              <a:t>Source: tests/compiler.test.cjs, browser verification and docs/verification.md. There are 29 core tests. Browser checks cover file imports, exports, tabs, examples, AST controls, keyboard navigation, safe text rendering, stale-state handling, mobile and direct file opening.</a:t>
             </a:r>
           </a:p>
         </p:txBody>
@@ -663,7 +664,77 @@
           <a:lstStyle xmlns:a="http://schemas.openxmlformats.org/drawingml/2006/main"/>
           <a:p xmlns:a="http://schemas.openxmlformats.org/drawingml/2006/main">
             <a:r>
-              <a:t>Complete this slide with actual names, roll numbers and the work each member performed. Suggested areas are not a claim that any person completed them. Adjust rows to actual group size. Use docs/contributions.md as the evidence log. Review and understand assistant-prepared material and follow institutional disclosure requirements.</a:t>
+              <a:t>The app opens from index.html with adjacent local files. npm run build is optional and copies files into dist. No installation or backend is needed to run the app. The README cites official static hosting instructions. Download the folder for guaranteed offline use.</a:t>
+            </a:r>
+          </a:p>
+        </p:txBody>
+      </p:sp>
+      <p:sp>
+        <p:nvSpPr>
+          <p:cNvPr id="4" name="Slide Number Placeholder 3"/>
+          <p:cNvSpPr>
+            <a:spLocks xmlns:a="http://schemas.openxmlformats.org/drawingml/2006/main" noGrp="1"/>
+          </p:cNvSpPr>
+          <p:nvPr>
+            <p:ph type="sldNum" idx="5"/>
+          </p:nvPr>
+        </p:nvSpPr>
+        <p:spPr/>
+        <p:txBody>
+          <a:bodyPr xmlns:a="http://schemas.openxmlformats.org/drawingml/2006/main"/>
+          <a:lstStyle xmlns:a="http://schemas.openxmlformats.org/drawingml/2006/main"/>
+          <a:p xmlns:a="http://schemas.openxmlformats.org/drawingml/2006/main"/>
+        </p:txBody>
+      </p:sp>
+    </p:spTree>
+  </p:cSld>
+  <p:clrMapOvr>
+    <a:masterClrMapping xmlns:a="http://schemas.openxmlformats.org/drawingml/2006/main"/>
+  </p:clrMapOvr>
+</p:notes>
+</file>
+
+<file path=ppt/notesSlides/notesSlide13.xml><?xml version="1.0" encoding="utf-8"?>
+<p:notes xmlns:p="http://schemas.openxmlformats.org/presentationml/2006/main">
+  <p:cSld>
+    <p:spTree>
+      <p:nvGrpSpPr>
+        <p:cNvPr id="1" name=""/>
+        <p:cNvGrpSpPr/>
+        <p:nvPr/>
+      </p:nvGrpSpPr>
+      <p:grpSpPr>
+        <a:xfrm xmlns:a="http://schemas.openxmlformats.org/drawingml/2006/main"/>
+      </p:grpSpPr>
+      <p:sp>
+        <p:nvSpPr>
+          <p:cNvPr id="2" name="Slide Image Placeholder 1"/>
+          <p:cNvSpPr>
+            <a:spLocks xmlns:a="http://schemas.openxmlformats.org/drawingml/2006/main" noGrp="1"/>
+          </p:cNvSpPr>
+          <p:nvPr>
+            <p:ph type="sldImg" idx="0"/>
+          </p:nvPr>
+        </p:nvSpPr>
+        <p:spPr/>
+      </p:sp>
+      <p:sp>
+        <p:nvSpPr>
+          <p:cNvPr id="3" name="Notes Placeholder 2"/>
+          <p:cNvSpPr>
+            <a:spLocks xmlns:a="http://schemas.openxmlformats.org/drawingml/2006/main" noGrp="1"/>
+          </p:cNvSpPr>
+          <p:nvPr>
+            <p:ph type="body" idx="1"/>
+          </p:nvPr>
+        </p:nvSpPr>
+        <p:spPr/>
+        <p:txBody>
+          <a:bodyPr xmlns:a="http://schemas.openxmlformats.org/drawingml/2006/main"/>
+          <a:lstStyle xmlns:a="http://schemas.openxmlformats.org/drawingml/2006/main"/>
+          <a:p xmlns:a="http://schemas.openxmlformats.org/drawingml/2006/main">
+            <a:r>
+              <a:t>Complete the names, roll numbers, actual work and evidence. The rows are a template, not invented student contributions. Adjust to real group size. Review and understand assistant-prepared materials and follow institutional disclosure requirements.</a:t>
             </a:r>
           </a:p>
         </p:txBody>
@@ -733,7 +804,7 @@
           <a:lstStyle xmlns:a="http://schemas.openxmlformats.org/drawingml/2006/main"/>
           <a:p xmlns:a="http://schemas.openxmlformats.org/drawingml/2006/main">
             <a:r>
-              <a:t>Source: examples/hello.str and docs/grammar.md. Walk through both declaration forms, assignment, concatenation, and print. Every statement ends with a semicolon.</a:t>
+              <a:t>Source: examples/hello.str and docs/grammar.md. Identify both declaration forms, assignment, concatenation and print. The program is editable, and output is computed by the language engine.</a:t>
             </a:r>
           </a:p>
         </p:txBody>
@@ -803,7 +874,7 @@
           <a:lstStyle xmlns:a="http://schemas.openxmlformats.org/drawingml/2006/main"/>
           <a:p xmlns:a="http://schemas.openxmlformats.org/drawingml/2006/main">
             <a:r>
-              <a:t>The implementation is src/mini_compiler.c. Explain the distinction between the three compiler-front-end phases and the optional interpreter. A failed phase prevents preview execution.</a:t>
+              <a:t>Source: compiler.js and app.js. The compiler is independent of the UI. compileSource returns tokens, AST, symbols, diagnostics, output and phase states. No backend executes code.</a:t>
             </a:r>
           </a:p>
         </p:txBody>
@@ -873,7 +944,7 @@
           <a:lstStyle xmlns:a="http://schemas.openxmlformats.org/drawingml/2006/main"/>
           <a:p xmlns:a="http://schemas.openxmlformats.org/drawingml/2006/main">
             <a:r>
-              <a:t>Source: lex() in src/mini_compiler.c and screenshots/transcripts/02_tokens.txt. The raw literal retains its source spelling, while decoded text is stored separately. Identifier matching happens before keyword classification.</a:t>
+              <a:t>Source: tokenize() in compiler.js and screenshots/results/02_tokens.json. The browser screenshot displays a portion of the scrollable token table. Explain raw lexemes, decoded literal values and clickable locations.</a:t>
             </a:r>
           </a:p>
         </p:txBody>
@@ -943,7 +1014,7 @@
           <a:lstStyle xmlns:a="http://schemas.openxmlformats.org/drawingml/2006/main"/>
           <a:p xmlns:a="http://schemas.openxmlformats.org/drawingml/2006/main">
             <a:r>
-              <a:t>Source: docs/grammar.md. The original CFG has immediate left recursion in Program and Expr. Explain that the loop-based expression parser builds a left-associated AST after removing left recursion. Declarations share a string id prefix.</a:t>
+              <a:t>Source: docs/grammar.md. Remove immediate left recursion from Expr and Program. Factor declarations. The expression parser loop preserves left associativity in the AST.</a:t>
             </a:r>
           </a:p>
         </p:txBody>
@@ -1013,7 +1084,7 @@
           <a:lstStyle xmlns:a="http://schemas.openxmlformats.org/drawingml/2006/main"/>
           <a:p xmlns:a="http://schemas.openxmlformats.org/drawingml/2006/main">
             <a:r>
-              <a:t>Source: examples/ast_demo.str and the executable AST. AST nodes omit punctuation and helper nonterminals. Show --ast and explain --dot. Existing readable export paths are preserved, so choose a new DOT filename for each export.</a:t>
+              <a:t>Source: examples/ast_demo.str, parse() and the browser AST tab. The tree omits punctuation and grammar helpers. Expand and collapse nodes or download JSON.</a:t>
             </a:r>
           </a:p>
         </p:txBody>
@@ -1083,7 +1154,7 @@
           <a:lstStyle xmlns:a="http://schemas.openxmlformats.org/drawingml/2006/main"/>
           <a:p xmlns:a="http://schemas.openxmlformats.org/drawingml/2006/main">
             <a:r>
-              <a:t>Source: analyze() and expression_length() in src/mini_compiler.c. Symbols are inserted uninitialized before checking an initializer. Failed assignment does not initialize a previously uninitialized variable. String type follows from the language grammar.</a:t>
+              <a:t>Source: analyze() in compiler.js. Symbols use a Map, so prototype-like identifier names are safe. Declarations are inserted uninitialized before their initializer is checked. No preview runs if any check fails.</a:t>
             </a:r>
           </a:p>
         </p:txBody>
@@ -1153,7 +1224,7 @@
           <a:lstStyle xmlns:a="http://schemas.openxmlformats.org/drawingml/2006/main"/>
           <a:p xmlns:a="http://schemas.openxmlformats.org/drawingml/2006/main">
             <a:r>
-              <a:t>Source: examples/escapes.str. Accepted escapes are newline, tab, carriage return, backslash and double quote. Decode once. Raw newline, invalid escape or missing closing quote produces a lexical error.</a:t>
+              <a:t>Source: examples/escapes.str and compiler tests. Decode escapes exactly once. Reject raw line breaks, unsupported escapes, NUL and unterminated literals. Unicode string content remains text.</a:t>
             </a:r>
           </a:p>
         </p:txBody>
@@ -1223,7 +1294,7 @@
           <a:lstStyle xmlns:a="http://schemas.openxmlformats.org/drawingml/2006/main"/>
           <a:p xmlns:a="http://schemas.openxmlformats.org/drawingml/2006/main">
             <a:r>
-              <a:t>Source: screenshots/transcripts/01_success.txt, generated by build/mini_compiler.exe examples/hello.str --run --symbols. Captured on 20 October 2026. The screenshot shows actual executable output, rendered for readability.</a:t>
+              <a:t>Source: actual browser capture screenshots/01_success.png. Edit the source and show stale results becoming invalid until compilation. Use Ctrl or Command plus Enter. Switch through Output, Tokens, AST and Symbols.</a:t>
             </a:r>
           </a:p>
         </p:txBody>
@@ -1270,7 +1341,7 @@
           <p:cNvPr id="3" name="Title">
             <a:extLst xmlns:a="http://schemas.openxmlformats.org/drawingml/2006/main">
               <a:ext uri="{FF2B5EF4-FFF2-40B4-BE49-F238E27FC236}">
-                <a16:creationId xmlns:a16="http://schemas.microsoft.com/office/drawing/2014/main" id="{16AB0D10-EF43-4EA7-BE2D-9D49F4821FD7}"/>
+                <a16:creationId xmlns:a16="http://schemas.microsoft.com/office/drawing/2014/main" id="{48AE5F1D-9089-4EDE-89E0-059503E06F67}"/>
               </a:ext>
             </a:extLst>
           </p:cNvPr>
@@ -1499,7 +1570,7 @@
           <p:cNvPr id="2" name="Subtitle">
             <a:extLst xmlns:a="http://schemas.openxmlformats.org/drawingml/2006/main">
               <a:ext uri="{FF2B5EF4-FFF2-40B4-BE49-F238E27FC236}">
-                <a16:creationId xmlns:a16="http://schemas.microsoft.com/office/drawing/2014/main" id="{331145A3-2AF9-4D89-A081-C9D882B7F635}"/>
+                <a16:creationId xmlns:a16="http://schemas.microsoft.com/office/drawing/2014/main" id="{78FFAAF4-3F5B-4558-A7F9-49B7398B26F6}"/>
               </a:ext>
             </a:extLst>
           </p:cNvPr>
@@ -1745,7 +1816,7 @@
           <p:cNvPr id="2" name="Section title">
             <a:extLst xmlns:a="http://schemas.openxmlformats.org/drawingml/2006/main">
               <a:ext uri="{FF2B5EF4-FFF2-40B4-BE49-F238E27FC236}">
-                <a16:creationId xmlns:a16="http://schemas.microsoft.com/office/drawing/2014/main" id="{50ED6722-1120-4724-91EC-73C336A97B71}"/>
+                <a16:creationId xmlns:a16="http://schemas.microsoft.com/office/drawing/2014/main" id="{A086ABFA-82F7-4432-9EF9-2736A1590BCB}"/>
               </a:ext>
             </a:extLst>
           </p:cNvPr>
@@ -1991,7 +2062,7 @@
           <p:cNvPr id="3" name="Title">
             <a:extLst xmlns:a="http://schemas.openxmlformats.org/drawingml/2006/main">
               <a:ext uri="{FF2B5EF4-FFF2-40B4-BE49-F238E27FC236}">
-                <a16:creationId xmlns:a16="http://schemas.microsoft.com/office/drawing/2014/main" id="{9CBB1217-0CE8-4AB0-9B75-CBD605382E3D}"/>
+                <a16:creationId xmlns:a16="http://schemas.microsoft.com/office/drawing/2014/main" id="{865969D8-BFBB-4C3B-97BC-525BB82A7A0C}"/>
               </a:ext>
             </a:extLst>
           </p:cNvPr>
@@ -2220,7 +2291,7 @@
           <p:cNvPr id="2" name="Body">
             <a:extLst xmlns:a="http://schemas.openxmlformats.org/drawingml/2006/main">
               <a:ext uri="{FF2B5EF4-FFF2-40B4-BE49-F238E27FC236}">
-                <a16:creationId xmlns:a16="http://schemas.microsoft.com/office/drawing/2014/main" id="{E660B86C-F22A-4BBA-BB79-C3E88595E740}"/>
+                <a16:creationId xmlns:a16="http://schemas.microsoft.com/office/drawing/2014/main" id="{97D40D69-55E1-4611-A066-205482D9C8B5}"/>
               </a:ext>
             </a:extLst>
           </p:cNvPr>
@@ -2466,7 +2537,7 @@
           <p:cNvPr id="4" name="Title">
             <a:extLst xmlns:a="http://schemas.openxmlformats.org/drawingml/2006/main">
               <a:ext uri="{FF2B5EF4-FFF2-40B4-BE49-F238E27FC236}">
-                <a16:creationId xmlns:a16="http://schemas.microsoft.com/office/drawing/2014/main" id="{EB3FD20D-80C1-4B8D-80C6-2F48F3DBE1A8}"/>
+                <a16:creationId xmlns:a16="http://schemas.microsoft.com/office/drawing/2014/main" id="{1E579AF6-22ED-4EB7-9A8E-EB439F69B3C2}"/>
               </a:ext>
             </a:extLst>
           </p:cNvPr>
@@ -2695,7 +2766,7 @@
           <p:cNvPr id="2" name="Left column">
             <a:extLst xmlns:a="http://schemas.openxmlformats.org/drawingml/2006/main">
               <a:ext uri="{FF2B5EF4-FFF2-40B4-BE49-F238E27FC236}">
-                <a16:creationId xmlns:a16="http://schemas.microsoft.com/office/drawing/2014/main" id="{8566FB82-ED6B-4C08-8C61-334CB6565740}"/>
+                <a16:creationId xmlns:a16="http://schemas.microsoft.com/office/drawing/2014/main" id="{5C4D92C9-0AF6-46F4-9910-C421C65DF770}"/>
               </a:ext>
             </a:extLst>
           </p:cNvPr>
@@ -2924,7 +2995,7 @@
           <p:cNvPr id="3" name="Right column">
             <a:extLst xmlns:a="http://schemas.openxmlformats.org/drawingml/2006/main">
               <a:ext uri="{FF2B5EF4-FFF2-40B4-BE49-F238E27FC236}">
-                <a16:creationId xmlns:a16="http://schemas.microsoft.com/office/drawing/2014/main" id="{73DBDF28-739E-482E-927D-3434F32B59F6}"/>
+                <a16:creationId xmlns:a16="http://schemas.microsoft.com/office/drawing/2014/main" id="{E306DF19-2C8E-42F5-9D45-62B03E391110}"/>
               </a:ext>
             </a:extLst>
           </p:cNvPr>
@@ -3170,7 +3241,7 @@
           <p:cNvPr id="3" name="Title">
             <a:extLst xmlns:a="http://schemas.openxmlformats.org/drawingml/2006/main">
               <a:ext uri="{FF2B5EF4-FFF2-40B4-BE49-F238E27FC236}">
-                <a16:creationId xmlns:a16="http://schemas.microsoft.com/office/drawing/2014/main" id="{7AA26F8C-FDDC-480D-AB77-216314408A6D}"/>
+                <a16:creationId xmlns:a16="http://schemas.microsoft.com/office/drawing/2014/main" id="{804DC5FF-C25F-4311-9E65-B844F6D735F4}"/>
               </a:ext>
             </a:extLst>
           </p:cNvPr>
@@ -3399,7 +3470,7 @@
           <p:cNvPr id="2" name="Left column">
             <a:extLst xmlns:a="http://schemas.openxmlformats.org/drawingml/2006/main">
               <a:ext uri="{FF2B5EF4-FFF2-40B4-BE49-F238E27FC236}">
-                <a16:creationId xmlns:a16="http://schemas.microsoft.com/office/drawing/2014/main" id="{B6CD2094-4211-42A5-B9ED-042006435006}"/>
+                <a16:creationId xmlns:a16="http://schemas.microsoft.com/office/drawing/2014/main" id="{0D6A4D18-E745-4AFA-B202-F73EB4B648AB}"/>
               </a:ext>
             </a:extLst>
           </p:cNvPr>
@@ -3666,12 +3737,12 @@
   </p:cSld>
   <p:clrMap bg1="lt1" tx1="dk1" bg2="lt2" tx2="dk2" accent1="accent1" accent2="accent2" accent3="accent3" accent4="accent4" accent5="accent5" accent6="accent6" hlink="hlink" folHlink="folHlink"/>
   <p:sldLayoutIdLst>
-    <p:sldLayoutId xmlns:r="http://schemas.openxmlformats.org/officeDocument/2006/relationships" id="2147483649" r:id="R517e56c551e24fff"/>
-    <p:sldLayoutId xmlns:r="http://schemas.openxmlformats.org/officeDocument/2006/relationships" id="2147483650" r:id="Rcba5e4e883b64baa"/>
-    <p:sldLayoutId xmlns:r="http://schemas.openxmlformats.org/officeDocument/2006/relationships" id="2147483651" r:id="Rca230e5abcfe4e9e"/>
-    <p:sldLayoutId xmlns:r="http://schemas.openxmlformats.org/officeDocument/2006/relationships" id="2147483652" r:id="Ref3d0bdc9d3849c2"/>
-    <p:sldLayoutId xmlns:r="http://schemas.openxmlformats.org/officeDocument/2006/relationships" id="2147483653" r:id="R5751f66e335e42ea"/>
-    <p:sldLayoutId xmlns:r="http://schemas.openxmlformats.org/officeDocument/2006/relationships" id="2147483654" r:id="Rb8d574dc2c3e425c"/>
+    <p:sldLayoutId xmlns:r="http://schemas.openxmlformats.org/officeDocument/2006/relationships" id="2147483649" r:id="Rb31971453b954abb"/>
+    <p:sldLayoutId xmlns:r="http://schemas.openxmlformats.org/officeDocument/2006/relationships" id="2147483650" r:id="Rf4436225083b4332"/>
+    <p:sldLayoutId xmlns:r="http://schemas.openxmlformats.org/officeDocument/2006/relationships" id="2147483651" r:id="R533048a6a9814c5b"/>
+    <p:sldLayoutId xmlns:r="http://schemas.openxmlformats.org/officeDocument/2006/relationships" id="2147483652" r:id="R49d3e3f618e7414f"/>
+    <p:sldLayoutId xmlns:r="http://schemas.openxmlformats.org/officeDocument/2006/relationships" id="2147483653" r:id="R6cc686ab6f3c486a"/>
+    <p:sldLayoutId xmlns:r="http://schemas.openxmlformats.org/officeDocument/2006/relationships" id="2147483654" r:id="R458d5950ef0b4968"/>
   </p:sldLayoutIdLst>
   <p:txStyles>
     <p:titleStyle>
@@ -4222,7 +4293,7 @@
           <p:cNvPr id="9" name="COMPILER DESIGN">
             <a:extLst xmlns:a="http://schemas.openxmlformats.org/drawingml/2006/main">
               <a:ext uri="{FF2B5EF4-FFF2-40B4-BE49-F238E27FC236}">
-                <a16:creationId xmlns:a16="http://schemas.microsoft.com/office/drawing/2014/main" id="{AF5008E0-ED52-4782-B002-0B918A807E30}"/>
+                <a16:creationId xmlns:a16="http://schemas.microsoft.com/office/drawing/2014/main" id="{3BFD47E0-5E34-4988-B587-977B55D0F7A2}"/>
               </a:ext>
             </a:extLst>
           </p:cNvPr>
@@ -4250,7 +4321,7 @@
             <a:defPPr>
               <a:defRPr sz="1125" b="1">
                 <a:solidFill>
-                  <a:srgbClr val="1A6383"/>
+                  <a:srgbClr val="DF6948"/>
                 </a:solidFill>
                 <a:latin typeface="Arial"/>
                 <a:ea typeface="Arial"/>
@@ -4260,7 +4331,7 @@
             <a:lvl1pPr>
               <a:defRPr sz="1125" b="1">
                 <a:solidFill>
-                  <a:srgbClr val="1A6383"/>
+                  <a:srgbClr val="DF6948"/>
                 </a:solidFill>
                 <a:latin typeface="Arial"/>
                 <a:ea typeface="Arial"/>
@@ -4270,7 +4341,7 @@
             <a:lvl2pPr>
               <a:defRPr sz="1125" b="1">
                 <a:solidFill>
-                  <a:srgbClr val="1A6383"/>
+                  <a:srgbClr val="DF6948"/>
                 </a:solidFill>
                 <a:latin typeface="Arial"/>
                 <a:ea typeface="Arial"/>
@@ -4280,7 +4351,7 @@
             <a:lvl3pPr>
               <a:defRPr sz="1125" b="1">
                 <a:solidFill>
-                  <a:srgbClr val="1A6383"/>
+                  <a:srgbClr val="DF6948"/>
                 </a:solidFill>
                 <a:latin typeface="Arial"/>
                 <a:ea typeface="Arial"/>
@@ -4290,7 +4361,7 @@
             <a:lvl4pPr>
               <a:defRPr sz="1125" b="1">
                 <a:solidFill>
-                  <a:srgbClr val="1A6383"/>
+                  <a:srgbClr val="DF6948"/>
                 </a:solidFill>
                 <a:latin typeface="Arial"/>
                 <a:ea typeface="Arial"/>
@@ -4300,7 +4371,7 @@
             <a:lvl5pPr>
               <a:defRPr sz="1125" b="1">
                 <a:solidFill>
-                  <a:srgbClr val="1A6383"/>
+                  <a:srgbClr val="DF6948"/>
                 </a:solidFill>
                 <a:latin typeface="Arial"/>
                 <a:ea typeface="Arial"/>
@@ -4310,7 +4381,7 @@
             <a:lvl6pPr>
               <a:defRPr sz="1125" b="1">
                 <a:solidFill>
-                  <a:srgbClr val="1A6383"/>
+                  <a:srgbClr val="DF6948"/>
                 </a:solidFill>
                 <a:latin typeface="Arial"/>
                 <a:ea typeface="Arial"/>
@@ -4320,7 +4391,7 @@
             <a:lvl7pPr>
               <a:defRPr sz="1125" b="1">
                 <a:solidFill>
-                  <a:srgbClr val="1A6383"/>
+                  <a:srgbClr val="DF6948"/>
                 </a:solidFill>
                 <a:latin typeface="Arial"/>
                 <a:ea typeface="Arial"/>
@@ -4330,7 +4401,7 @@
             <a:lvl8pPr>
               <a:defRPr sz="1125" b="1">
                 <a:solidFill>
-                  <a:srgbClr val="1A6383"/>
+                  <a:srgbClr val="DF6948"/>
                 </a:solidFill>
                 <a:latin typeface="Arial"/>
                 <a:ea typeface="Arial"/>
@@ -4340,7 +4411,7 @@
             <a:lvl9pPr>
               <a:defRPr sz="1125" b="1">
                 <a:solidFill>
-                  <a:srgbClr val="1A6383"/>
+                  <a:srgbClr val="DF6948"/>
                 </a:solidFill>
                 <a:latin typeface="Arial"/>
                 <a:ea typeface="Arial"/>
@@ -4352,7 +4423,7 @@
             <a:pPr>
               <a:defRPr sz="1125" b="1">
                 <a:solidFill>
-                  <a:srgbClr val="1A6383"/>
+                  <a:srgbClr val="DF6948"/>
                 </a:solidFill>
                 <a:latin typeface="Arial"/>
                 <a:ea typeface="Arial"/>
@@ -4362,7 +4433,7 @@
             <a:r>
               <a:rPr sz="1125" b="1">
                 <a:solidFill>
-                  <a:srgbClr val="1A6383"/>
+                  <a:srgbClr val="DF6948"/>
                 </a:solidFill>
                 <a:latin typeface="Arial"/>
                 <a:ea typeface="Arial"/>
@@ -4378,7 +4449,7 @@
           <p:cNvPr id="2" name="Slide title">
             <a:extLst xmlns:a="http://schemas.openxmlformats.org/drawingml/2006/main">
               <a:ext uri="{FF2B5EF4-FFF2-40B4-BE49-F238E27FC236}">
-                <a16:creationId xmlns:a16="http://schemas.microsoft.com/office/drawing/2014/main" id="{E1DCDFE9-C3E2-4F37-8E5C-6F1ED32DDF43}"/>
+                <a16:creationId xmlns:a16="http://schemas.microsoft.com/office/drawing/2014/main" id="{436BD0D8-E68C-428A-B3CD-1EE8F874D725}"/>
               </a:ext>
             </a:extLst>
           </p:cNvPr>
@@ -4524,17 +4595,17 @@
                 <a:ea typeface="Arial"/>
                 <a:cs typeface="Arial"/>
               </a:rPr>
-              <a:t>String Processing Language</a:t>
+              <a:t>StringLab</a:t>
             </a:r>
           </a:p>
         </p:txBody>
       </p:sp>
       <p:sp>
         <p:nvSpPr>
-          <p:cNvPr id="3" name="String Processing Mini Compiler in ">
+          <p:cNvPr id="3" name="StringLab Browser Compiler Front En">
             <a:extLst xmlns:a="http://schemas.openxmlformats.org/drawingml/2006/main">
               <a:ext uri="{FF2B5EF4-FFF2-40B4-BE49-F238E27FC236}">
-                <a16:creationId xmlns:a16="http://schemas.microsoft.com/office/drawing/2014/main" id="{E4AFBB3F-6EB4-471F-97E9-AA946CD020E5}"/>
+                <a16:creationId xmlns:a16="http://schemas.microsoft.com/office/drawing/2014/main" id="{7DE169B0-8963-4604-8F93-8E4DB14AF6B4}"/>
               </a:ext>
             </a:extLst>
           </p:cNvPr>
@@ -4680,7 +4751,7 @@
                 <a:ea typeface="Arial"/>
                 <a:cs typeface="Arial"/>
               </a:rPr>
-              <a:t>String Processing Mini Compiler in C</a:t>
+              <a:t>StringLab Browser Compiler Front End</a:t>
             </a:r>
           </a:p>
         </p:txBody>
@@ -4690,7 +4761,7 @@
           <p:cNvPr id="4" name="01">
             <a:extLst xmlns:a="http://schemas.openxmlformats.org/drawingml/2006/main">
               <a:ext uri="{FF2B5EF4-FFF2-40B4-BE49-F238E27FC236}">
-                <a16:creationId xmlns:a16="http://schemas.microsoft.com/office/drawing/2014/main" id="{0BC187AE-F375-436B-B92C-77231D911C91}"/>
+                <a16:creationId xmlns:a16="http://schemas.microsoft.com/office/drawing/2014/main" id="{5E669A9C-FAD1-410D-BD37-7D53183D159D}"/>
               </a:ext>
             </a:extLst>
           </p:cNvPr>
@@ -4843,10 +4914,10 @@
       </p:sp>
       <p:sp>
         <p:nvSpPr>
-          <p:cNvPr id="5" name="A mini compiler front end in C">
+          <p:cNvPr id="5" name="A compiler front end&#10;in your browse">
             <a:extLst xmlns:a="http://schemas.openxmlformats.org/drawingml/2006/main">
               <a:ext uri="{FF2B5EF4-FFF2-40B4-BE49-F238E27FC236}">
-                <a16:creationId xmlns:a16="http://schemas.microsoft.com/office/drawing/2014/main" id="{5574C8B9-379A-4A51-8018-F900096B3727}"/>
+                <a16:creationId xmlns:a16="http://schemas.microsoft.com/office/drawing/2014/main" id="{36578BBA-68B6-48D9-A8CC-D8C69CD20C5E}"/>
               </a:ext>
             </a:extLst>
           </p:cNvPr>
@@ -4857,8 +4928,8 @@
         </p:nvSpPr>
         <p:spPr>
           <a:xfrm xmlns:a="http://schemas.openxmlformats.org/drawingml/2006/main">
-            <a:off x="685800" y="2190750"/>
-            <a:ext cx="9810750" cy="952500"/>
+            <a:off x="685800" y="2114550"/>
+            <a:ext cx="10820400" cy="1619250"/>
           </a:xfrm>
           <a:prstGeom xmlns:a="http://schemas.openxmlformats.org/drawingml/2006/main" prst="rect">
             <a:avLst/>
@@ -4872,7 +4943,7 @@
           <a:bodyPr xmlns:a="http://schemas.openxmlformats.org/drawingml/2006/main"/>
           <a:lstStyle xmlns:a="http://schemas.openxmlformats.org/drawingml/2006/main">
             <a:defPPr>
-              <a:defRPr sz="4050" b="1">
+              <a:defRPr sz="4350" b="1">
                 <a:solidFill>
                   <a:srgbClr val="142B43"/>
                 </a:solidFill>
@@ -4882,7 +4953,7 @@
               </a:defRPr>
             </a:defPPr>
             <a:lvl1pPr>
-              <a:defRPr sz="4050" b="1">
+              <a:defRPr sz="4350" b="1">
                 <a:solidFill>
                   <a:srgbClr val="142B43"/>
                 </a:solidFill>
@@ -4892,7 +4963,7 @@
               </a:defRPr>
             </a:lvl1pPr>
             <a:lvl2pPr>
-              <a:defRPr sz="4050" b="1">
+              <a:defRPr sz="4350" b="1">
                 <a:solidFill>
                   <a:srgbClr val="142B43"/>
                 </a:solidFill>
@@ -4902,7 +4973,7 @@
               </a:defRPr>
             </a:lvl2pPr>
             <a:lvl3pPr>
-              <a:defRPr sz="4050" b="1">
+              <a:defRPr sz="4350" b="1">
                 <a:solidFill>
                   <a:srgbClr val="142B43"/>
                 </a:solidFill>
@@ -4912,7 +4983,7 @@
               </a:defRPr>
             </a:lvl3pPr>
             <a:lvl4pPr>
-              <a:defRPr sz="4050" b="1">
+              <a:defRPr sz="4350" b="1">
                 <a:solidFill>
                   <a:srgbClr val="142B43"/>
                 </a:solidFill>
@@ -4922,7 +4993,7 @@
               </a:defRPr>
             </a:lvl4pPr>
             <a:lvl5pPr>
-              <a:defRPr sz="4050" b="1">
+              <a:defRPr sz="4350" b="1">
                 <a:solidFill>
                   <a:srgbClr val="142B43"/>
                 </a:solidFill>
@@ -4932,7 +5003,7 @@
               </a:defRPr>
             </a:lvl5pPr>
             <a:lvl6pPr>
-              <a:defRPr sz="4050" b="1">
+              <a:defRPr sz="4350" b="1">
                 <a:solidFill>
                   <a:srgbClr val="142B43"/>
                 </a:solidFill>
@@ -4942,7 +5013,7 @@
               </a:defRPr>
             </a:lvl6pPr>
             <a:lvl7pPr>
-              <a:defRPr sz="4050" b="1">
+              <a:defRPr sz="4350" b="1">
                 <a:solidFill>
                   <a:srgbClr val="142B43"/>
                 </a:solidFill>
@@ -4952,7 +5023,7 @@
               </a:defRPr>
             </a:lvl7pPr>
             <a:lvl8pPr>
-              <a:defRPr sz="4050" b="1">
+              <a:defRPr sz="4350" b="1">
                 <a:solidFill>
                   <a:srgbClr val="142B43"/>
                 </a:solidFill>
@@ -4962,7 +5033,7 @@
               </a:defRPr>
             </a:lvl8pPr>
             <a:lvl9pPr>
-              <a:defRPr sz="4050" b="1">
+              <a:defRPr sz="4350" b="1">
                 <a:solidFill>
                   <a:srgbClr val="142B43"/>
                 </a:solidFill>
@@ -4974,7 +5045,7 @@
           </a:lstStyle>
           <a:p xmlns:a="http://schemas.openxmlformats.org/drawingml/2006/main">
             <a:pPr>
-              <a:defRPr sz="4050" b="1">
+              <a:defRPr sz="4350" b="1">
                 <a:solidFill>
                   <a:srgbClr val="142B43"/>
                 </a:solidFill>
@@ -4984,7 +5055,7 @@
               </a:defRPr>
             </a:pPr>
             <a:r>
-              <a:rPr sz="4050" b="1">
+              <a:rPr sz="4350" b="1">
                 <a:solidFill>
                   <a:srgbClr val="142B43"/>
                 </a:solidFill>
@@ -4992,17 +5063,40 @@
                 <a:ea typeface="Arial"/>
                 <a:cs typeface="Arial"/>
               </a:rPr>
-              <a:t>A mini compiler front end in C</a:t>
+              <a:t>A compiler front end</a:t>
+            </a:r>
+          </a:p>
+          <a:p xmlns:a="http://schemas.openxmlformats.org/drawingml/2006/main">
+            <a:pPr>
+              <a:defRPr sz="4350" b="1">
+                <a:solidFill>
+                  <a:srgbClr val="142B43"/>
+                </a:solidFill>
+                <a:latin typeface="Arial"/>
+                <a:ea typeface="Arial"/>
+                <a:cs typeface="Arial"/>
+              </a:defRPr>
+            </a:pPr>
+            <a:r>
+              <a:rPr sz="4350" b="1">
+                <a:solidFill>
+                  <a:srgbClr val="142B43"/>
+                </a:solidFill>
+                <a:latin typeface="Arial"/>
+                <a:ea typeface="Arial"/>
+                <a:cs typeface="Arial"/>
+              </a:rPr>
+              <a:t>in your browser</a:t>
             </a:r>
           </a:p>
         </p:txBody>
       </p:sp>
       <p:sp>
         <p:nvSpPr>
-          <p:cNvPr id="6" name="Project Based Learning Activity">
+          <p:cNvPr id="6" name="String Processing Language">
             <a:extLst xmlns:a="http://schemas.openxmlformats.org/drawingml/2006/main">
               <a:ext uri="{FF2B5EF4-FFF2-40B4-BE49-F238E27FC236}">
-                <a16:creationId xmlns:a16="http://schemas.microsoft.com/office/drawing/2014/main" id="{43F32524-45B4-472E-AFE5-FAF9F5ADCF27}"/>
+                <a16:creationId xmlns:a16="http://schemas.microsoft.com/office/drawing/2014/main" id="{940BD767-5CE6-422B-BC28-C483BF55507C}"/>
               </a:ext>
             </a:extLst>
           </p:cNvPr>
@@ -5013,8 +5107,8 @@
         </p:nvSpPr>
         <p:spPr>
           <a:xfrm xmlns:a="http://schemas.openxmlformats.org/drawingml/2006/main">
-            <a:off x="714375" y="3505200"/>
-            <a:ext cx="10001250" cy="428625"/>
+            <a:off x="723900" y="4067175"/>
+            <a:ext cx="10477500" cy="476250"/>
           </a:xfrm>
           <a:prstGeom xmlns:a="http://schemas.openxmlformats.org/drawingml/2006/main" prst="rect">
             <a:avLst/>
@@ -5028,7 +5122,7 @@
           <a:bodyPr xmlns:a="http://schemas.openxmlformats.org/drawingml/2006/main"/>
           <a:lstStyle xmlns:a="http://schemas.openxmlformats.org/drawingml/2006/main">
             <a:defPPr>
-              <a:defRPr sz="2250" b="0">
+              <a:defRPr sz="2325" b="0">
                 <a:solidFill>
                   <a:srgbClr val="52667B"/>
                 </a:solidFill>
@@ -5038,7 +5132,7 @@
               </a:defRPr>
             </a:defPPr>
             <a:lvl1pPr>
-              <a:defRPr sz="2250" b="0">
+              <a:defRPr sz="2325" b="0">
                 <a:solidFill>
                   <a:srgbClr val="52667B"/>
                 </a:solidFill>
@@ -5048,7 +5142,7 @@
               </a:defRPr>
             </a:lvl1pPr>
             <a:lvl2pPr>
-              <a:defRPr sz="2250" b="0">
+              <a:defRPr sz="2325" b="0">
                 <a:solidFill>
                   <a:srgbClr val="52667B"/>
                 </a:solidFill>
@@ -5058,7 +5152,7 @@
               </a:defRPr>
             </a:lvl2pPr>
             <a:lvl3pPr>
-              <a:defRPr sz="2250" b="0">
+              <a:defRPr sz="2325" b="0">
                 <a:solidFill>
                   <a:srgbClr val="52667B"/>
                 </a:solidFill>
@@ -5068,7 +5162,7 @@
               </a:defRPr>
             </a:lvl3pPr>
             <a:lvl4pPr>
-              <a:defRPr sz="2250" b="0">
+              <a:defRPr sz="2325" b="0">
                 <a:solidFill>
                   <a:srgbClr val="52667B"/>
                 </a:solidFill>
@@ -5078,7 +5172,7 @@
               </a:defRPr>
             </a:lvl4pPr>
             <a:lvl5pPr>
-              <a:defRPr sz="2250" b="0">
+              <a:defRPr sz="2325" b="0">
                 <a:solidFill>
                   <a:srgbClr val="52667B"/>
                 </a:solidFill>
@@ -5088,7 +5182,7 @@
               </a:defRPr>
             </a:lvl5pPr>
             <a:lvl6pPr>
-              <a:defRPr sz="2250" b="0">
+              <a:defRPr sz="2325" b="0">
                 <a:solidFill>
                   <a:srgbClr val="52667B"/>
                 </a:solidFill>
@@ -5098,7 +5192,7 @@
               </a:defRPr>
             </a:lvl6pPr>
             <a:lvl7pPr>
-              <a:defRPr sz="2250" b="0">
+              <a:defRPr sz="2325" b="0">
                 <a:solidFill>
                   <a:srgbClr val="52667B"/>
                 </a:solidFill>
@@ -5108,7 +5202,7 @@
               </a:defRPr>
             </a:lvl7pPr>
             <a:lvl8pPr>
-              <a:defRPr sz="2250" b="0">
+              <a:defRPr sz="2325" b="0">
                 <a:solidFill>
                   <a:srgbClr val="52667B"/>
                 </a:solidFill>
@@ -5118,7 +5212,7 @@
               </a:defRPr>
             </a:lvl8pPr>
             <a:lvl9pPr>
-              <a:defRPr sz="2250" b="0">
+              <a:defRPr sz="2325" b="0">
                 <a:solidFill>
                   <a:srgbClr val="52667B"/>
                 </a:solidFill>
@@ -5130,7 +5224,7 @@
           </a:lstStyle>
           <a:p xmlns:a="http://schemas.openxmlformats.org/drawingml/2006/main">
             <a:pPr>
-              <a:defRPr sz="2250" b="0">
+              <a:defRPr sz="2325" b="0">
                 <a:solidFill>
                   <a:srgbClr val="52667B"/>
                 </a:solidFill>
@@ -5140,7 +5234,7 @@
               </a:defRPr>
             </a:pPr>
             <a:r>
-              <a:rPr sz="2250" b="0">
+              <a:rPr sz="2325" b="0">
                 <a:solidFill>
                   <a:srgbClr val="52667B"/>
                 </a:solidFill>
@@ -5148,7 +5242,7 @@
                 <a:ea typeface="Arial"/>
                 <a:cs typeface="Arial"/>
               </a:rPr>
-              <a:t>Project Based Learning Activity</a:t>
+              <a:t>String Processing Language</a:t>
             </a:r>
           </a:p>
         </p:txBody>
@@ -5158,7 +5252,7 @@
           <p:cNvPr id="7" name="Presentation and demonstration   23">
             <a:extLst xmlns:a="http://schemas.openxmlformats.org/drawingml/2006/main">
               <a:ext uri="{FF2B5EF4-FFF2-40B4-BE49-F238E27FC236}">
-                <a16:creationId xmlns:a16="http://schemas.microsoft.com/office/drawing/2014/main" id="{333219FC-3162-4793-99CB-4D3AF9D8D487}"/>
+                <a16:creationId xmlns:a16="http://schemas.microsoft.com/office/drawing/2014/main" id="{44AFDEA4-0E41-4EC6-87A8-24B314C5C165}"/>
               </a:ext>
             </a:extLst>
           </p:cNvPr>
@@ -5169,7 +5263,7 @@
         </p:nvSpPr>
         <p:spPr>
           <a:xfrm xmlns:a="http://schemas.openxmlformats.org/drawingml/2006/main">
-            <a:off x="714375" y="4210050"/>
+            <a:off x="723900" y="4857750"/>
             <a:ext cx="10477500" cy="428625"/>
           </a:xfrm>
           <a:prstGeom xmlns:a="http://schemas.openxmlformats.org/drawingml/2006/main" prst="rect">
@@ -5184,7 +5278,7 @@
           <a:bodyPr xmlns:a="http://schemas.openxmlformats.org/drawingml/2006/main"/>
           <a:lstStyle xmlns:a="http://schemas.openxmlformats.org/drawingml/2006/main">
             <a:defPPr>
-              <a:defRPr sz="2100" b="0">
+              <a:defRPr sz="2025" b="0">
                 <a:solidFill>
                   <a:srgbClr val="142B43"/>
                 </a:solidFill>
@@ -5194,7 +5288,7 @@
               </a:defRPr>
             </a:defPPr>
             <a:lvl1pPr>
-              <a:defRPr sz="2100" b="0">
+              <a:defRPr sz="2025" b="0">
                 <a:solidFill>
                   <a:srgbClr val="142B43"/>
                 </a:solidFill>
@@ -5204,7 +5298,7 @@
               </a:defRPr>
             </a:lvl1pPr>
             <a:lvl2pPr>
-              <a:defRPr sz="2100" b="0">
+              <a:defRPr sz="2025" b="0">
                 <a:solidFill>
                   <a:srgbClr val="142B43"/>
                 </a:solidFill>
@@ -5214,7 +5308,7 @@
               </a:defRPr>
             </a:lvl2pPr>
             <a:lvl3pPr>
-              <a:defRPr sz="2100" b="0">
+              <a:defRPr sz="2025" b="0">
                 <a:solidFill>
                   <a:srgbClr val="142B43"/>
                 </a:solidFill>
@@ -5224,7 +5318,7 @@
               </a:defRPr>
             </a:lvl3pPr>
             <a:lvl4pPr>
-              <a:defRPr sz="2100" b="0">
+              <a:defRPr sz="2025" b="0">
                 <a:solidFill>
                   <a:srgbClr val="142B43"/>
                 </a:solidFill>
@@ -5234,7 +5328,7 @@
               </a:defRPr>
             </a:lvl4pPr>
             <a:lvl5pPr>
-              <a:defRPr sz="2100" b="0">
+              <a:defRPr sz="2025" b="0">
                 <a:solidFill>
                   <a:srgbClr val="142B43"/>
                 </a:solidFill>
@@ -5244,7 +5338,7 @@
               </a:defRPr>
             </a:lvl5pPr>
             <a:lvl6pPr>
-              <a:defRPr sz="2100" b="0">
+              <a:defRPr sz="2025" b="0">
                 <a:solidFill>
                   <a:srgbClr val="142B43"/>
                 </a:solidFill>
@@ -5254,7 +5348,7 @@
               </a:defRPr>
             </a:lvl6pPr>
             <a:lvl7pPr>
-              <a:defRPr sz="2100" b="0">
+              <a:defRPr sz="2025" b="0">
                 <a:solidFill>
                   <a:srgbClr val="142B43"/>
                 </a:solidFill>
@@ -5264,7 +5358,7 @@
               </a:defRPr>
             </a:lvl7pPr>
             <a:lvl8pPr>
-              <a:defRPr sz="2100" b="0">
+              <a:defRPr sz="2025" b="0">
                 <a:solidFill>
                   <a:srgbClr val="142B43"/>
                 </a:solidFill>
@@ -5274,7 +5368,7 @@
               </a:defRPr>
             </a:lvl8pPr>
             <a:lvl9pPr>
-              <a:defRPr sz="2100" b="0">
+              <a:defRPr sz="2025" b="0">
                 <a:solidFill>
                   <a:srgbClr val="142B43"/>
                 </a:solidFill>
@@ -5286,7 +5380,7 @@
           </a:lstStyle>
           <a:p xmlns:a="http://schemas.openxmlformats.org/drawingml/2006/main">
             <a:pPr>
-              <a:defRPr sz="2100" b="0">
+              <a:defRPr sz="2025" b="0">
                 <a:solidFill>
                   <a:srgbClr val="142B43"/>
                 </a:solidFill>
@@ -5296,7 +5390,7 @@
               </a:defRPr>
             </a:pPr>
             <a:r>
-              <a:rPr sz="2100" b="0">
+              <a:rPr sz="2025" b="0">
                 <a:solidFill>
                   <a:srgbClr val="142B43"/>
                 </a:solidFill>
@@ -5311,10 +5405,10 @@
       </p:sp>
       <p:sp>
         <p:nvSpPr>
-          <p:cNvPr id="8" name="Group and member details to be comp">
+          <p:cNvPr id="8" name="Group names and roll numbers to be ">
             <a:extLst xmlns:a="http://schemas.openxmlformats.org/drawingml/2006/main">
               <a:ext uri="{FF2B5EF4-FFF2-40B4-BE49-F238E27FC236}">
-                <a16:creationId xmlns:a16="http://schemas.microsoft.com/office/drawing/2014/main" id="{E250A9C6-450F-4C8E-A39A-9F772BF10DCA}"/>
+                <a16:creationId xmlns:a16="http://schemas.microsoft.com/office/drawing/2014/main" id="{3EF1C469-3AA9-444C-9E9B-43E9A5F5A404}"/>
               </a:ext>
             </a:extLst>
           </p:cNvPr>
@@ -5325,8 +5419,8 @@
         </p:nvSpPr>
         <p:spPr>
           <a:xfrm xmlns:a="http://schemas.openxmlformats.org/drawingml/2006/main">
-            <a:off x="714375" y="5219700"/>
-            <a:ext cx="10477500" cy="419100"/>
+            <a:off x="723900" y="5572125"/>
+            <a:ext cx="10477500" cy="333375"/>
           </a:xfrm>
           <a:prstGeom xmlns:a="http://schemas.openxmlformats.org/drawingml/2006/main" prst="rect">
             <a:avLst/>
@@ -5340,7 +5434,7 @@
           <a:bodyPr xmlns:a="http://schemas.openxmlformats.org/drawingml/2006/main"/>
           <a:lstStyle xmlns:a="http://schemas.openxmlformats.org/drawingml/2006/main">
             <a:defPPr>
-              <a:defRPr sz="1875" b="0">
+              <a:defRPr sz="1650" b="0">
                 <a:solidFill>
                   <a:srgbClr val="52667B"/>
                 </a:solidFill>
@@ -5350,7 +5444,7 @@
               </a:defRPr>
             </a:defPPr>
             <a:lvl1pPr>
-              <a:defRPr sz="1875" b="0">
+              <a:defRPr sz="1650" b="0">
                 <a:solidFill>
                   <a:srgbClr val="52667B"/>
                 </a:solidFill>
@@ -5360,7 +5454,7 @@
               </a:defRPr>
             </a:lvl1pPr>
             <a:lvl2pPr>
-              <a:defRPr sz="1875" b="0">
+              <a:defRPr sz="1650" b="0">
                 <a:solidFill>
                   <a:srgbClr val="52667B"/>
                 </a:solidFill>
@@ -5370,7 +5464,7 @@
               </a:defRPr>
             </a:lvl2pPr>
             <a:lvl3pPr>
-              <a:defRPr sz="1875" b="0">
+              <a:defRPr sz="1650" b="0">
                 <a:solidFill>
                   <a:srgbClr val="52667B"/>
                 </a:solidFill>
@@ -5380,7 +5474,7 @@
               </a:defRPr>
             </a:lvl3pPr>
             <a:lvl4pPr>
-              <a:defRPr sz="1875" b="0">
+              <a:defRPr sz="1650" b="0">
                 <a:solidFill>
                   <a:srgbClr val="52667B"/>
                 </a:solidFill>
@@ -5390,7 +5484,7 @@
               </a:defRPr>
             </a:lvl4pPr>
             <a:lvl5pPr>
-              <a:defRPr sz="1875" b="0">
+              <a:defRPr sz="1650" b="0">
                 <a:solidFill>
                   <a:srgbClr val="52667B"/>
                 </a:solidFill>
@@ -5400,7 +5494,7 @@
               </a:defRPr>
             </a:lvl5pPr>
             <a:lvl6pPr>
-              <a:defRPr sz="1875" b="0">
+              <a:defRPr sz="1650" b="0">
                 <a:solidFill>
                   <a:srgbClr val="52667B"/>
                 </a:solidFill>
@@ -5410,7 +5504,7 @@
               </a:defRPr>
             </a:lvl6pPr>
             <a:lvl7pPr>
-              <a:defRPr sz="1875" b="0">
+              <a:defRPr sz="1650" b="0">
                 <a:solidFill>
                   <a:srgbClr val="52667B"/>
                 </a:solidFill>
@@ -5420,7 +5514,7 @@
               </a:defRPr>
             </a:lvl7pPr>
             <a:lvl8pPr>
-              <a:defRPr sz="1875" b="0">
+              <a:defRPr sz="1650" b="0">
                 <a:solidFill>
                   <a:srgbClr val="52667B"/>
                 </a:solidFill>
@@ -5430,7 +5524,7 @@
               </a:defRPr>
             </a:lvl8pPr>
             <a:lvl9pPr>
-              <a:defRPr sz="1875" b="0">
+              <a:defRPr sz="1650" b="0">
                 <a:solidFill>
                   <a:srgbClr val="52667B"/>
                 </a:solidFill>
@@ -5442,7 +5536,7 @@
           </a:lstStyle>
           <a:p xmlns:a="http://schemas.openxmlformats.org/drawingml/2006/main">
             <a:pPr>
-              <a:defRPr sz="1875" b="0">
+              <a:defRPr sz="1650" b="0">
                 <a:solidFill>
                   <a:srgbClr val="52667B"/>
                 </a:solidFill>
@@ -5452,7 +5546,7 @@
               </a:defRPr>
             </a:pPr>
             <a:r>
-              <a:rPr sz="1875" b="0">
+              <a:rPr sz="1650" b="0">
                 <a:solidFill>
                   <a:srgbClr val="52667B"/>
                 </a:solidFill>
@@ -5460,7 +5554,7 @@
                 <a:ea typeface="Arial"/>
                 <a:cs typeface="Arial"/>
               </a:rPr>
-              <a:t>Group and member details to be completed</a:t>
+              <a:t>Group names and roll numbers to be completed</a:t>
             </a:r>
           </a:p>
         </p:txBody>
@@ -5468,7 +5562,7 @@
     </p:spTree>
     <p:extLst>
       <p:ext uri="{BB962C8B-B14F-4D97-AF65-F5344CB8AC3E}">
-        <p14:creationId xmlns:p14="http://schemas.microsoft.com/office/powerpoint/2010/main" val="57879318"/>
+        <p14:creationId xmlns:p14="http://schemas.microsoft.com/office/powerpoint/2010/main" val="291136469"/>
       </p:ext>
     </p:extLst>
   </p:cSld>
@@ -5496,10 +5590,10 @@
       </p:grpSpPr>
       <p:sp>
         <p:nvSpPr>
-          <p:cNvPr id="6" name="COMPILER DESIGN">
+          <p:cNvPr id="7" name="COMPILER DESIGN">
             <a:extLst xmlns:a="http://schemas.openxmlformats.org/drawingml/2006/main">
               <a:ext uri="{FF2B5EF4-FFF2-40B4-BE49-F238E27FC236}">
-                <a16:creationId xmlns:a16="http://schemas.microsoft.com/office/drawing/2014/main" id="{13C3296C-F9CA-4155-9BCE-AEA0CC9CBFF8}"/>
+                <a16:creationId xmlns:a16="http://schemas.microsoft.com/office/drawing/2014/main" id="{13942756-4767-4899-A853-54042CCF15F4}"/>
               </a:ext>
             </a:extLst>
           </p:cNvPr>
@@ -5527,7 +5621,7 @@
             <a:defPPr>
               <a:defRPr sz="1125" b="1">
                 <a:solidFill>
-                  <a:srgbClr val="1A6383"/>
+                  <a:srgbClr val="DF6948"/>
                 </a:solidFill>
                 <a:latin typeface="Arial"/>
                 <a:ea typeface="Arial"/>
@@ -5537,7 +5631,7 @@
             <a:lvl1pPr>
               <a:defRPr sz="1125" b="1">
                 <a:solidFill>
-                  <a:srgbClr val="1A6383"/>
+                  <a:srgbClr val="DF6948"/>
                 </a:solidFill>
                 <a:latin typeface="Arial"/>
                 <a:ea typeface="Arial"/>
@@ -5547,7 +5641,7 @@
             <a:lvl2pPr>
               <a:defRPr sz="1125" b="1">
                 <a:solidFill>
-                  <a:srgbClr val="1A6383"/>
+                  <a:srgbClr val="DF6948"/>
                 </a:solidFill>
                 <a:latin typeface="Arial"/>
                 <a:ea typeface="Arial"/>
@@ -5557,7 +5651,7 @@
             <a:lvl3pPr>
               <a:defRPr sz="1125" b="1">
                 <a:solidFill>
-                  <a:srgbClr val="1A6383"/>
+                  <a:srgbClr val="DF6948"/>
                 </a:solidFill>
                 <a:latin typeface="Arial"/>
                 <a:ea typeface="Arial"/>
@@ -5567,7 +5661,7 @@
             <a:lvl4pPr>
               <a:defRPr sz="1125" b="1">
                 <a:solidFill>
-                  <a:srgbClr val="1A6383"/>
+                  <a:srgbClr val="DF6948"/>
                 </a:solidFill>
                 <a:latin typeface="Arial"/>
                 <a:ea typeface="Arial"/>
@@ -5577,7 +5671,7 @@
             <a:lvl5pPr>
               <a:defRPr sz="1125" b="1">
                 <a:solidFill>
-                  <a:srgbClr val="1A6383"/>
+                  <a:srgbClr val="DF6948"/>
                 </a:solidFill>
                 <a:latin typeface="Arial"/>
                 <a:ea typeface="Arial"/>
@@ -5587,7 +5681,7 @@
             <a:lvl6pPr>
               <a:defRPr sz="1125" b="1">
                 <a:solidFill>
-                  <a:srgbClr val="1A6383"/>
+                  <a:srgbClr val="DF6948"/>
                 </a:solidFill>
                 <a:latin typeface="Arial"/>
                 <a:ea typeface="Arial"/>
@@ -5597,7 +5691,7 @@
             <a:lvl7pPr>
               <a:defRPr sz="1125" b="1">
                 <a:solidFill>
-                  <a:srgbClr val="1A6383"/>
+                  <a:srgbClr val="DF6948"/>
                 </a:solidFill>
                 <a:latin typeface="Arial"/>
                 <a:ea typeface="Arial"/>
@@ -5607,7 +5701,7 @@
             <a:lvl8pPr>
               <a:defRPr sz="1125" b="1">
                 <a:solidFill>
-                  <a:srgbClr val="1A6383"/>
+                  <a:srgbClr val="DF6948"/>
                 </a:solidFill>
                 <a:latin typeface="Arial"/>
                 <a:ea typeface="Arial"/>
@@ -5617,7 +5711,7 @@
             <a:lvl9pPr>
               <a:defRPr sz="1125" b="1">
                 <a:solidFill>
-                  <a:srgbClr val="1A6383"/>
+                  <a:srgbClr val="DF6948"/>
                 </a:solidFill>
                 <a:latin typeface="Arial"/>
                 <a:ea typeface="Arial"/>
@@ -5629,7 +5723,7 @@
             <a:pPr>
               <a:defRPr sz="1125" b="1">
                 <a:solidFill>
-                  <a:srgbClr val="1A6383"/>
+                  <a:srgbClr val="DF6948"/>
                 </a:solidFill>
                 <a:latin typeface="Arial"/>
                 <a:ea typeface="Arial"/>
@@ -5639,7 +5733,7 @@
             <a:r>
               <a:rPr sz="1125" b="1">
                 <a:solidFill>
-                  <a:srgbClr val="1A6383"/>
+                  <a:srgbClr val="DF6948"/>
                 </a:solidFill>
                 <a:latin typeface="Arial"/>
                 <a:ea typeface="Arial"/>
@@ -5655,7 +5749,7 @@
           <p:cNvPr id="2" name="Slide title">
             <a:extLst xmlns:a="http://schemas.openxmlformats.org/drawingml/2006/main">
               <a:ext uri="{FF2B5EF4-FFF2-40B4-BE49-F238E27FC236}">
-                <a16:creationId xmlns:a16="http://schemas.microsoft.com/office/drawing/2014/main" id="{F254DEB3-3E9D-4CEA-9475-9440EE76C104}"/>
+                <a16:creationId xmlns:a16="http://schemas.microsoft.com/office/drawing/2014/main" id="{03474EB4-C672-4F04-9252-D6A9EFC2D433}"/>
               </a:ext>
             </a:extLst>
           </p:cNvPr>
@@ -5801,17 +5895,17 @@
                 <a:ea typeface="Arial"/>
                 <a:cs typeface="Arial"/>
               </a:rPr>
-              <a:t>Error detection</a:t>
+              <a:t>Error diagnostics</a:t>
             </a:r>
           </a:p>
         </p:txBody>
       </p:sp>
       <p:sp>
         <p:nvSpPr>
-          <p:cNvPr id="3" name="String Processing Mini Compiler in ">
+          <p:cNvPr id="3" name="StringLab Browser Compiler Front En">
             <a:extLst xmlns:a="http://schemas.openxmlformats.org/drawingml/2006/main">
               <a:ext uri="{FF2B5EF4-FFF2-40B4-BE49-F238E27FC236}">
-                <a16:creationId xmlns:a16="http://schemas.microsoft.com/office/drawing/2014/main" id="{CA7EE28D-380E-452C-850D-22A55B1E2CCD}"/>
+                <a16:creationId xmlns:a16="http://schemas.microsoft.com/office/drawing/2014/main" id="{E0129E40-D1A6-4E8B-AB39-B43B0A2C7F5F}"/>
               </a:ext>
             </a:extLst>
           </p:cNvPr>
@@ -5957,7 +6051,7 @@
                 <a:ea typeface="Arial"/>
                 <a:cs typeface="Arial"/>
               </a:rPr>
-              <a:t>String Processing Mini Compiler in C</a:t>
+              <a:t>StringLab Browser Compiler Front End</a:t>
             </a:r>
           </a:p>
         </p:txBody>
@@ -5967,7 +6061,7 @@
           <p:cNvPr id="4" name="10">
             <a:extLst xmlns:a="http://schemas.openxmlformats.org/drawingml/2006/main">
               <a:ext uri="{FF2B5EF4-FFF2-40B4-BE49-F238E27FC236}">
-                <a16:creationId xmlns:a16="http://schemas.microsoft.com/office/drawing/2014/main" id="{0722495B-D980-4620-817B-47C252E1E1BD}"/>
+                <a16:creationId xmlns:a16="http://schemas.microsoft.com/office/drawing/2014/main" id="{0C9697DC-73AA-46AC-9A31-7FCA9F703813}"/>
               </a:ext>
             </a:extLst>
           </p:cNvPr>
@@ -6123,7 +6217,7 @@
           <p:cNvPr id="5" name="">
             <a:extLst xmlns:a="http://schemas.openxmlformats.org/drawingml/2006/main">
               <a:ext uri="{FF2B5EF4-FFF2-40B4-BE49-F238E27FC236}">
-                <a16:creationId xmlns:a16="http://schemas.microsoft.com/office/drawing/2014/main" id="{C0FA87D9-C020-4044-B262-656BFDE71E40}"/>
+                <a16:creationId xmlns:a16="http://schemas.microsoft.com/office/drawing/2014/main" id="{D8EB651B-B51F-4522-8E8F-16DD972ADABD}"/>
               </a:ext>
             </a:extLst>
           </p:cNvPr>
@@ -6133,23 +6227,235 @@
           <p:nvPr/>
         </p:nvPicPr>
         <p:blipFill>
-          <a:blip xmlns:r="http://schemas.openxmlformats.org/officeDocument/2006/relationships" xmlns:a="http://schemas.openxmlformats.org/drawingml/2006/main" r:embed="R52eef57a341848c1"/>
+          <a:blip xmlns:r="http://schemas.openxmlformats.org/officeDocument/2006/relationships" xmlns:a="http://schemas.openxmlformats.org/drawingml/2006/main" r:embed="Ra18797d17191478c"/>
           <a:stretch xmlns:a="http://schemas.openxmlformats.org/drawingml/2006/main"/>
         </p:blipFill>
         <p:spPr>
           <a:xfrm xmlns:a="http://schemas.openxmlformats.org/drawingml/2006/main">
-            <a:off x="685800" y="2005324"/>
-            <a:ext cx="10820400" cy="3656976"/>
+            <a:off x="1295032" y="1752600"/>
+            <a:ext cx="5687161" cy="4191000"/>
           </a:xfrm>
           <a:prstGeom xmlns:a="http://schemas.openxmlformats.org/drawingml/2006/main" prst="rect">
             <a:avLst/>
           </a:prstGeom>
         </p:spPr>
       </p:pic>
+      <p:sp>
+        <p:nvSpPr>
+          <p:cNvPr id="6" name="Uninitialized read&#10;&#10;Undeclared assi">
+            <a:extLst xmlns:a="http://schemas.openxmlformats.org/drawingml/2006/main">
+              <a:ext uri="{FF2B5EF4-FFF2-40B4-BE49-F238E27FC236}">
+                <a16:creationId xmlns:a16="http://schemas.microsoft.com/office/drawing/2014/main" id="{0A2C777D-5846-423F-809A-265122F0260D}"/>
+              </a:ext>
+            </a:extLst>
+          </p:cNvPr>
+          <p:cNvSpPr>
+            <a:spLocks xmlns:a="http://schemas.openxmlformats.org/drawingml/2006/main" noGrp="1"/>
+          </p:cNvSpPr>
+          <p:nvPr/>
+        </p:nvSpPr>
+        <p:spPr>
+          <a:xfrm xmlns:a="http://schemas.openxmlformats.org/drawingml/2006/main">
+            <a:off x="8039100" y="2190750"/>
+            <a:ext cx="3476625" cy="2857500"/>
+          </a:xfrm>
+          <a:prstGeom xmlns:a="http://schemas.openxmlformats.org/drawingml/2006/main" prst="rect">
+            <a:avLst/>
+          </a:prstGeom>
+          <a:noFill xmlns:a="http://schemas.openxmlformats.org/drawingml/2006/main"/>
+          <a:ln xmlns:a="http://schemas.openxmlformats.org/drawingml/2006/main" w="0">
+            <a:noFill/>
+          </a:ln>
+        </p:spPr>
+        <p:txBody>
+          <a:bodyPr xmlns:a="http://schemas.openxmlformats.org/drawingml/2006/main"/>
+          <a:lstStyle xmlns:a="http://schemas.openxmlformats.org/drawingml/2006/main">
+            <a:defPPr>
+              <a:defRPr sz="2025" b="0">
+                <a:solidFill>
+                  <a:srgbClr val="142B43"/>
+                </a:solidFill>
+                <a:latin typeface="Arial"/>
+                <a:ea typeface="Arial"/>
+                <a:cs typeface="Arial"/>
+              </a:defRPr>
+            </a:defPPr>
+            <a:lvl1pPr>
+              <a:defRPr sz="2025" b="0">
+                <a:solidFill>
+                  <a:srgbClr val="142B43"/>
+                </a:solidFill>
+                <a:latin typeface="Arial"/>
+                <a:ea typeface="Arial"/>
+                <a:cs typeface="Arial"/>
+              </a:defRPr>
+            </a:lvl1pPr>
+            <a:lvl2pPr>
+              <a:defRPr sz="2025" b="0">
+                <a:solidFill>
+                  <a:srgbClr val="142B43"/>
+                </a:solidFill>
+                <a:latin typeface="Arial"/>
+                <a:ea typeface="Arial"/>
+                <a:cs typeface="Arial"/>
+              </a:defRPr>
+            </a:lvl2pPr>
+            <a:lvl3pPr>
+              <a:defRPr sz="2025" b="0">
+                <a:solidFill>
+                  <a:srgbClr val="142B43"/>
+                </a:solidFill>
+                <a:latin typeface="Arial"/>
+                <a:ea typeface="Arial"/>
+                <a:cs typeface="Arial"/>
+              </a:defRPr>
+            </a:lvl3pPr>
+            <a:lvl4pPr>
+              <a:defRPr sz="2025" b="0">
+                <a:solidFill>
+                  <a:srgbClr val="142B43"/>
+                </a:solidFill>
+                <a:latin typeface="Arial"/>
+                <a:ea typeface="Arial"/>
+                <a:cs typeface="Arial"/>
+              </a:defRPr>
+            </a:lvl4pPr>
+            <a:lvl5pPr>
+              <a:defRPr sz="2025" b="0">
+                <a:solidFill>
+                  <a:srgbClr val="142B43"/>
+                </a:solidFill>
+                <a:latin typeface="Arial"/>
+                <a:ea typeface="Arial"/>
+                <a:cs typeface="Arial"/>
+              </a:defRPr>
+            </a:lvl5pPr>
+            <a:lvl6pPr>
+              <a:defRPr sz="2025" b="0">
+                <a:solidFill>
+                  <a:srgbClr val="142B43"/>
+                </a:solidFill>
+                <a:latin typeface="Arial"/>
+                <a:ea typeface="Arial"/>
+                <a:cs typeface="Arial"/>
+              </a:defRPr>
+            </a:lvl6pPr>
+            <a:lvl7pPr>
+              <a:defRPr sz="2025" b="0">
+                <a:solidFill>
+                  <a:srgbClr val="142B43"/>
+                </a:solidFill>
+                <a:latin typeface="Arial"/>
+                <a:ea typeface="Arial"/>
+                <a:cs typeface="Arial"/>
+              </a:defRPr>
+            </a:lvl7pPr>
+            <a:lvl8pPr>
+              <a:defRPr sz="2025" b="0">
+                <a:solidFill>
+                  <a:srgbClr val="142B43"/>
+                </a:solidFill>
+                <a:latin typeface="Arial"/>
+                <a:ea typeface="Arial"/>
+                <a:cs typeface="Arial"/>
+              </a:defRPr>
+            </a:lvl8pPr>
+            <a:lvl9pPr>
+              <a:defRPr sz="2025" b="0">
+                <a:solidFill>
+                  <a:srgbClr val="142B43"/>
+                </a:solidFill>
+                <a:latin typeface="Arial"/>
+                <a:ea typeface="Arial"/>
+                <a:cs typeface="Arial"/>
+              </a:defRPr>
+            </a:lvl9pPr>
+          </a:lstStyle>
+          <a:p xmlns:a="http://schemas.openxmlformats.org/drawingml/2006/main">
+            <a:pPr>
+              <a:defRPr sz="2025" b="0">
+                <a:solidFill>
+                  <a:srgbClr val="142B43"/>
+                </a:solidFill>
+                <a:latin typeface="Arial"/>
+                <a:ea typeface="Arial"/>
+                <a:cs typeface="Arial"/>
+              </a:defRPr>
+            </a:pPr>
+            <a:r>
+              <a:rPr sz="2025" b="0">
+                <a:solidFill>
+                  <a:srgbClr val="142B43"/>
+                </a:solidFill>
+                <a:latin typeface="Arial"/>
+                <a:ea typeface="Arial"/>
+                <a:cs typeface="Arial"/>
+              </a:rPr>
+              <a:t>Uninitialized read</a:t>
+            </a:r>
+          </a:p>
+          <a:p xmlns:a="http://schemas.openxmlformats.org/drawingml/2006/main">
+            <a:r>
+              <a:t/>
+            </a:r>
+          </a:p>
+          <a:p xmlns:a="http://schemas.openxmlformats.org/drawingml/2006/main">
+            <a:pPr>
+              <a:defRPr sz="2025" b="0">
+                <a:solidFill>
+                  <a:srgbClr val="142B43"/>
+                </a:solidFill>
+                <a:latin typeface="Arial"/>
+                <a:ea typeface="Arial"/>
+                <a:cs typeface="Arial"/>
+              </a:defRPr>
+            </a:pPr>
+            <a:r>
+              <a:rPr sz="2025" b="0">
+                <a:solidFill>
+                  <a:srgbClr val="142B43"/>
+                </a:solidFill>
+                <a:latin typeface="Arial"/>
+                <a:ea typeface="Arial"/>
+                <a:cs typeface="Arial"/>
+              </a:rPr>
+              <a:t>Undeclared assignment</a:t>
+            </a:r>
+          </a:p>
+          <a:p xmlns:a="http://schemas.openxmlformats.org/drawingml/2006/main">
+            <a:r>
+              <a:t/>
+            </a:r>
+          </a:p>
+          <a:p xmlns:a="http://schemas.openxmlformats.org/drawingml/2006/main">
+            <a:pPr>
+              <a:defRPr sz="2025" b="0">
+                <a:solidFill>
+                  <a:srgbClr val="142B43"/>
+                </a:solidFill>
+                <a:latin typeface="Arial"/>
+                <a:ea typeface="Arial"/>
+                <a:cs typeface="Arial"/>
+              </a:defRPr>
+            </a:pPr>
+            <a:r>
+              <a:rPr sz="2025" b="0">
+                <a:solidFill>
+                  <a:srgbClr val="142B43"/>
+                </a:solidFill>
+                <a:latin typeface="Arial"/>
+                <a:ea typeface="Arial"/>
+                <a:cs typeface="Arial"/>
+              </a:rPr>
+              <a:t>Duplicate declaration</a:t>
+            </a:r>
+          </a:p>
+        </p:txBody>
+      </p:sp>
     </p:spTree>
     <p:extLst>
       <p:ext uri="{BB962C8B-B14F-4D97-AF65-F5344CB8AC3E}">
-        <p14:creationId xmlns:p14="http://schemas.microsoft.com/office/powerpoint/2010/main" val="740728610"/>
+        <p14:creationId xmlns:p14="http://schemas.microsoft.com/office/powerpoint/2010/main" val="2106294586"/>
       </p:ext>
     </p:extLst>
   </p:cSld>
@@ -6180,7 +6486,7 @@
           <p:cNvPr id="8" name="COMPILER DESIGN">
             <a:extLst xmlns:a="http://schemas.openxmlformats.org/drawingml/2006/main">
               <a:ext uri="{FF2B5EF4-FFF2-40B4-BE49-F238E27FC236}">
-                <a16:creationId xmlns:a16="http://schemas.microsoft.com/office/drawing/2014/main" id="{27423E1A-2B0A-42B9-B128-E2D4E6EDE5D1}"/>
+                <a16:creationId xmlns:a16="http://schemas.microsoft.com/office/drawing/2014/main" id="{4F0458D9-8EB8-4AE8-9C4F-1008724407DE}"/>
               </a:ext>
             </a:extLst>
           </p:cNvPr>
@@ -6208,7 +6514,7 @@
             <a:defPPr>
               <a:defRPr sz="1125" b="1">
                 <a:solidFill>
-                  <a:srgbClr val="1A6383"/>
+                  <a:srgbClr val="DF6948"/>
                 </a:solidFill>
                 <a:latin typeface="Arial"/>
                 <a:ea typeface="Arial"/>
@@ -6218,7 +6524,7 @@
             <a:lvl1pPr>
               <a:defRPr sz="1125" b="1">
                 <a:solidFill>
-                  <a:srgbClr val="1A6383"/>
+                  <a:srgbClr val="DF6948"/>
                 </a:solidFill>
                 <a:latin typeface="Arial"/>
                 <a:ea typeface="Arial"/>
@@ -6228,7 +6534,7 @@
             <a:lvl2pPr>
               <a:defRPr sz="1125" b="1">
                 <a:solidFill>
-                  <a:srgbClr val="1A6383"/>
+                  <a:srgbClr val="DF6948"/>
                 </a:solidFill>
                 <a:latin typeface="Arial"/>
                 <a:ea typeface="Arial"/>
@@ -6238,7 +6544,7 @@
             <a:lvl3pPr>
               <a:defRPr sz="1125" b="1">
                 <a:solidFill>
-                  <a:srgbClr val="1A6383"/>
+                  <a:srgbClr val="DF6948"/>
                 </a:solidFill>
                 <a:latin typeface="Arial"/>
                 <a:ea typeface="Arial"/>
@@ -6248,7 +6554,7 @@
             <a:lvl4pPr>
               <a:defRPr sz="1125" b="1">
                 <a:solidFill>
-                  <a:srgbClr val="1A6383"/>
+                  <a:srgbClr val="DF6948"/>
                 </a:solidFill>
                 <a:latin typeface="Arial"/>
                 <a:ea typeface="Arial"/>
@@ -6258,7 +6564,7 @@
             <a:lvl5pPr>
               <a:defRPr sz="1125" b="1">
                 <a:solidFill>
-                  <a:srgbClr val="1A6383"/>
+                  <a:srgbClr val="DF6948"/>
                 </a:solidFill>
                 <a:latin typeface="Arial"/>
                 <a:ea typeface="Arial"/>
@@ -6268,7 +6574,7 @@
             <a:lvl6pPr>
               <a:defRPr sz="1125" b="1">
                 <a:solidFill>
-                  <a:srgbClr val="1A6383"/>
+                  <a:srgbClr val="DF6948"/>
                 </a:solidFill>
                 <a:latin typeface="Arial"/>
                 <a:ea typeface="Arial"/>
@@ -6278,7 +6584,7 @@
             <a:lvl7pPr>
               <a:defRPr sz="1125" b="1">
                 <a:solidFill>
-                  <a:srgbClr val="1A6383"/>
+                  <a:srgbClr val="DF6948"/>
                 </a:solidFill>
                 <a:latin typeface="Arial"/>
                 <a:ea typeface="Arial"/>
@@ -6288,7 +6594,7 @@
             <a:lvl8pPr>
               <a:defRPr sz="1125" b="1">
                 <a:solidFill>
-                  <a:srgbClr val="1A6383"/>
+                  <a:srgbClr val="DF6948"/>
                 </a:solidFill>
                 <a:latin typeface="Arial"/>
                 <a:ea typeface="Arial"/>
@@ -6298,7 +6604,7 @@
             <a:lvl9pPr>
               <a:defRPr sz="1125" b="1">
                 <a:solidFill>
-                  <a:srgbClr val="1A6383"/>
+                  <a:srgbClr val="DF6948"/>
                 </a:solidFill>
                 <a:latin typeface="Arial"/>
                 <a:ea typeface="Arial"/>
@@ -6310,7 +6616,7 @@
             <a:pPr>
               <a:defRPr sz="1125" b="1">
                 <a:solidFill>
-                  <a:srgbClr val="1A6383"/>
+                  <a:srgbClr val="DF6948"/>
                 </a:solidFill>
                 <a:latin typeface="Arial"/>
                 <a:ea typeface="Arial"/>
@@ -6320,7 +6626,7 @@
             <a:r>
               <a:rPr sz="1125" b="1">
                 <a:solidFill>
-                  <a:srgbClr val="1A6383"/>
+                  <a:srgbClr val="DF6948"/>
                 </a:solidFill>
                 <a:latin typeface="Arial"/>
                 <a:ea typeface="Arial"/>
@@ -6336,7 +6642,7 @@
           <p:cNvPr id="2" name="Slide title">
             <a:extLst xmlns:a="http://schemas.openxmlformats.org/drawingml/2006/main">
               <a:ext uri="{FF2B5EF4-FFF2-40B4-BE49-F238E27FC236}">
-                <a16:creationId xmlns:a16="http://schemas.microsoft.com/office/drawing/2014/main" id="{E5FF73D5-111B-42D2-A1FE-A646BC213CD5}"/>
+                <a16:creationId xmlns:a16="http://schemas.microsoft.com/office/drawing/2014/main" id="{71444CD7-0C0F-4E53-A39C-D6BFAEB8ADAF}"/>
               </a:ext>
             </a:extLst>
           </p:cNvPr>
@@ -6482,17 +6788,17 @@
                 <a:ea typeface="Arial"/>
                 <a:cs typeface="Arial"/>
               </a:rPr>
-              <a:t>Testing and scope</a:t>
+              <a:t>Verification and safe behavior</a:t>
             </a:r>
           </a:p>
         </p:txBody>
       </p:sp>
       <p:sp>
         <p:nvSpPr>
-          <p:cNvPr id="3" name="String Processing Mini Compiler in ">
+          <p:cNvPr id="3" name="StringLab Browser Compiler Front En">
             <a:extLst xmlns:a="http://schemas.openxmlformats.org/drawingml/2006/main">
               <a:ext uri="{FF2B5EF4-FFF2-40B4-BE49-F238E27FC236}">
-                <a16:creationId xmlns:a16="http://schemas.microsoft.com/office/drawing/2014/main" id="{AC9E0FC2-3E38-46F3-AD7F-8B6475AC4203}"/>
+                <a16:creationId xmlns:a16="http://schemas.microsoft.com/office/drawing/2014/main" id="{9933B1DD-CACD-47DF-83C9-6A5F71A69C73}"/>
               </a:ext>
             </a:extLst>
           </p:cNvPr>
@@ -6638,7 +6944,7 @@
                 <a:ea typeface="Arial"/>
                 <a:cs typeface="Arial"/>
               </a:rPr>
-              <a:t>String Processing Mini Compiler in C</a:t>
+              <a:t>StringLab Browser Compiler Front End</a:t>
             </a:r>
           </a:p>
         </p:txBody>
@@ -6648,7 +6954,7 @@
           <p:cNvPr id="4" name="11">
             <a:extLst xmlns:a="http://schemas.openxmlformats.org/drawingml/2006/main">
               <a:ext uri="{FF2B5EF4-FFF2-40B4-BE49-F238E27FC236}">
-                <a16:creationId xmlns:a16="http://schemas.microsoft.com/office/drawing/2014/main" id="{A15C54B4-3FB4-45A5-91B2-35D82BCA287E}"/>
+                <a16:creationId xmlns:a16="http://schemas.microsoft.com/office/drawing/2014/main" id="{BE6B96D0-F9D3-4755-ADB8-4F557FBEA5A7}"/>
               </a:ext>
             </a:extLst>
           </p:cNvPr>
@@ -6801,10 +7107,10 @@
       </p:sp>
       <p:sp>
         <p:nvSpPr>
-          <p:cNvPr id="5" name="26 automated test methods pass">
+          <p:cNvPr id="5" name="29 core tests pass">
             <a:extLst xmlns:a="http://schemas.openxmlformats.org/drawingml/2006/main">
               <a:ext uri="{FF2B5EF4-FFF2-40B4-BE49-F238E27FC236}">
-                <a16:creationId xmlns:a16="http://schemas.microsoft.com/office/drawing/2014/main" id="{4A64941A-2F0D-41A2-8AC8-35721C65CE59}"/>
+                <a16:creationId xmlns:a16="http://schemas.microsoft.com/office/drawing/2014/main" id="{38736723-0FE5-4304-AFA5-4F7D1CD4776F}"/>
               </a:ext>
             </a:extLst>
           </p:cNvPr>
@@ -6815,7 +7121,7 @@
         </p:nvSpPr>
         <p:spPr>
           <a:xfrm xmlns:a="http://schemas.openxmlformats.org/drawingml/2006/main">
-            <a:off x="685800" y="1866900"/>
+            <a:off x="685800" y="1895475"/>
             <a:ext cx="10820400" cy="714375"/>
           </a:xfrm>
           <a:prstGeom xmlns:a="http://schemas.openxmlformats.org/drawingml/2006/main" prst="rect">
@@ -6830,7 +7136,7 @@
           <a:bodyPr xmlns:a="http://schemas.openxmlformats.org/drawingml/2006/main"/>
           <a:lstStyle xmlns:a="http://schemas.openxmlformats.org/drawingml/2006/main">
             <a:defPPr>
-              <a:defRPr sz="3000" b="1">
+              <a:defRPr sz="3075" b="1">
                 <a:solidFill>
                   <a:srgbClr val="142B43"/>
                 </a:solidFill>
@@ -6840,7 +7146,7 @@
               </a:defRPr>
             </a:defPPr>
             <a:lvl1pPr>
-              <a:defRPr sz="3000" b="1">
+              <a:defRPr sz="3075" b="1">
                 <a:solidFill>
                   <a:srgbClr val="142B43"/>
                 </a:solidFill>
@@ -6850,7 +7156,7 @@
               </a:defRPr>
             </a:lvl1pPr>
             <a:lvl2pPr>
-              <a:defRPr sz="3000" b="1">
+              <a:defRPr sz="3075" b="1">
                 <a:solidFill>
                   <a:srgbClr val="142B43"/>
                 </a:solidFill>
@@ -6860,7 +7166,7 @@
               </a:defRPr>
             </a:lvl2pPr>
             <a:lvl3pPr>
-              <a:defRPr sz="3000" b="1">
+              <a:defRPr sz="3075" b="1">
                 <a:solidFill>
                   <a:srgbClr val="142B43"/>
                 </a:solidFill>
@@ -6870,7 +7176,7 @@
               </a:defRPr>
             </a:lvl3pPr>
             <a:lvl4pPr>
-              <a:defRPr sz="3000" b="1">
+              <a:defRPr sz="3075" b="1">
                 <a:solidFill>
                   <a:srgbClr val="142B43"/>
                 </a:solidFill>
@@ -6880,7 +7186,7 @@
               </a:defRPr>
             </a:lvl4pPr>
             <a:lvl5pPr>
-              <a:defRPr sz="3000" b="1">
+              <a:defRPr sz="3075" b="1">
                 <a:solidFill>
                   <a:srgbClr val="142B43"/>
                 </a:solidFill>
@@ -6890,7 +7196,7 @@
               </a:defRPr>
             </a:lvl5pPr>
             <a:lvl6pPr>
-              <a:defRPr sz="3000" b="1">
+              <a:defRPr sz="3075" b="1">
                 <a:solidFill>
                   <a:srgbClr val="142B43"/>
                 </a:solidFill>
@@ -6900,7 +7206,7 @@
               </a:defRPr>
             </a:lvl6pPr>
             <a:lvl7pPr>
-              <a:defRPr sz="3000" b="1">
+              <a:defRPr sz="3075" b="1">
                 <a:solidFill>
                   <a:srgbClr val="142B43"/>
                 </a:solidFill>
@@ -6910,7 +7216,7 @@
               </a:defRPr>
             </a:lvl7pPr>
             <a:lvl8pPr>
-              <a:defRPr sz="3000" b="1">
+              <a:defRPr sz="3075" b="1">
                 <a:solidFill>
                   <a:srgbClr val="142B43"/>
                 </a:solidFill>
@@ -6920,7 +7226,7 @@
               </a:defRPr>
             </a:lvl8pPr>
             <a:lvl9pPr>
-              <a:defRPr sz="3000" b="1">
+              <a:defRPr sz="3075" b="1">
                 <a:solidFill>
                   <a:srgbClr val="142B43"/>
                 </a:solidFill>
@@ -6932,7 +7238,7 @@
           </a:lstStyle>
           <a:p xmlns:a="http://schemas.openxmlformats.org/drawingml/2006/main">
             <a:pPr>
-              <a:defRPr sz="3000" b="1">
+              <a:defRPr sz="3075" b="1">
                 <a:solidFill>
                   <a:srgbClr val="142B43"/>
                 </a:solidFill>
@@ -6942,7 +7248,7 @@
               </a:defRPr>
             </a:pPr>
             <a:r>
-              <a:rPr sz="3000" b="1">
+              <a:rPr sz="3075" b="1">
                 <a:solidFill>
                   <a:srgbClr val="142B43"/>
                 </a:solidFill>
@@ -6950,17 +7256,17 @@
                 <a:ea typeface="Arial"/>
                 <a:cs typeface="Arial"/>
               </a:rPr>
-              <a:t>26 automated test methods pass</a:t>
+              <a:t>29 core tests pass</a:t>
             </a:r>
           </a:p>
         </p:txBody>
       </p:sp>
       <p:sp>
         <p:nvSpPr>
-          <p:cNvPr id="6" name="Valid programs, error phases, sourc">
+          <p:cNvPr id="6" name="Browser checks cover the complete d">
             <a:extLst xmlns:a="http://schemas.openxmlformats.org/drawingml/2006/main">
               <a:ext uri="{FF2B5EF4-FFF2-40B4-BE49-F238E27FC236}">
-                <a16:creationId xmlns:a16="http://schemas.microsoft.com/office/drawing/2014/main" id="{24C64396-E9A2-47DD-9079-3B809F2F5E10}"/>
+                <a16:creationId xmlns:a16="http://schemas.microsoft.com/office/drawing/2014/main" id="{2F0C92CE-C2F0-4378-9EB1-D9FC4DF614E8}"/>
               </a:ext>
             </a:extLst>
           </p:cNvPr>
@@ -6971,8 +7277,8 @@
         </p:nvSpPr>
         <p:spPr>
           <a:xfrm xmlns:a="http://schemas.openxmlformats.org/drawingml/2006/main">
-            <a:off x="685800" y="2876550"/>
-            <a:ext cx="10820400" cy="1238250"/>
+            <a:off x="685800" y="2933700"/>
+            <a:ext cx="10820400" cy="714375"/>
           </a:xfrm>
           <a:prstGeom xmlns:a="http://schemas.openxmlformats.org/drawingml/2006/main" prst="rect">
             <a:avLst/>
@@ -7106,40 +7412,17 @@
                 <a:ea typeface="Arial"/>
                 <a:cs typeface="Arial"/>
               </a:rPr>
-              <a:t>Valid programs, error phases, source locations,</a:t>
-            </a:r>
-          </a:p>
-          <a:p xmlns:a="http://schemas.openxmlformats.org/drawingml/2006/main">
-            <a:pPr>
-              <a:defRPr sz="2250" b="0">
-                <a:solidFill>
-                  <a:srgbClr val="142B43"/>
-                </a:solidFill>
-                <a:latin typeface="Arial"/>
-                <a:ea typeface="Arial"/>
-                <a:cs typeface="Arial"/>
-              </a:defRPr>
-            </a:pPr>
-            <a:r>
-              <a:rPr sz="2250" b="0">
-                <a:solidFill>
-                  <a:srgbClr val="142B43"/>
-                </a:solidFill>
-                <a:latin typeface="Arial"/>
-                <a:ea typeface="Arial"/>
-                <a:cs typeface="Arial"/>
-              </a:rPr>
-              <a:t>fixed capacities, file handling and AST export.</a:t>
+              <a:t>Browser checks cover the complete demonstration flow.</a:t>
             </a:r>
           </a:p>
         </p:txBody>
       </p:sp>
       <p:sp>
         <p:nvSpPr>
-          <p:cNvPr id="7" name="Scope: one string type and one glob">
+          <p:cNvPr id="7" name="No eval or Function. Source and out">
             <a:extLst xmlns:a="http://schemas.openxmlformats.org/drawingml/2006/main">
               <a:ext uri="{FF2B5EF4-FFF2-40B4-BE49-F238E27FC236}">
-                <a16:creationId xmlns:a16="http://schemas.microsoft.com/office/drawing/2014/main" id="{83994E9F-4EDA-47ED-B185-EBF2F307B627}"/>
+                <a16:creationId xmlns:a16="http://schemas.microsoft.com/office/drawing/2014/main" id="{33AC8AD2-F28A-42F3-A85E-6466454DD715}"/>
               </a:ext>
             </a:extLst>
           </p:cNvPr>
@@ -7150,8 +7433,8 @@
         </p:nvSpPr>
         <p:spPr>
           <a:xfrm xmlns:a="http://schemas.openxmlformats.org/drawingml/2006/main">
-            <a:off x="685800" y="4629150"/>
-            <a:ext cx="10820400" cy="1095375"/>
+            <a:off x="685800" y="4162425"/>
+            <a:ext cx="10820400" cy="1190625"/>
           </a:xfrm>
           <a:prstGeom xmlns:a="http://schemas.openxmlformats.org/drawingml/2006/main" prst="rect">
             <a:avLst/>
@@ -7285,7 +7568,7 @@
                 <a:ea typeface="Arial"/>
                 <a:cs typeface="Arial"/>
               </a:rPr>
-              <a:t>Scope: one string type and one global scope.</a:t>
+              <a:t>No eval or Function. Source and output stay text.</a:t>
             </a:r>
           </a:p>
           <a:p xmlns:a="http://schemas.openxmlformats.org/drawingml/2006/main">
@@ -7308,7 +7591,7 @@
                 <a:ea typeface="Arial"/>
                 <a:cs typeface="Arial"/>
               </a:rPr>
-              <a:t>No input, loops, functions or machine-code generation.</a:t>
+              <a:t>Rejected programs never execute the preview.</a:t>
             </a:r>
           </a:p>
         </p:txBody>
@@ -7316,7 +7599,7 @@
     </p:spTree>
     <p:extLst>
       <p:ext uri="{BB962C8B-B14F-4D97-AF65-F5344CB8AC3E}">
-        <p14:creationId xmlns:p14="http://schemas.microsoft.com/office/powerpoint/2010/main" val="1156715403"/>
+        <p14:creationId xmlns:p14="http://schemas.microsoft.com/office/powerpoint/2010/main" val="971623367"/>
       </p:ext>
     </p:extLst>
   </p:cSld>
@@ -7347,7 +7630,7 @@
           <p:cNvPr id="8" name="COMPILER DESIGN">
             <a:extLst xmlns:a="http://schemas.openxmlformats.org/drawingml/2006/main">
               <a:ext uri="{FF2B5EF4-FFF2-40B4-BE49-F238E27FC236}">
-                <a16:creationId xmlns:a16="http://schemas.microsoft.com/office/drawing/2014/main" id="{16306CF0-CD4A-47B1-A2AA-3707E1E7522E}"/>
+                <a16:creationId xmlns:a16="http://schemas.microsoft.com/office/drawing/2014/main" id="{54712460-E44D-4800-9731-6B8271F6A7B3}"/>
               </a:ext>
             </a:extLst>
           </p:cNvPr>
@@ -7375,7 +7658,7 @@
             <a:defPPr>
               <a:defRPr sz="1125" b="1">
                 <a:solidFill>
-                  <a:srgbClr val="1A6383"/>
+                  <a:srgbClr val="DF6948"/>
                 </a:solidFill>
                 <a:latin typeface="Arial"/>
                 <a:ea typeface="Arial"/>
@@ -7385,7 +7668,7 @@
             <a:lvl1pPr>
               <a:defRPr sz="1125" b="1">
                 <a:solidFill>
-                  <a:srgbClr val="1A6383"/>
+                  <a:srgbClr val="DF6948"/>
                 </a:solidFill>
                 <a:latin typeface="Arial"/>
                 <a:ea typeface="Arial"/>
@@ -7395,7 +7678,7 @@
             <a:lvl2pPr>
               <a:defRPr sz="1125" b="1">
                 <a:solidFill>
-                  <a:srgbClr val="1A6383"/>
+                  <a:srgbClr val="DF6948"/>
                 </a:solidFill>
                 <a:latin typeface="Arial"/>
                 <a:ea typeface="Arial"/>
@@ -7405,7 +7688,7 @@
             <a:lvl3pPr>
               <a:defRPr sz="1125" b="1">
                 <a:solidFill>
-                  <a:srgbClr val="1A6383"/>
+                  <a:srgbClr val="DF6948"/>
                 </a:solidFill>
                 <a:latin typeface="Arial"/>
                 <a:ea typeface="Arial"/>
@@ -7415,7 +7698,7 @@
             <a:lvl4pPr>
               <a:defRPr sz="1125" b="1">
                 <a:solidFill>
-                  <a:srgbClr val="1A6383"/>
+                  <a:srgbClr val="DF6948"/>
                 </a:solidFill>
                 <a:latin typeface="Arial"/>
                 <a:ea typeface="Arial"/>
@@ -7425,7 +7708,7 @@
             <a:lvl5pPr>
               <a:defRPr sz="1125" b="1">
                 <a:solidFill>
-                  <a:srgbClr val="1A6383"/>
+                  <a:srgbClr val="DF6948"/>
                 </a:solidFill>
                 <a:latin typeface="Arial"/>
                 <a:ea typeface="Arial"/>
@@ -7435,7 +7718,7 @@
             <a:lvl6pPr>
               <a:defRPr sz="1125" b="1">
                 <a:solidFill>
-                  <a:srgbClr val="1A6383"/>
+                  <a:srgbClr val="DF6948"/>
                 </a:solidFill>
                 <a:latin typeface="Arial"/>
                 <a:ea typeface="Arial"/>
@@ -7445,7 +7728,7 @@
             <a:lvl7pPr>
               <a:defRPr sz="1125" b="1">
                 <a:solidFill>
-                  <a:srgbClr val="1A6383"/>
+                  <a:srgbClr val="DF6948"/>
                 </a:solidFill>
                 <a:latin typeface="Arial"/>
                 <a:ea typeface="Arial"/>
@@ -7455,7 +7738,7 @@
             <a:lvl8pPr>
               <a:defRPr sz="1125" b="1">
                 <a:solidFill>
-                  <a:srgbClr val="1A6383"/>
+                  <a:srgbClr val="DF6948"/>
                 </a:solidFill>
                 <a:latin typeface="Arial"/>
                 <a:ea typeface="Arial"/>
@@ -7465,7 +7748,7 @@
             <a:lvl9pPr>
               <a:defRPr sz="1125" b="1">
                 <a:solidFill>
-                  <a:srgbClr val="1A6383"/>
+                  <a:srgbClr val="DF6948"/>
                 </a:solidFill>
                 <a:latin typeface="Arial"/>
                 <a:ea typeface="Arial"/>
@@ -7477,7 +7760,7 @@
             <a:pPr>
               <a:defRPr sz="1125" b="1">
                 <a:solidFill>
-                  <a:srgbClr val="1A6383"/>
+                  <a:srgbClr val="DF6948"/>
                 </a:solidFill>
                 <a:latin typeface="Arial"/>
                 <a:ea typeface="Arial"/>
@@ -7487,7 +7770,7 @@
             <a:r>
               <a:rPr sz="1125" b="1">
                 <a:solidFill>
-                  <a:srgbClr val="1A6383"/>
+                  <a:srgbClr val="DF6948"/>
                 </a:solidFill>
                 <a:latin typeface="Arial"/>
                 <a:ea typeface="Arial"/>
@@ -7503,7 +7786,7 @@
           <p:cNvPr id="2" name="Slide title">
             <a:extLst xmlns:a="http://schemas.openxmlformats.org/drawingml/2006/main">
               <a:ext uri="{FF2B5EF4-FFF2-40B4-BE49-F238E27FC236}">
-                <a16:creationId xmlns:a16="http://schemas.microsoft.com/office/drawing/2014/main" id="{1CBBD499-FCF1-49F9-96FD-F4F5A63BFB28}"/>
+                <a16:creationId xmlns:a16="http://schemas.microsoft.com/office/drawing/2014/main" id="{68296714-BC57-4189-AFB7-6D5A1768F0AF}"/>
               </a:ext>
             </a:extLst>
           </p:cNvPr>
@@ -7649,17 +7932,17 @@
                 <a:ea typeface="Arial"/>
                 <a:cs typeface="Arial"/>
               </a:rPr>
-              <a:t>Individual contributions</a:t>
+              <a:t>Static deployment</a:t>
             </a:r>
           </a:p>
         </p:txBody>
       </p:sp>
       <p:sp>
         <p:nvSpPr>
-          <p:cNvPr id="3" name="String Processing Mini Compiler in ">
+          <p:cNvPr id="3" name="StringLab Browser Compiler Front En">
             <a:extLst xmlns:a="http://schemas.openxmlformats.org/drawingml/2006/main">
               <a:ext uri="{FF2B5EF4-FFF2-40B4-BE49-F238E27FC236}">
-                <a16:creationId xmlns:a16="http://schemas.microsoft.com/office/drawing/2014/main" id="{19BFFB85-0CD4-4A1E-918F-7BFFC9FB2588}"/>
+                <a16:creationId xmlns:a16="http://schemas.microsoft.com/office/drawing/2014/main" id="{9027B584-A602-4415-A24B-B46FC6B30D44}"/>
               </a:ext>
             </a:extLst>
           </p:cNvPr>
@@ -7805,7 +8088,7 @@
                 <a:ea typeface="Arial"/>
                 <a:cs typeface="Arial"/>
               </a:rPr>
-              <a:t>String Processing Mini Compiler in C</a:t>
+              <a:t>StringLab Browser Compiler Front End</a:t>
             </a:r>
           </a:p>
         </p:txBody>
@@ -7815,7 +8098,7 @@
           <p:cNvPr id="4" name="12">
             <a:extLst xmlns:a="http://schemas.openxmlformats.org/drawingml/2006/main">
               <a:ext uri="{FF2B5EF4-FFF2-40B4-BE49-F238E27FC236}">
-                <a16:creationId xmlns:a16="http://schemas.microsoft.com/office/drawing/2014/main" id="{45877D0C-6F15-4D36-95C1-E72F59C118EE}"/>
+                <a16:creationId xmlns:a16="http://schemas.microsoft.com/office/drawing/2014/main" id="{2AD23E10-46F2-4C00-A844-06D5BC261130}"/>
               </a:ext>
             </a:extLst>
           </p:cNvPr>
@@ -7968,10 +8251,1177 @@
       </p:sp>
       <p:sp>
         <p:nvSpPr>
+          <p:cNvPr id="5" name="Open index.html directly">
+            <a:extLst xmlns:a="http://schemas.openxmlformats.org/drawingml/2006/main">
+              <a:ext uri="{FF2B5EF4-FFF2-40B4-BE49-F238E27FC236}">
+                <a16:creationId xmlns:a16="http://schemas.microsoft.com/office/drawing/2014/main" id="{119C892E-C27B-498E-B5DC-F8999173DFA3}"/>
+              </a:ext>
+            </a:extLst>
+          </p:cNvPr>
+          <p:cNvSpPr>
+            <a:spLocks xmlns:a="http://schemas.openxmlformats.org/drawingml/2006/main" noGrp="1"/>
+          </p:cNvSpPr>
+          <p:nvPr/>
+        </p:nvSpPr>
+        <p:spPr>
+          <a:xfrm xmlns:a="http://schemas.openxmlformats.org/drawingml/2006/main">
+            <a:off x="685800" y="1857375"/>
+            <a:ext cx="10820400" cy="666750"/>
+          </a:xfrm>
+          <a:prstGeom xmlns:a="http://schemas.openxmlformats.org/drawingml/2006/main" prst="rect">
+            <a:avLst/>
+          </a:prstGeom>
+          <a:noFill xmlns:a="http://schemas.openxmlformats.org/drawingml/2006/main"/>
+          <a:ln xmlns:a="http://schemas.openxmlformats.org/drawingml/2006/main" w="0">
+            <a:noFill/>
+          </a:ln>
+        </p:spPr>
+        <p:txBody>
+          <a:bodyPr xmlns:a="http://schemas.openxmlformats.org/drawingml/2006/main"/>
+          <a:lstStyle xmlns:a="http://schemas.openxmlformats.org/drawingml/2006/main">
+            <a:defPPr>
+              <a:defRPr sz="2925" b="1">
+                <a:solidFill>
+                  <a:srgbClr val="142B43"/>
+                </a:solidFill>
+                <a:latin typeface="Arial"/>
+                <a:ea typeface="Arial"/>
+                <a:cs typeface="Arial"/>
+              </a:defRPr>
+            </a:defPPr>
+            <a:lvl1pPr>
+              <a:defRPr sz="2925" b="1">
+                <a:solidFill>
+                  <a:srgbClr val="142B43"/>
+                </a:solidFill>
+                <a:latin typeface="Arial"/>
+                <a:ea typeface="Arial"/>
+                <a:cs typeface="Arial"/>
+              </a:defRPr>
+            </a:lvl1pPr>
+            <a:lvl2pPr>
+              <a:defRPr sz="2925" b="1">
+                <a:solidFill>
+                  <a:srgbClr val="142B43"/>
+                </a:solidFill>
+                <a:latin typeface="Arial"/>
+                <a:ea typeface="Arial"/>
+                <a:cs typeface="Arial"/>
+              </a:defRPr>
+            </a:lvl2pPr>
+            <a:lvl3pPr>
+              <a:defRPr sz="2925" b="1">
+                <a:solidFill>
+                  <a:srgbClr val="142B43"/>
+                </a:solidFill>
+                <a:latin typeface="Arial"/>
+                <a:ea typeface="Arial"/>
+                <a:cs typeface="Arial"/>
+              </a:defRPr>
+            </a:lvl3pPr>
+            <a:lvl4pPr>
+              <a:defRPr sz="2925" b="1">
+                <a:solidFill>
+                  <a:srgbClr val="142B43"/>
+                </a:solidFill>
+                <a:latin typeface="Arial"/>
+                <a:ea typeface="Arial"/>
+                <a:cs typeface="Arial"/>
+              </a:defRPr>
+            </a:lvl4pPr>
+            <a:lvl5pPr>
+              <a:defRPr sz="2925" b="1">
+                <a:solidFill>
+                  <a:srgbClr val="142B43"/>
+                </a:solidFill>
+                <a:latin typeface="Arial"/>
+                <a:ea typeface="Arial"/>
+                <a:cs typeface="Arial"/>
+              </a:defRPr>
+            </a:lvl5pPr>
+            <a:lvl6pPr>
+              <a:defRPr sz="2925" b="1">
+                <a:solidFill>
+                  <a:srgbClr val="142B43"/>
+                </a:solidFill>
+                <a:latin typeface="Arial"/>
+                <a:ea typeface="Arial"/>
+                <a:cs typeface="Arial"/>
+              </a:defRPr>
+            </a:lvl6pPr>
+            <a:lvl7pPr>
+              <a:defRPr sz="2925" b="1">
+                <a:solidFill>
+                  <a:srgbClr val="142B43"/>
+                </a:solidFill>
+                <a:latin typeface="Arial"/>
+                <a:ea typeface="Arial"/>
+                <a:cs typeface="Arial"/>
+              </a:defRPr>
+            </a:lvl7pPr>
+            <a:lvl8pPr>
+              <a:defRPr sz="2925" b="1">
+                <a:solidFill>
+                  <a:srgbClr val="142B43"/>
+                </a:solidFill>
+                <a:latin typeface="Arial"/>
+                <a:ea typeface="Arial"/>
+                <a:cs typeface="Arial"/>
+              </a:defRPr>
+            </a:lvl8pPr>
+            <a:lvl9pPr>
+              <a:defRPr sz="2925" b="1">
+                <a:solidFill>
+                  <a:srgbClr val="142B43"/>
+                </a:solidFill>
+                <a:latin typeface="Arial"/>
+                <a:ea typeface="Arial"/>
+                <a:cs typeface="Arial"/>
+              </a:defRPr>
+            </a:lvl9pPr>
+          </a:lstStyle>
+          <a:p xmlns:a="http://schemas.openxmlformats.org/drawingml/2006/main">
+            <a:pPr>
+              <a:defRPr sz="2925" b="1">
+                <a:solidFill>
+                  <a:srgbClr val="142B43"/>
+                </a:solidFill>
+                <a:latin typeface="Arial"/>
+                <a:ea typeface="Arial"/>
+                <a:cs typeface="Arial"/>
+              </a:defRPr>
+            </a:pPr>
+            <a:r>
+              <a:rPr sz="2925" b="1">
+                <a:solidFill>
+                  <a:srgbClr val="142B43"/>
+                </a:solidFill>
+                <a:latin typeface="Arial"/>
+                <a:ea typeface="Arial"/>
+                <a:cs typeface="Arial"/>
+              </a:rPr>
+              <a:t>Open index.html directly</a:t>
+            </a:r>
+          </a:p>
+        </p:txBody>
+      </p:sp>
+      <p:sp>
+        <p:nvSpPr>
+          <p:cNvPr id="6" name="Or upload the prepared dist folder ">
+            <a:extLst xmlns:a="http://schemas.openxmlformats.org/drawingml/2006/main">
+              <a:ext uri="{FF2B5EF4-FFF2-40B4-BE49-F238E27FC236}">
+                <a16:creationId xmlns:a16="http://schemas.microsoft.com/office/drawing/2014/main" id="{CF246FA6-C18D-4365-A326-167990C84617}"/>
+              </a:ext>
+            </a:extLst>
+          </p:cNvPr>
+          <p:cNvSpPr>
+            <a:spLocks xmlns:a="http://schemas.openxmlformats.org/drawingml/2006/main" noGrp="1"/>
+          </p:cNvSpPr>
+          <p:nvPr/>
+        </p:nvSpPr>
+        <p:spPr>
+          <a:xfrm xmlns:a="http://schemas.openxmlformats.org/drawingml/2006/main">
+            <a:off x="685800" y="2943225"/>
+            <a:ext cx="10820400" cy="619125"/>
+          </a:xfrm>
+          <a:prstGeom xmlns:a="http://schemas.openxmlformats.org/drawingml/2006/main" prst="rect">
+            <a:avLst/>
+          </a:prstGeom>
+          <a:noFill xmlns:a="http://schemas.openxmlformats.org/drawingml/2006/main"/>
+          <a:ln xmlns:a="http://schemas.openxmlformats.org/drawingml/2006/main" w="0">
+            <a:noFill/>
+          </a:ln>
+        </p:spPr>
+        <p:txBody>
+          <a:bodyPr xmlns:a="http://schemas.openxmlformats.org/drawingml/2006/main"/>
+          <a:lstStyle xmlns:a="http://schemas.openxmlformats.org/drawingml/2006/main">
+            <a:defPPr>
+              <a:defRPr sz="2325" b="0">
+                <a:solidFill>
+                  <a:srgbClr val="142B43"/>
+                </a:solidFill>
+                <a:latin typeface="Arial"/>
+                <a:ea typeface="Arial"/>
+                <a:cs typeface="Arial"/>
+              </a:defRPr>
+            </a:defPPr>
+            <a:lvl1pPr>
+              <a:defRPr sz="2325" b="0">
+                <a:solidFill>
+                  <a:srgbClr val="142B43"/>
+                </a:solidFill>
+                <a:latin typeface="Arial"/>
+                <a:ea typeface="Arial"/>
+                <a:cs typeface="Arial"/>
+              </a:defRPr>
+            </a:lvl1pPr>
+            <a:lvl2pPr>
+              <a:defRPr sz="2325" b="0">
+                <a:solidFill>
+                  <a:srgbClr val="142B43"/>
+                </a:solidFill>
+                <a:latin typeface="Arial"/>
+                <a:ea typeface="Arial"/>
+                <a:cs typeface="Arial"/>
+              </a:defRPr>
+            </a:lvl2pPr>
+            <a:lvl3pPr>
+              <a:defRPr sz="2325" b="0">
+                <a:solidFill>
+                  <a:srgbClr val="142B43"/>
+                </a:solidFill>
+                <a:latin typeface="Arial"/>
+                <a:ea typeface="Arial"/>
+                <a:cs typeface="Arial"/>
+              </a:defRPr>
+            </a:lvl3pPr>
+            <a:lvl4pPr>
+              <a:defRPr sz="2325" b="0">
+                <a:solidFill>
+                  <a:srgbClr val="142B43"/>
+                </a:solidFill>
+                <a:latin typeface="Arial"/>
+                <a:ea typeface="Arial"/>
+                <a:cs typeface="Arial"/>
+              </a:defRPr>
+            </a:lvl4pPr>
+            <a:lvl5pPr>
+              <a:defRPr sz="2325" b="0">
+                <a:solidFill>
+                  <a:srgbClr val="142B43"/>
+                </a:solidFill>
+                <a:latin typeface="Arial"/>
+                <a:ea typeface="Arial"/>
+                <a:cs typeface="Arial"/>
+              </a:defRPr>
+            </a:lvl5pPr>
+            <a:lvl6pPr>
+              <a:defRPr sz="2325" b="0">
+                <a:solidFill>
+                  <a:srgbClr val="142B43"/>
+                </a:solidFill>
+                <a:latin typeface="Arial"/>
+                <a:ea typeface="Arial"/>
+                <a:cs typeface="Arial"/>
+              </a:defRPr>
+            </a:lvl6pPr>
+            <a:lvl7pPr>
+              <a:defRPr sz="2325" b="0">
+                <a:solidFill>
+                  <a:srgbClr val="142B43"/>
+                </a:solidFill>
+                <a:latin typeface="Arial"/>
+                <a:ea typeface="Arial"/>
+                <a:cs typeface="Arial"/>
+              </a:defRPr>
+            </a:lvl7pPr>
+            <a:lvl8pPr>
+              <a:defRPr sz="2325" b="0">
+                <a:solidFill>
+                  <a:srgbClr val="142B43"/>
+                </a:solidFill>
+                <a:latin typeface="Arial"/>
+                <a:ea typeface="Arial"/>
+                <a:cs typeface="Arial"/>
+              </a:defRPr>
+            </a:lvl8pPr>
+            <a:lvl9pPr>
+              <a:defRPr sz="2325" b="0">
+                <a:solidFill>
+                  <a:srgbClr val="142B43"/>
+                </a:solidFill>
+                <a:latin typeface="Arial"/>
+                <a:ea typeface="Arial"/>
+                <a:cs typeface="Arial"/>
+              </a:defRPr>
+            </a:lvl9pPr>
+          </a:lstStyle>
+          <a:p xmlns:a="http://schemas.openxmlformats.org/drawingml/2006/main">
+            <a:pPr>
+              <a:defRPr sz="2325" b="0">
+                <a:solidFill>
+                  <a:srgbClr val="142B43"/>
+                </a:solidFill>
+                <a:latin typeface="Arial"/>
+                <a:ea typeface="Arial"/>
+                <a:cs typeface="Arial"/>
+              </a:defRPr>
+            </a:pPr>
+            <a:r>
+              <a:rPr sz="2325" b="0">
+                <a:solidFill>
+                  <a:srgbClr val="142B43"/>
+                </a:solidFill>
+                <a:latin typeface="Arial"/>
+                <a:ea typeface="Arial"/>
+                <a:cs typeface="Arial"/>
+              </a:rPr>
+              <a:t>Or upload the prepared dist folder to a static host.</a:t>
+            </a:r>
+          </a:p>
+        </p:txBody>
+      </p:sp>
+      <p:sp>
+        <p:nvSpPr>
+          <p:cNvPr id="7" name="HTML, CSS and JavaScript run in the">
+            <a:extLst xmlns:a="http://schemas.openxmlformats.org/drawingml/2006/main">
+              <a:ext uri="{FF2B5EF4-FFF2-40B4-BE49-F238E27FC236}">
+                <a16:creationId xmlns:a16="http://schemas.microsoft.com/office/drawing/2014/main" id="{8A82B43E-B119-46FC-BB2F-5F680921D495}"/>
+              </a:ext>
+            </a:extLst>
+          </p:cNvPr>
+          <p:cNvSpPr>
+            <a:spLocks xmlns:a="http://schemas.openxmlformats.org/drawingml/2006/main" noGrp="1"/>
+          </p:cNvSpPr>
+          <p:nvPr/>
+        </p:nvSpPr>
+        <p:spPr>
+          <a:xfrm xmlns:a="http://schemas.openxmlformats.org/drawingml/2006/main">
+            <a:off x="685800" y="4114800"/>
+            <a:ext cx="10820400" cy="1524000"/>
+          </a:xfrm>
+          <a:prstGeom xmlns:a="http://schemas.openxmlformats.org/drawingml/2006/main" prst="rect">
+            <a:avLst/>
+          </a:prstGeom>
+          <a:noFill xmlns:a="http://schemas.openxmlformats.org/drawingml/2006/main"/>
+          <a:ln xmlns:a="http://schemas.openxmlformats.org/drawingml/2006/main" w="0">
+            <a:noFill/>
+          </a:ln>
+        </p:spPr>
+        <p:txBody>
+          <a:bodyPr xmlns:a="http://schemas.openxmlformats.org/drawingml/2006/main"/>
+          <a:lstStyle xmlns:a="http://schemas.openxmlformats.org/drawingml/2006/main">
+            <a:defPPr>
+              <a:defRPr sz="2175" b="0">
+                <a:solidFill>
+                  <a:srgbClr val="52667B"/>
+                </a:solidFill>
+                <a:latin typeface="Arial"/>
+                <a:ea typeface="Arial"/>
+                <a:cs typeface="Arial"/>
+              </a:defRPr>
+            </a:defPPr>
+            <a:lvl1pPr>
+              <a:defRPr sz="2175" b="0">
+                <a:solidFill>
+                  <a:srgbClr val="52667B"/>
+                </a:solidFill>
+                <a:latin typeface="Arial"/>
+                <a:ea typeface="Arial"/>
+                <a:cs typeface="Arial"/>
+              </a:defRPr>
+            </a:lvl1pPr>
+            <a:lvl2pPr>
+              <a:defRPr sz="2175" b="0">
+                <a:solidFill>
+                  <a:srgbClr val="52667B"/>
+                </a:solidFill>
+                <a:latin typeface="Arial"/>
+                <a:ea typeface="Arial"/>
+                <a:cs typeface="Arial"/>
+              </a:defRPr>
+            </a:lvl2pPr>
+            <a:lvl3pPr>
+              <a:defRPr sz="2175" b="0">
+                <a:solidFill>
+                  <a:srgbClr val="52667B"/>
+                </a:solidFill>
+                <a:latin typeface="Arial"/>
+                <a:ea typeface="Arial"/>
+                <a:cs typeface="Arial"/>
+              </a:defRPr>
+            </a:lvl3pPr>
+            <a:lvl4pPr>
+              <a:defRPr sz="2175" b="0">
+                <a:solidFill>
+                  <a:srgbClr val="52667B"/>
+                </a:solidFill>
+                <a:latin typeface="Arial"/>
+                <a:ea typeface="Arial"/>
+                <a:cs typeface="Arial"/>
+              </a:defRPr>
+            </a:lvl4pPr>
+            <a:lvl5pPr>
+              <a:defRPr sz="2175" b="0">
+                <a:solidFill>
+                  <a:srgbClr val="52667B"/>
+                </a:solidFill>
+                <a:latin typeface="Arial"/>
+                <a:ea typeface="Arial"/>
+                <a:cs typeface="Arial"/>
+              </a:defRPr>
+            </a:lvl5pPr>
+            <a:lvl6pPr>
+              <a:defRPr sz="2175" b="0">
+                <a:solidFill>
+                  <a:srgbClr val="52667B"/>
+                </a:solidFill>
+                <a:latin typeface="Arial"/>
+                <a:ea typeface="Arial"/>
+                <a:cs typeface="Arial"/>
+              </a:defRPr>
+            </a:lvl6pPr>
+            <a:lvl7pPr>
+              <a:defRPr sz="2175" b="0">
+                <a:solidFill>
+                  <a:srgbClr val="52667B"/>
+                </a:solidFill>
+                <a:latin typeface="Arial"/>
+                <a:ea typeface="Arial"/>
+                <a:cs typeface="Arial"/>
+              </a:defRPr>
+            </a:lvl7pPr>
+            <a:lvl8pPr>
+              <a:defRPr sz="2175" b="0">
+                <a:solidFill>
+                  <a:srgbClr val="52667B"/>
+                </a:solidFill>
+                <a:latin typeface="Arial"/>
+                <a:ea typeface="Arial"/>
+                <a:cs typeface="Arial"/>
+              </a:defRPr>
+            </a:lvl8pPr>
+            <a:lvl9pPr>
+              <a:defRPr sz="2175" b="0">
+                <a:solidFill>
+                  <a:srgbClr val="52667B"/>
+                </a:solidFill>
+                <a:latin typeface="Arial"/>
+                <a:ea typeface="Arial"/>
+                <a:cs typeface="Arial"/>
+              </a:defRPr>
+            </a:lvl9pPr>
+          </a:lstStyle>
+          <a:p xmlns:a="http://schemas.openxmlformats.org/drawingml/2006/main">
+            <a:pPr>
+              <a:defRPr sz="2175" b="0">
+                <a:solidFill>
+                  <a:srgbClr val="52667B"/>
+                </a:solidFill>
+                <a:latin typeface="Arial"/>
+                <a:ea typeface="Arial"/>
+                <a:cs typeface="Arial"/>
+              </a:defRPr>
+            </a:pPr>
+            <a:r>
+              <a:rPr sz="2175" b="0">
+                <a:solidFill>
+                  <a:srgbClr val="52667B"/>
+                </a:solidFill>
+                <a:latin typeface="Arial"/>
+                <a:ea typeface="Arial"/>
+                <a:cs typeface="Arial"/>
+              </a:rPr>
+              <a:t>HTML, CSS and JavaScript run in the browser.</a:t>
+            </a:r>
+          </a:p>
+          <a:p xmlns:a="http://schemas.openxmlformats.org/drawingml/2006/main">
+            <a:pPr>
+              <a:defRPr sz="2175" b="0">
+                <a:solidFill>
+                  <a:srgbClr val="52667B"/>
+                </a:solidFill>
+                <a:latin typeface="Arial"/>
+                <a:ea typeface="Arial"/>
+                <a:cs typeface="Arial"/>
+              </a:defRPr>
+            </a:pPr>
+            <a:r>
+              <a:rPr sz="2175" b="0">
+                <a:solidFill>
+                  <a:srgbClr val="52667B"/>
+                </a:solidFill>
+                <a:latin typeface="Arial"/>
+                <a:ea typeface="Arial"/>
+                <a:cs typeface="Arial"/>
+              </a:rPr>
+              <a:t>Hosting only serves files.</a:t>
+            </a:r>
+          </a:p>
+          <a:p xmlns:a="http://schemas.openxmlformats.org/drawingml/2006/main">
+            <a:pPr>
+              <a:defRPr sz="2175" b="0">
+                <a:solidFill>
+                  <a:srgbClr val="52667B"/>
+                </a:solidFill>
+                <a:latin typeface="Arial"/>
+                <a:ea typeface="Arial"/>
+                <a:cs typeface="Arial"/>
+              </a:defRPr>
+            </a:pPr>
+            <a:r>
+              <a:rPr sz="2175" b="0">
+                <a:solidFill>
+                  <a:srgbClr val="52667B"/>
+                </a:solidFill>
+                <a:latin typeface="Arial"/>
+                <a:ea typeface="Arial"/>
+                <a:cs typeface="Arial"/>
+              </a:rPr>
+              <a:t>Download source, AST and compilation reports locally.</a:t>
+            </a:r>
+          </a:p>
+        </p:txBody>
+      </p:sp>
+    </p:spTree>
+    <p:extLst>
+      <p:ext uri="{BB962C8B-B14F-4D97-AF65-F5344CB8AC3E}">
+        <p14:creationId xmlns:p14="http://schemas.microsoft.com/office/powerpoint/2010/main" val="2073016958"/>
+      </p:ext>
+    </p:extLst>
+  </p:cSld>
+</p:sld>
+</file>
+
+<file path=ppt/slides/slide13.xml><?xml version="1.0" encoding="utf-8"?>
+<p:sld xmlns:p="http://schemas.openxmlformats.org/presentationml/2006/main">
+  <p:cSld>
+    <p:bg>
+      <p:bgPr>
+        <a:solidFill xmlns:a="http://schemas.openxmlformats.org/drawingml/2006/main">
+          <a:srgbClr val="FFFFFF"/>
+        </a:solidFill>
+      </p:bgPr>
+    </p:bg>
+    <p:spTree>
+      <p:nvGrpSpPr>
+        <p:cNvPr id="1" name=""/>
+        <p:cNvGrpSpPr/>
+        <p:nvPr/>
+      </p:nvGrpSpPr>
+      <p:grpSpPr>
+        <a:xfrm xmlns:a="http://schemas.openxmlformats.org/drawingml/2006/main"/>
+      </p:grpSpPr>
+      <p:sp>
+        <p:nvSpPr>
+          <p:cNvPr id="8" name="COMPILER DESIGN">
+            <a:extLst xmlns:a="http://schemas.openxmlformats.org/drawingml/2006/main">
+              <a:ext uri="{FF2B5EF4-FFF2-40B4-BE49-F238E27FC236}">
+                <a16:creationId xmlns:a16="http://schemas.microsoft.com/office/drawing/2014/main" id="{77FD9F05-867D-4EE4-B57E-FD13C271EB3D}"/>
+              </a:ext>
+            </a:extLst>
+          </p:cNvPr>
+          <p:cNvSpPr>
+            <a:spLocks xmlns:a="http://schemas.openxmlformats.org/drawingml/2006/main" noGrp="1"/>
+          </p:cNvSpPr>
+          <p:nvPr/>
+        </p:nvSpPr>
+        <p:spPr>
+          <a:xfrm xmlns:a="http://schemas.openxmlformats.org/drawingml/2006/main">
+            <a:off x="685800" y="285750"/>
+            <a:ext cx="7620000" cy="228600"/>
+          </a:xfrm>
+          <a:prstGeom xmlns:a="http://schemas.openxmlformats.org/drawingml/2006/main" prst="rect">
+            <a:avLst/>
+          </a:prstGeom>
+          <a:noFill xmlns:a="http://schemas.openxmlformats.org/drawingml/2006/main"/>
+          <a:ln xmlns:a="http://schemas.openxmlformats.org/drawingml/2006/main" w="0">
+            <a:noFill/>
+          </a:ln>
+        </p:spPr>
+        <p:txBody>
+          <a:bodyPr xmlns:a="http://schemas.openxmlformats.org/drawingml/2006/main"/>
+          <a:lstStyle xmlns:a="http://schemas.openxmlformats.org/drawingml/2006/main">
+            <a:defPPr>
+              <a:defRPr sz="1125" b="1">
+                <a:solidFill>
+                  <a:srgbClr val="DF6948"/>
+                </a:solidFill>
+                <a:latin typeface="Arial"/>
+                <a:ea typeface="Arial"/>
+                <a:cs typeface="Arial"/>
+              </a:defRPr>
+            </a:defPPr>
+            <a:lvl1pPr>
+              <a:defRPr sz="1125" b="1">
+                <a:solidFill>
+                  <a:srgbClr val="DF6948"/>
+                </a:solidFill>
+                <a:latin typeface="Arial"/>
+                <a:ea typeface="Arial"/>
+                <a:cs typeface="Arial"/>
+              </a:defRPr>
+            </a:lvl1pPr>
+            <a:lvl2pPr>
+              <a:defRPr sz="1125" b="1">
+                <a:solidFill>
+                  <a:srgbClr val="DF6948"/>
+                </a:solidFill>
+                <a:latin typeface="Arial"/>
+                <a:ea typeface="Arial"/>
+                <a:cs typeface="Arial"/>
+              </a:defRPr>
+            </a:lvl2pPr>
+            <a:lvl3pPr>
+              <a:defRPr sz="1125" b="1">
+                <a:solidFill>
+                  <a:srgbClr val="DF6948"/>
+                </a:solidFill>
+                <a:latin typeface="Arial"/>
+                <a:ea typeface="Arial"/>
+                <a:cs typeface="Arial"/>
+              </a:defRPr>
+            </a:lvl3pPr>
+            <a:lvl4pPr>
+              <a:defRPr sz="1125" b="1">
+                <a:solidFill>
+                  <a:srgbClr val="DF6948"/>
+                </a:solidFill>
+                <a:latin typeface="Arial"/>
+                <a:ea typeface="Arial"/>
+                <a:cs typeface="Arial"/>
+              </a:defRPr>
+            </a:lvl4pPr>
+            <a:lvl5pPr>
+              <a:defRPr sz="1125" b="1">
+                <a:solidFill>
+                  <a:srgbClr val="DF6948"/>
+                </a:solidFill>
+                <a:latin typeface="Arial"/>
+                <a:ea typeface="Arial"/>
+                <a:cs typeface="Arial"/>
+              </a:defRPr>
+            </a:lvl5pPr>
+            <a:lvl6pPr>
+              <a:defRPr sz="1125" b="1">
+                <a:solidFill>
+                  <a:srgbClr val="DF6948"/>
+                </a:solidFill>
+                <a:latin typeface="Arial"/>
+                <a:ea typeface="Arial"/>
+                <a:cs typeface="Arial"/>
+              </a:defRPr>
+            </a:lvl6pPr>
+            <a:lvl7pPr>
+              <a:defRPr sz="1125" b="1">
+                <a:solidFill>
+                  <a:srgbClr val="DF6948"/>
+                </a:solidFill>
+                <a:latin typeface="Arial"/>
+                <a:ea typeface="Arial"/>
+                <a:cs typeface="Arial"/>
+              </a:defRPr>
+            </a:lvl7pPr>
+            <a:lvl8pPr>
+              <a:defRPr sz="1125" b="1">
+                <a:solidFill>
+                  <a:srgbClr val="DF6948"/>
+                </a:solidFill>
+                <a:latin typeface="Arial"/>
+                <a:ea typeface="Arial"/>
+                <a:cs typeface="Arial"/>
+              </a:defRPr>
+            </a:lvl8pPr>
+            <a:lvl9pPr>
+              <a:defRPr sz="1125" b="1">
+                <a:solidFill>
+                  <a:srgbClr val="DF6948"/>
+                </a:solidFill>
+                <a:latin typeface="Arial"/>
+                <a:ea typeface="Arial"/>
+                <a:cs typeface="Arial"/>
+              </a:defRPr>
+            </a:lvl9pPr>
+          </a:lstStyle>
+          <a:p xmlns:a="http://schemas.openxmlformats.org/drawingml/2006/main">
+            <a:pPr>
+              <a:defRPr sz="1125" b="1">
+                <a:solidFill>
+                  <a:srgbClr val="DF6948"/>
+                </a:solidFill>
+                <a:latin typeface="Arial"/>
+                <a:ea typeface="Arial"/>
+                <a:cs typeface="Arial"/>
+              </a:defRPr>
+            </a:pPr>
+            <a:r>
+              <a:rPr sz="1125" b="1">
+                <a:solidFill>
+                  <a:srgbClr val="DF6948"/>
+                </a:solidFill>
+                <a:latin typeface="Arial"/>
+                <a:ea typeface="Arial"/>
+                <a:cs typeface="Arial"/>
+              </a:rPr>
+              <a:t>COMPILER DESIGN</a:t>
+            </a:r>
+          </a:p>
+        </p:txBody>
+      </p:sp>
+      <p:sp>
+        <p:nvSpPr>
+          <p:cNvPr id="2" name="Slide title">
+            <a:extLst xmlns:a="http://schemas.openxmlformats.org/drawingml/2006/main">
+              <a:ext uri="{FF2B5EF4-FFF2-40B4-BE49-F238E27FC236}">
+                <a16:creationId xmlns:a16="http://schemas.microsoft.com/office/drawing/2014/main" id="{E2E8AB7C-F711-450D-B7DB-6362B5BADBC3}"/>
+              </a:ext>
+            </a:extLst>
+          </p:cNvPr>
+          <p:cNvSpPr>
+            <a:spLocks xmlns:a="http://schemas.openxmlformats.org/drawingml/2006/main" noGrp="1"/>
+          </p:cNvSpPr>
+          <p:nvPr/>
+        </p:nvSpPr>
+        <p:spPr>
+          <a:xfrm xmlns:a="http://schemas.openxmlformats.org/drawingml/2006/main">
+            <a:off x="685800" y="762000"/>
+            <a:ext cx="10820400" cy="904875"/>
+          </a:xfrm>
+          <a:prstGeom xmlns:a="http://schemas.openxmlformats.org/drawingml/2006/main" prst="rect">
+            <a:avLst/>
+          </a:prstGeom>
+          <a:noFill xmlns:a="http://schemas.openxmlformats.org/drawingml/2006/main"/>
+          <a:ln xmlns:a="http://schemas.openxmlformats.org/drawingml/2006/main" w="0">
+            <a:noFill/>
+          </a:ln>
+        </p:spPr>
+        <p:txBody>
+          <a:bodyPr xmlns:a="http://schemas.openxmlformats.org/drawingml/2006/main"/>
+          <a:lstStyle xmlns:a="http://schemas.openxmlformats.org/drawingml/2006/main">
+            <a:defPPr>
+              <a:defRPr sz="3450" b="1">
+                <a:solidFill>
+                  <a:srgbClr val="142B43"/>
+                </a:solidFill>
+                <a:latin typeface="Arial"/>
+                <a:ea typeface="Arial"/>
+                <a:cs typeface="Arial"/>
+              </a:defRPr>
+            </a:defPPr>
+            <a:lvl1pPr>
+              <a:defRPr sz="3450" b="1">
+                <a:solidFill>
+                  <a:srgbClr val="142B43"/>
+                </a:solidFill>
+                <a:latin typeface="Arial"/>
+                <a:ea typeface="Arial"/>
+                <a:cs typeface="Arial"/>
+              </a:defRPr>
+            </a:lvl1pPr>
+            <a:lvl2pPr>
+              <a:defRPr sz="3450" b="1">
+                <a:solidFill>
+                  <a:srgbClr val="142B43"/>
+                </a:solidFill>
+                <a:latin typeface="Arial"/>
+                <a:ea typeface="Arial"/>
+                <a:cs typeface="Arial"/>
+              </a:defRPr>
+            </a:lvl2pPr>
+            <a:lvl3pPr>
+              <a:defRPr sz="3450" b="1">
+                <a:solidFill>
+                  <a:srgbClr val="142B43"/>
+                </a:solidFill>
+                <a:latin typeface="Arial"/>
+                <a:ea typeface="Arial"/>
+                <a:cs typeface="Arial"/>
+              </a:defRPr>
+            </a:lvl3pPr>
+            <a:lvl4pPr>
+              <a:defRPr sz="3450" b="1">
+                <a:solidFill>
+                  <a:srgbClr val="142B43"/>
+                </a:solidFill>
+                <a:latin typeface="Arial"/>
+                <a:ea typeface="Arial"/>
+                <a:cs typeface="Arial"/>
+              </a:defRPr>
+            </a:lvl4pPr>
+            <a:lvl5pPr>
+              <a:defRPr sz="3450" b="1">
+                <a:solidFill>
+                  <a:srgbClr val="142B43"/>
+                </a:solidFill>
+                <a:latin typeface="Arial"/>
+                <a:ea typeface="Arial"/>
+                <a:cs typeface="Arial"/>
+              </a:defRPr>
+            </a:lvl5pPr>
+            <a:lvl6pPr>
+              <a:defRPr sz="3450" b="1">
+                <a:solidFill>
+                  <a:srgbClr val="142B43"/>
+                </a:solidFill>
+                <a:latin typeface="Arial"/>
+                <a:ea typeface="Arial"/>
+                <a:cs typeface="Arial"/>
+              </a:defRPr>
+            </a:lvl6pPr>
+            <a:lvl7pPr>
+              <a:defRPr sz="3450" b="1">
+                <a:solidFill>
+                  <a:srgbClr val="142B43"/>
+                </a:solidFill>
+                <a:latin typeface="Arial"/>
+                <a:ea typeface="Arial"/>
+                <a:cs typeface="Arial"/>
+              </a:defRPr>
+            </a:lvl7pPr>
+            <a:lvl8pPr>
+              <a:defRPr sz="3450" b="1">
+                <a:solidFill>
+                  <a:srgbClr val="142B43"/>
+                </a:solidFill>
+                <a:latin typeface="Arial"/>
+                <a:ea typeface="Arial"/>
+                <a:cs typeface="Arial"/>
+              </a:defRPr>
+            </a:lvl8pPr>
+            <a:lvl9pPr>
+              <a:defRPr sz="3450" b="1">
+                <a:solidFill>
+                  <a:srgbClr val="142B43"/>
+                </a:solidFill>
+                <a:latin typeface="Arial"/>
+                <a:ea typeface="Arial"/>
+                <a:cs typeface="Arial"/>
+              </a:defRPr>
+            </a:lvl9pPr>
+          </a:lstStyle>
+          <a:p xmlns:a="http://schemas.openxmlformats.org/drawingml/2006/main">
+            <a:pPr>
+              <a:defRPr sz="3450" b="1">
+                <a:solidFill>
+                  <a:srgbClr val="142B43"/>
+                </a:solidFill>
+                <a:latin typeface="Arial"/>
+                <a:ea typeface="Arial"/>
+                <a:cs typeface="Arial"/>
+              </a:defRPr>
+            </a:pPr>
+            <a:r>
+              <a:rPr sz="3450" b="1">
+                <a:solidFill>
+                  <a:srgbClr val="142B43"/>
+                </a:solidFill>
+                <a:latin typeface="Arial"/>
+                <a:ea typeface="Arial"/>
+                <a:cs typeface="Arial"/>
+              </a:rPr>
+              <a:t>Individual contributions</a:t>
+            </a:r>
+          </a:p>
+        </p:txBody>
+      </p:sp>
+      <p:sp>
+        <p:nvSpPr>
+          <p:cNvPr id="3" name="StringLab Browser Compiler Front En">
+            <a:extLst xmlns:a="http://schemas.openxmlformats.org/drawingml/2006/main">
+              <a:ext uri="{FF2B5EF4-FFF2-40B4-BE49-F238E27FC236}">
+                <a16:creationId xmlns:a16="http://schemas.microsoft.com/office/drawing/2014/main" id="{4EA9E7C7-9F75-4E90-A7C0-2348D9193317}"/>
+              </a:ext>
+            </a:extLst>
+          </p:cNvPr>
+          <p:cNvSpPr>
+            <a:spLocks xmlns:a="http://schemas.openxmlformats.org/drawingml/2006/main" noGrp="1"/>
+          </p:cNvSpPr>
+          <p:nvPr/>
+        </p:nvSpPr>
+        <p:spPr>
+          <a:xfrm xmlns:a="http://schemas.openxmlformats.org/drawingml/2006/main">
+            <a:off x="685800" y="6400800"/>
+            <a:ext cx="9048750" cy="209550"/>
+          </a:xfrm>
+          <a:prstGeom xmlns:a="http://schemas.openxmlformats.org/drawingml/2006/main" prst="rect">
+            <a:avLst/>
+          </a:prstGeom>
+          <a:noFill xmlns:a="http://schemas.openxmlformats.org/drawingml/2006/main"/>
+          <a:ln xmlns:a="http://schemas.openxmlformats.org/drawingml/2006/main" w="0">
+            <a:noFill/>
+          </a:ln>
+        </p:spPr>
+        <p:txBody>
+          <a:bodyPr xmlns:a="http://schemas.openxmlformats.org/drawingml/2006/main"/>
+          <a:lstStyle xmlns:a="http://schemas.openxmlformats.org/drawingml/2006/main">
+            <a:defPPr>
+              <a:defRPr sz="1125" b="0">
+                <a:solidFill>
+                  <a:srgbClr val="52667B"/>
+                </a:solidFill>
+                <a:latin typeface="Arial"/>
+                <a:ea typeface="Arial"/>
+                <a:cs typeface="Arial"/>
+              </a:defRPr>
+            </a:defPPr>
+            <a:lvl1pPr>
+              <a:defRPr sz="1125" b="0">
+                <a:solidFill>
+                  <a:srgbClr val="52667B"/>
+                </a:solidFill>
+                <a:latin typeface="Arial"/>
+                <a:ea typeface="Arial"/>
+                <a:cs typeface="Arial"/>
+              </a:defRPr>
+            </a:lvl1pPr>
+            <a:lvl2pPr>
+              <a:defRPr sz="1125" b="0">
+                <a:solidFill>
+                  <a:srgbClr val="52667B"/>
+                </a:solidFill>
+                <a:latin typeface="Arial"/>
+                <a:ea typeface="Arial"/>
+                <a:cs typeface="Arial"/>
+              </a:defRPr>
+            </a:lvl2pPr>
+            <a:lvl3pPr>
+              <a:defRPr sz="1125" b="0">
+                <a:solidFill>
+                  <a:srgbClr val="52667B"/>
+                </a:solidFill>
+                <a:latin typeface="Arial"/>
+                <a:ea typeface="Arial"/>
+                <a:cs typeface="Arial"/>
+              </a:defRPr>
+            </a:lvl3pPr>
+            <a:lvl4pPr>
+              <a:defRPr sz="1125" b="0">
+                <a:solidFill>
+                  <a:srgbClr val="52667B"/>
+                </a:solidFill>
+                <a:latin typeface="Arial"/>
+                <a:ea typeface="Arial"/>
+                <a:cs typeface="Arial"/>
+              </a:defRPr>
+            </a:lvl4pPr>
+            <a:lvl5pPr>
+              <a:defRPr sz="1125" b="0">
+                <a:solidFill>
+                  <a:srgbClr val="52667B"/>
+                </a:solidFill>
+                <a:latin typeface="Arial"/>
+                <a:ea typeface="Arial"/>
+                <a:cs typeface="Arial"/>
+              </a:defRPr>
+            </a:lvl5pPr>
+            <a:lvl6pPr>
+              <a:defRPr sz="1125" b="0">
+                <a:solidFill>
+                  <a:srgbClr val="52667B"/>
+                </a:solidFill>
+                <a:latin typeface="Arial"/>
+                <a:ea typeface="Arial"/>
+                <a:cs typeface="Arial"/>
+              </a:defRPr>
+            </a:lvl6pPr>
+            <a:lvl7pPr>
+              <a:defRPr sz="1125" b="0">
+                <a:solidFill>
+                  <a:srgbClr val="52667B"/>
+                </a:solidFill>
+                <a:latin typeface="Arial"/>
+                <a:ea typeface="Arial"/>
+                <a:cs typeface="Arial"/>
+              </a:defRPr>
+            </a:lvl7pPr>
+            <a:lvl8pPr>
+              <a:defRPr sz="1125" b="0">
+                <a:solidFill>
+                  <a:srgbClr val="52667B"/>
+                </a:solidFill>
+                <a:latin typeface="Arial"/>
+                <a:ea typeface="Arial"/>
+                <a:cs typeface="Arial"/>
+              </a:defRPr>
+            </a:lvl8pPr>
+            <a:lvl9pPr>
+              <a:defRPr sz="1125" b="0">
+                <a:solidFill>
+                  <a:srgbClr val="52667B"/>
+                </a:solidFill>
+                <a:latin typeface="Arial"/>
+                <a:ea typeface="Arial"/>
+                <a:cs typeface="Arial"/>
+              </a:defRPr>
+            </a:lvl9pPr>
+          </a:lstStyle>
+          <a:p xmlns:a="http://schemas.openxmlformats.org/drawingml/2006/main">
+            <a:pPr>
+              <a:defRPr sz="1125" b="0">
+                <a:solidFill>
+                  <a:srgbClr val="52667B"/>
+                </a:solidFill>
+                <a:latin typeface="Arial"/>
+                <a:ea typeface="Arial"/>
+                <a:cs typeface="Arial"/>
+              </a:defRPr>
+            </a:pPr>
+            <a:r>
+              <a:rPr sz="1125" b="0">
+                <a:solidFill>
+                  <a:srgbClr val="52667B"/>
+                </a:solidFill>
+                <a:latin typeface="Arial"/>
+                <a:ea typeface="Arial"/>
+                <a:cs typeface="Arial"/>
+              </a:rPr>
+              <a:t>StringLab Browser Compiler Front End</a:t>
+            </a:r>
+          </a:p>
+        </p:txBody>
+      </p:sp>
+      <p:sp>
+        <p:nvSpPr>
+          <p:cNvPr id="4" name="13">
+            <a:extLst xmlns:a="http://schemas.openxmlformats.org/drawingml/2006/main">
+              <a:ext uri="{FF2B5EF4-FFF2-40B4-BE49-F238E27FC236}">
+                <a16:creationId xmlns:a16="http://schemas.microsoft.com/office/drawing/2014/main" id="{7B2FF1CA-027C-465C-98DB-AD7A54215EC4}"/>
+              </a:ext>
+            </a:extLst>
+          </p:cNvPr>
+          <p:cNvSpPr>
+            <a:spLocks xmlns:a="http://schemas.openxmlformats.org/drawingml/2006/main" noGrp="1"/>
+          </p:cNvSpPr>
+          <p:nvPr/>
+        </p:nvSpPr>
+        <p:spPr>
+          <a:xfrm xmlns:a="http://schemas.openxmlformats.org/drawingml/2006/main">
+            <a:off x="11001375" y="6400800"/>
+            <a:ext cx="523875" cy="209550"/>
+          </a:xfrm>
+          <a:prstGeom xmlns:a="http://schemas.openxmlformats.org/drawingml/2006/main" prst="rect">
+            <a:avLst/>
+          </a:prstGeom>
+          <a:noFill xmlns:a="http://schemas.openxmlformats.org/drawingml/2006/main"/>
+          <a:ln xmlns:a="http://schemas.openxmlformats.org/drawingml/2006/main" w="0">
+            <a:noFill/>
+          </a:ln>
+        </p:spPr>
+        <p:txBody>
+          <a:bodyPr xmlns:a="http://schemas.openxmlformats.org/drawingml/2006/main"/>
+          <a:lstStyle xmlns:a="http://schemas.openxmlformats.org/drawingml/2006/main">
+            <a:defPPr>
+              <a:defRPr sz="1125" b="0">
+                <a:solidFill>
+                  <a:srgbClr val="52667B"/>
+                </a:solidFill>
+                <a:latin typeface="Arial"/>
+                <a:ea typeface="Arial"/>
+                <a:cs typeface="Arial"/>
+              </a:defRPr>
+            </a:defPPr>
+            <a:lvl1pPr>
+              <a:defRPr sz="1125" b="0">
+                <a:solidFill>
+                  <a:srgbClr val="52667B"/>
+                </a:solidFill>
+                <a:latin typeface="Arial"/>
+                <a:ea typeface="Arial"/>
+                <a:cs typeface="Arial"/>
+              </a:defRPr>
+            </a:lvl1pPr>
+            <a:lvl2pPr>
+              <a:defRPr sz="1125" b="0">
+                <a:solidFill>
+                  <a:srgbClr val="52667B"/>
+                </a:solidFill>
+                <a:latin typeface="Arial"/>
+                <a:ea typeface="Arial"/>
+                <a:cs typeface="Arial"/>
+              </a:defRPr>
+            </a:lvl2pPr>
+            <a:lvl3pPr>
+              <a:defRPr sz="1125" b="0">
+                <a:solidFill>
+                  <a:srgbClr val="52667B"/>
+                </a:solidFill>
+                <a:latin typeface="Arial"/>
+                <a:ea typeface="Arial"/>
+                <a:cs typeface="Arial"/>
+              </a:defRPr>
+            </a:lvl3pPr>
+            <a:lvl4pPr>
+              <a:defRPr sz="1125" b="0">
+                <a:solidFill>
+                  <a:srgbClr val="52667B"/>
+                </a:solidFill>
+                <a:latin typeface="Arial"/>
+                <a:ea typeface="Arial"/>
+                <a:cs typeface="Arial"/>
+              </a:defRPr>
+            </a:lvl4pPr>
+            <a:lvl5pPr>
+              <a:defRPr sz="1125" b="0">
+                <a:solidFill>
+                  <a:srgbClr val="52667B"/>
+                </a:solidFill>
+                <a:latin typeface="Arial"/>
+                <a:ea typeface="Arial"/>
+                <a:cs typeface="Arial"/>
+              </a:defRPr>
+            </a:lvl5pPr>
+            <a:lvl6pPr>
+              <a:defRPr sz="1125" b="0">
+                <a:solidFill>
+                  <a:srgbClr val="52667B"/>
+                </a:solidFill>
+                <a:latin typeface="Arial"/>
+                <a:ea typeface="Arial"/>
+                <a:cs typeface="Arial"/>
+              </a:defRPr>
+            </a:lvl6pPr>
+            <a:lvl7pPr>
+              <a:defRPr sz="1125" b="0">
+                <a:solidFill>
+                  <a:srgbClr val="52667B"/>
+                </a:solidFill>
+                <a:latin typeface="Arial"/>
+                <a:ea typeface="Arial"/>
+                <a:cs typeface="Arial"/>
+              </a:defRPr>
+            </a:lvl7pPr>
+            <a:lvl8pPr>
+              <a:defRPr sz="1125" b="0">
+                <a:solidFill>
+                  <a:srgbClr val="52667B"/>
+                </a:solidFill>
+                <a:latin typeface="Arial"/>
+                <a:ea typeface="Arial"/>
+                <a:cs typeface="Arial"/>
+              </a:defRPr>
+            </a:lvl8pPr>
+            <a:lvl9pPr>
+              <a:defRPr sz="1125" b="0">
+                <a:solidFill>
+                  <a:srgbClr val="52667B"/>
+                </a:solidFill>
+                <a:latin typeface="Arial"/>
+                <a:ea typeface="Arial"/>
+                <a:cs typeface="Arial"/>
+              </a:defRPr>
+            </a:lvl9pPr>
+          </a:lstStyle>
+          <a:p xmlns:a="http://schemas.openxmlformats.org/drawingml/2006/main">
+            <a:pPr>
+              <a:defRPr sz="1125" b="0">
+                <a:solidFill>
+                  <a:srgbClr val="52667B"/>
+                </a:solidFill>
+                <a:latin typeface="Arial"/>
+                <a:ea typeface="Arial"/>
+                <a:cs typeface="Arial"/>
+              </a:defRPr>
+            </a:pPr>
+            <a:r>
+              <a:rPr sz="1125" b="0">
+                <a:solidFill>
+                  <a:srgbClr val="52667B"/>
+                </a:solidFill>
+                <a:latin typeface="Arial"/>
+                <a:ea typeface="Arial"/>
+                <a:cs typeface="Arial"/>
+              </a:rPr>
+              <a:t>13</a:t>
+            </a:r>
+          </a:p>
+        </p:txBody>
+      </p:sp>
+      <p:sp>
+        <p:nvSpPr>
           <p:cNvPr id="5" name="Names and roll numbers to be comple">
             <a:extLst xmlns:a="http://schemas.openxmlformats.org/drawingml/2006/main">
               <a:ext uri="{FF2B5EF4-FFF2-40B4-BE49-F238E27FC236}">
-                <a16:creationId xmlns:a16="http://schemas.microsoft.com/office/drawing/2014/main" id="{C649190C-20E2-4D02-B20C-D73125DCD679}"/>
+                <a16:creationId xmlns:a16="http://schemas.microsoft.com/office/drawing/2014/main" id="{68A09F9E-48BD-4E32-991C-E9DB8B94226E}"/>
               </a:ext>
             </a:extLst>
           </p:cNvPr>
@@ -8127,7 +9577,7 @@
           <p:cNvPr id="6" name="Member 1   Actual work and evidence">
             <a:extLst xmlns:a="http://schemas.openxmlformats.org/drawingml/2006/main">
               <a:ext uri="{FF2B5EF4-FFF2-40B4-BE49-F238E27FC236}">
-                <a16:creationId xmlns:a16="http://schemas.microsoft.com/office/drawing/2014/main" id="{E435A06E-D7A0-4758-9DD4-D5F16C61ADDB}"/>
+                <a16:creationId xmlns:a16="http://schemas.microsoft.com/office/drawing/2014/main" id="{B8958FC2-5099-4395-AF22-E2B6B99F098B}"/>
               </a:ext>
             </a:extLst>
           </p:cNvPr>
@@ -8349,10 +9799,10 @@
       </p:sp>
       <p:sp>
         <p:nvSpPr>
-          <p:cNvPr id="7" name="Adjust the rows to your allotted gr">
+          <p:cNvPr id="7" name="Suggested areas: lexer, parser, sem">
             <a:extLst xmlns:a="http://schemas.openxmlformats.org/drawingml/2006/main">
               <a:ext uri="{FF2B5EF4-FFF2-40B4-BE49-F238E27FC236}">
-                <a16:creationId xmlns:a16="http://schemas.microsoft.com/office/drawing/2014/main" id="{3DCF059D-BB84-4F55-A381-9FBF65C96AA8}"/>
+                <a16:creationId xmlns:a16="http://schemas.microsoft.com/office/drawing/2014/main" id="{6449299D-3EBC-4C23-B345-A089EA7A0187}"/>
               </a:ext>
             </a:extLst>
           </p:cNvPr>
@@ -8378,7 +9828,7 @@
           <a:bodyPr xmlns:a="http://schemas.openxmlformats.org/drawingml/2006/main"/>
           <a:lstStyle xmlns:a="http://schemas.openxmlformats.org/drawingml/2006/main">
             <a:defPPr>
-              <a:defRPr sz="1725" b="0">
+              <a:defRPr sz="1650" b="0">
                 <a:solidFill>
                   <a:srgbClr val="52667B"/>
                 </a:solidFill>
@@ -8388,7 +9838,7 @@
               </a:defRPr>
             </a:defPPr>
             <a:lvl1pPr>
-              <a:defRPr sz="1725" b="0">
+              <a:defRPr sz="1650" b="0">
                 <a:solidFill>
                   <a:srgbClr val="52667B"/>
                 </a:solidFill>
@@ -8398,7 +9848,7 @@
               </a:defRPr>
             </a:lvl1pPr>
             <a:lvl2pPr>
-              <a:defRPr sz="1725" b="0">
+              <a:defRPr sz="1650" b="0">
                 <a:solidFill>
                   <a:srgbClr val="52667B"/>
                 </a:solidFill>
@@ -8408,7 +9858,7 @@
               </a:defRPr>
             </a:lvl2pPr>
             <a:lvl3pPr>
-              <a:defRPr sz="1725" b="0">
+              <a:defRPr sz="1650" b="0">
                 <a:solidFill>
                   <a:srgbClr val="52667B"/>
                 </a:solidFill>
@@ -8418,7 +9868,7 @@
               </a:defRPr>
             </a:lvl3pPr>
             <a:lvl4pPr>
-              <a:defRPr sz="1725" b="0">
+              <a:defRPr sz="1650" b="0">
                 <a:solidFill>
                   <a:srgbClr val="52667B"/>
                 </a:solidFill>
@@ -8428,7 +9878,7 @@
               </a:defRPr>
             </a:lvl4pPr>
             <a:lvl5pPr>
-              <a:defRPr sz="1725" b="0">
+              <a:defRPr sz="1650" b="0">
                 <a:solidFill>
                   <a:srgbClr val="52667B"/>
                 </a:solidFill>
@@ -8438,7 +9888,7 @@
               </a:defRPr>
             </a:lvl5pPr>
             <a:lvl6pPr>
-              <a:defRPr sz="1725" b="0">
+              <a:defRPr sz="1650" b="0">
                 <a:solidFill>
                   <a:srgbClr val="52667B"/>
                 </a:solidFill>
@@ -8448,7 +9898,7 @@
               </a:defRPr>
             </a:lvl6pPr>
             <a:lvl7pPr>
-              <a:defRPr sz="1725" b="0">
+              <a:defRPr sz="1650" b="0">
                 <a:solidFill>
                   <a:srgbClr val="52667B"/>
                 </a:solidFill>
@@ -8458,7 +9908,7 @@
               </a:defRPr>
             </a:lvl7pPr>
             <a:lvl8pPr>
-              <a:defRPr sz="1725" b="0">
+              <a:defRPr sz="1650" b="0">
                 <a:solidFill>
                   <a:srgbClr val="52667B"/>
                 </a:solidFill>
@@ -8468,7 +9918,7 @@
               </a:defRPr>
             </a:lvl8pPr>
             <a:lvl9pPr>
-              <a:defRPr sz="1725" b="0">
+              <a:defRPr sz="1650" b="0">
                 <a:solidFill>
                   <a:srgbClr val="52667B"/>
                 </a:solidFill>
@@ -8480,7 +9930,7 @@
           </a:lstStyle>
           <a:p xmlns:a="http://schemas.openxmlformats.org/drawingml/2006/main">
             <a:pPr>
-              <a:defRPr sz="1725" b="0">
+              <a:defRPr sz="1650" b="0">
                 <a:solidFill>
                   <a:srgbClr val="52667B"/>
                 </a:solidFill>
@@ -8490,7 +9940,7 @@
               </a:defRPr>
             </a:pPr>
             <a:r>
-              <a:rPr sz="1725" b="0">
+              <a:rPr sz="1650" b="0">
                 <a:solidFill>
                   <a:srgbClr val="52667B"/>
                 </a:solidFill>
@@ -8498,7 +9948,7 @@
                 <a:ea typeface="Arial"/>
                 <a:cs typeface="Arial"/>
               </a:rPr>
-              <a:t>Adjust the rows to your allotted group size.</a:t>
+              <a:t>Suggested areas: lexer, parser, semantics, UI and documentation.</a:t>
             </a:r>
           </a:p>
         </p:txBody>
@@ -8506,7 +9956,7 @@
     </p:spTree>
     <p:extLst>
       <p:ext uri="{BB962C8B-B14F-4D97-AF65-F5344CB8AC3E}">
-        <p14:creationId xmlns:p14="http://schemas.microsoft.com/office/powerpoint/2010/main" val="2007508030"/>
+        <p14:creationId xmlns:p14="http://schemas.microsoft.com/office/powerpoint/2010/main" val="766047199"/>
       </p:ext>
     </p:extLst>
   </p:cSld>
@@ -8537,7 +9987,7 @@
           <p:cNvPr id="8" name="COMPILER DESIGN">
             <a:extLst xmlns:a="http://schemas.openxmlformats.org/drawingml/2006/main">
               <a:ext uri="{FF2B5EF4-FFF2-40B4-BE49-F238E27FC236}">
-                <a16:creationId xmlns:a16="http://schemas.microsoft.com/office/drawing/2014/main" id="{497FF7C5-856B-4B7C-802A-6B888236B827}"/>
+                <a16:creationId xmlns:a16="http://schemas.microsoft.com/office/drawing/2014/main" id="{F2730660-F734-44C2-A52D-78F45A451900}"/>
               </a:ext>
             </a:extLst>
           </p:cNvPr>
@@ -8565,7 +10015,7 @@
             <a:defPPr>
               <a:defRPr sz="1125" b="1">
                 <a:solidFill>
-                  <a:srgbClr val="1A6383"/>
+                  <a:srgbClr val="DF6948"/>
                 </a:solidFill>
                 <a:latin typeface="Arial"/>
                 <a:ea typeface="Arial"/>
@@ -8575,7 +10025,7 @@
             <a:lvl1pPr>
               <a:defRPr sz="1125" b="1">
                 <a:solidFill>
-                  <a:srgbClr val="1A6383"/>
+                  <a:srgbClr val="DF6948"/>
                 </a:solidFill>
                 <a:latin typeface="Arial"/>
                 <a:ea typeface="Arial"/>
@@ -8585,7 +10035,7 @@
             <a:lvl2pPr>
               <a:defRPr sz="1125" b="1">
                 <a:solidFill>
-                  <a:srgbClr val="1A6383"/>
+                  <a:srgbClr val="DF6948"/>
                 </a:solidFill>
                 <a:latin typeface="Arial"/>
                 <a:ea typeface="Arial"/>
@@ -8595,7 +10045,7 @@
             <a:lvl3pPr>
               <a:defRPr sz="1125" b="1">
                 <a:solidFill>
-                  <a:srgbClr val="1A6383"/>
+                  <a:srgbClr val="DF6948"/>
                 </a:solidFill>
                 <a:latin typeface="Arial"/>
                 <a:ea typeface="Arial"/>
@@ -8605,7 +10055,7 @@
             <a:lvl4pPr>
               <a:defRPr sz="1125" b="1">
                 <a:solidFill>
-                  <a:srgbClr val="1A6383"/>
+                  <a:srgbClr val="DF6948"/>
                 </a:solidFill>
                 <a:latin typeface="Arial"/>
                 <a:ea typeface="Arial"/>
@@ -8615,7 +10065,7 @@
             <a:lvl5pPr>
               <a:defRPr sz="1125" b="1">
                 <a:solidFill>
-                  <a:srgbClr val="1A6383"/>
+                  <a:srgbClr val="DF6948"/>
                 </a:solidFill>
                 <a:latin typeface="Arial"/>
                 <a:ea typeface="Arial"/>
@@ -8625,7 +10075,7 @@
             <a:lvl6pPr>
               <a:defRPr sz="1125" b="1">
                 <a:solidFill>
-                  <a:srgbClr val="1A6383"/>
+                  <a:srgbClr val="DF6948"/>
                 </a:solidFill>
                 <a:latin typeface="Arial"/>
                 <a:ea typeface="Arial"/>
@@ -8635,7 +10085,7 @@
             <a:lvl7pPr>
               <a:defRPr sz="1125" b="1">
                 <a:solidFill>
-                  <a:srgbClr val="1A6383"/>
+                  <a:srgbClr val="DF6948"/>
                 </a:solidFill>
                 <a:latin typeface="Arial"/>
                 <a:ea typeface="Arial"/>
@@ -8645,7 +10095,7 @@
             <a:lvl8pPr>
               <a:defRPr sz="1125" b="1">
                 <a:solidFill>
-                  <a:srgbClr val="1A6383"/>
+                  <a:srgbClr val="DF6948"/>
                 </a:solidFill>
                 <a:latin typeface="Arial"/>
                 <a:ea typeface="Arial"/>
@@ -8655,7 +10105,7 @@
             <a:lvl9pPr>
               <a:defRPr sz="1125" b="1">
                 <a:solidFill>
-                  <a:srgbClr val="1A6383"/>
+                  <a:srgbClr val="DF6948"/>
                 </a:solidFill>
                 <a:latin typeface="Arial"/>
                 <a:ea typeface="Arial"/>
@@ -8667,7 +10117,7 @@
             <a:pPr>
               <a:defRPr sz="1125" b="1">
                 <a:solidFill>
-                  <a:srgbClr val="1A6383"/>
+                  <a:srgbClr val="DF6948"/>
                 </a:solidFill>
                 <a:latin typeface="Arial"/>
                 <a:ea typeface="Arial"/>
@@ -8677,7 +10127,7 @@
             <a:r>
               <a:rPr sz="1125" b="1">
                 <a:solidFill>
-                  <a:srgbClr val="1A6383"/>
+                  <a:srgbClr val="DF6948"/>
                 </a:solidFill>
                 <a:latin typeface="Arial"/>
                 <a:ea typeface="Arial"/>
@@ -8693,7 +10143,7 @@
           <p:cNvPr id="2" name="Slide title">
             <a:extLst xmlns:a="http://schemas.openxmlformats.org/drawingml/2006/main">
               <a:ext uri="{FF2B5EF4-FFF2-40B4-BE49-F238E27FC236}">
-                <a16:creationId xmlns:a16="http://schemas.microsoft.com/office/drawing/2014/main" id="{5EAE796C-4C26-4C31-BE9C-60E6DDADDC55}"/>
+                <a16:creationId xmlns:a16="http://schemas.microsoft.com/office/drawing/2014/main" id="{CA34B9F5-718B-447C-B57B-9F62251698ED}"/>
               </a:ext>
             </a:extLst>
           </p:cNvPr>
@@ -8839,17 +10289,17 @@
                 <a:ea typeface="Arial"/>
                 <a:cs typeface="Arial"/>
               </a:rPr>
-              <a:t>Language and required features</a:t>
+              <a:t>The string language</a:t>
             </a:r>
           </a:p>
         </p:txBody>
       </p:sp>
       <p:sp>
         <p:nvSpPr>
-          <p:cNvPr id="3" name="String Processing Mini Compiler in ">
+          <p:cNvPr id="3" name="StringLab Browser Compiler Front En">
             <a:extLst xmlns:a="http://schemas.openxmlformats.org/drawingml/2006/main">
               <a:ext uri="{FF2B5EF4-FFF2-40B4-BE49-F238E27FC236}">
-                <a16:creationId xmlns:a16="http://schemas.microsoft.com/office/drawing/2014/main" id="{BABBCAA3-DC71-4E06-9553-46B25810013F}"/>
+                <a16:creationId xmlns:a16="http://schemas.microsoft.com/office/drawing/2014/main" id="{0E14A46D-52A0-4561-BD6E-7C8E68EBD0AD}"/>
               </a:ext>
             </a:extLst>
           </p:cNvPr>
@@ -8995,7 +10445,7 @@
                 <a:ea typeface="Arial"/>
                 <a:cs typeface="Arial"/>
               </a:rPr>
-              <a:t>String Processing Mini Compiler in C</a:t>
+              <a:t>StringLab Browser Compiler Front End</a:t>
             </a:r>
           </a:p>
         </p:txBody>
@@ -9005,7 +10455,7 @@
           <p:cNvPr id="4" name="02">
             <a:extLst xmlns:a="http://schemas.openxmlformats.org/drawingml/2006/main">
               <a:ext uri="{FF2B5EF4-FFF2-40B4-BE49-F238E27FC236}">
-                <a16:creationId xmlns:a16="http://schemas.microsoft.com/office/drawing/2014/main" id="{E597DC83-F1E7-4517-A192-5D43BED7D4A2}"/>
+                <a16:creationId xmlns:a16="http://schemas.microsoft.com/office/drawing/2014/main" id="{7CDEBFB5-79CA-47F8-99DB-4DFDBD579AA9}"/>
               </a:ext>
             </a:extLst>
           </p:cNvPr>
@@ -9161,7 +10611,7 @@
           <p:cNvPr id="5" name="string name = &quot;World&quot;;&#10;string greet">
             <a:extLst xmlns:a="http://schemas.openxmlformats.org/drawingml/2006/main">
               <a:ext uri="{FF2B5EF4-FFF2-40B4-BE49-F238E27FC236}">
-                <a16:creationId xmlns:a16="http://schemas.microsoft.com/office/drawing/2014/main" id="{58610730-0E51-492D-A270-D564FF78EEED}"/>
+                <a16:creationId xmlns:a16="http://schemas.microsoft.com/office/drawing/2014/main" id="{741556CD-E6D6-49CD-910C-089C06C3E04D}"/>
               </a:ext>
             </a:extLst>
           </p:cNvPr>
@@ -9172,7 +10622,7 @@
         </p:nvSpPr>
         <p:spPr>
           <a:xfrm xmlns:a="http://schemas.openxmlformats.org/drawingml/2006/main">
-            <a:off x="685800" y="1952625"/>
+            <a:off x="685800" y="2000250"/>
             <a:ext cx="10820400" cy="2333625"/>
           </a:xfrm>
           <a:prstGeom xmlns:a="http://schemas.openxmlformats.org/drawingml/2006/main" prst="rect">
@@ -9383,10 +10833,10 @@
       </p:sp>
       <p:sp>
         <p:nvSpPr>
-          <p:cNvPr id="6" name="One global scope. String is the onl">
+          <p:cNvPr id="6" name="One string type. One global scope.">
             <a:extLst xmlns:a="http://schemas.openxmlformats.org/drawingml/2006/main">
               <a:ext uri="{FF2B5EF4-FFF2-40B4-BE49-F238E27FC236}">
-                <a16:creationId xmlns:a16="http://schemas.microsoft.com/office/drawing/2014/main" id="{CC54F2A2-BACA-40E0-B276-9B4695283F6B}"/>
+                <a16:creationId xmlns:a16="http://schemas.microsoft.com/office/drawing/2014/main" id="{C1B880E1-E556-4270-85C1-D38E2AE9F348}"/>
               </a:ext>
             </a:extLst>
           </p:cNvPr>
@@ -9397,7 +10847,7 @@
         </p:nvSpPr>
         <p:spPr>
           <a:xfrm xmlns:a="http://schemas.openxmlformats.org/drawingml/2006/main">
-            <a:off x="685800" y="4686300"/>
+            <a:off x="685800" y="4695825"/>
             <a:ext cx="10477500" cy="457200"/>
           </a:xfrm>
           <a:prstGeom xmlns:a="http://schemas.openxmlformats.org/drawingml/2006/main" prst="rect">
@@ -9532,17 +10982,17 @@
                 <a:ea typeface="Arial"/>
                 <a:cs typeface="Arial"/>
               </a:rPr>
-              <a:t>One global scope. String is the only type.</a:t>
+              <a:t>One string type. One global scope.</a:t>
             </a:r>
           </a:p>
         </p:txBody>
       </p:sp>
       <p:sp>
         <p:nvSpPr>
-          <p:cNvPr id="7" name="Double-quoted literals, parentheses">
+          <p:cNvPr id="7" name="Double quotes, semicolons, parenthe">
             <a:extLst xmlns:a="http://schemas.openxmlformats.org/drawingml/2006/main">
               <a:ext uri="{FF2B5EF4-FFF2-40B4-BE49-F238E27FC236}">
-                <a16:creationId xmlns:a16="http://schemas.microsoft.com/office/drawing/2014/main" id="{2D51A2C6-47DF-438E-85C5-557BDAF7FE56}"/>
+                <a16:creationId xmlns:a16="http://schemas.microsoft.com/office/drawing/2014/main" id="{2CC1E4E3-ED5E-49C9-A8A3-B3803EE1C4D7}"/>
               </a:ext>
             </a:extLst>
           </p:cNvPr>
@@ -9553,8 +11003,8 @@
         </p:nvSpPr>
         <p:spPr>
           <a:xfrm xmlns:a="http://schemas.openxmlformats.org/drawingml/2006/main">
-            <a:off x="685800" y="5314950"/>
-            <a:ext cx="10477500" cy="476250"/>
+            <a:off x="685800" y="5324475"/>
+            <a:ext cx="10820400" cy="476250"/>
           </a:xfrm>
           <a:prstGeom xmlns:a="http://schemas.openxmlformats.org/drawingml/2006/main" prst="rect">
             <a:avLst/>
@@ -9568,7 +11018,7 @@
           <a:bodyPr xmlns:a="http://schemas.openxmlformats.org/drawingml/2006/main"/>
           <a:lstStyle xmlns:a="http://schemas.openxmlformats.org/drawingml/2006/main">
             <a:defPPr>
-              <a:defRPr sz="2100" b="0">
+              <a:defRPr sz="2025" b="0">
                 <a:solidFill>
                   <a:srgbClr val="52667B"/>
                 </a:solidFill>
@@ -9578,7 +11028,7 @@
               </a:defRPr>
             </a:defPPr>
             <a:lvl1pPr>
-              <a:defRPr sz="2100" b="0">
+              <a:defRPr sz="2025" b="0">
                 <a:solidFill>
                   <a:srgbClr val="52667B"/>
                 </a:solidFill>
@@ -9588,7 +11038,7 @@
               </a:defRPr>
             </a:lvl1pPr>
             <a:lvl2pPr>
-              <a:defRPr sz="2100" b="0">
+              <a:defRPr sz="2025" b="0">
                 <a:solidFill>
                   <a:srgbClr val="52667B"/>
                 </a:solidFill>
@@ -9598,7 +11048,7 @@
               </a:defRPr>
             </a:lvl2pPr>
             <a:lvl3pPr>
-              <a:defRPr sz="2100" b="0">
+              <a:defRPr sz="2025" b="0">
                 <a:solidFill>
                   <a:srgbClr val="52667B"/>
                 </a:solidFill>
@@ -9608,7 +11058,7 @@
               </a:defRPr>
             </a:lvl3pPr>
             <a:lvl4pPr>
-              <a:defRPr sz="2100" b="0">
+              <a:defRPr sz="2025" b="0">
                 <a:solidFill>
                   <a:srgbClr val="52667B"/>
                 </a:solidFill>
@@ -9618,7 +11068,7 @@
               </a:defRPr>
             </a:lvl4pPr>
             <a:lvl5pPr>
-              <a:defRPr sz="2100" b="0">
+              <a:defRPr sz="2025" b="0">
                 <a:solidFill>
                   <a:srgbClr val="52667B"/>
                 </a:solidFill>
@@ -9628,7 +11078,7 @@
               </a:defRPr>
             </a:lvl5pPr>
             <a:lvl6pPr>
-              <a:defRPr sz="2100" b="0">
+              <a:defRPr sz="2025" b="0">
                 <a:solidFill>
                   <a:srgbClr val="52667B"/>
                 </a:solidFill>
@@ -9638,7 +11088,7 @@
               </a:defRPr>
             </a:lvl6pPr>
             <a:lvl7pPr>
-              <a:defRPr sz="2100" b="0">
+              <a:defRPr sz="2025" b="0">
                 <a:solidFill>
                   <a:srgbClr val="52667B"/>
                 </a:solidFill>
@@ -9648,7 +11098,7 @@
               </a:defRPr>
             </a:lvl7pPr>
             <a:lvl8pPr>
-              <a:defRPr sz="2100" b="0">
+              <a:defRPr sz="2025" b="0">
                 <a:solidFill>
                   <a:srgbClr val="52667B"/>
                 </a:solidFill>
@@ -9658,7 +11108,7 @@
               </a:defRPr>
             </a:lvl8pPr>
             <a:lvl9pPr>
-              <a:defRPr sz="2100" b="0">
+              <a:defRPr sz="2025" b="0">
                 <a:solidFill>
                   <a:srgbClr val="52667B"/>
                 </a:solidFill>
@@ -9670,7 +11120,7 @@
           </a:lstStyle>
           <a:p xmlns:a="http://schemas.openxmlformats.org/drawingml/2006/main">
             <a:pPr>
-              <a:defRPr sz="2100" b="0">
+              <a:defRPr sz="2025" b="0">
                 <a:solidFill>
                   <a:srgbClr val="52667B"/>
                 </a:solidFill>
@@ -9680,7 +11130,7 @@
               </a:defRPr>
             </a:pPr>
             <a:r>
-              <a:rPr sz="2100" b="0">
+              <a:rPr sz="2025" b="0">
                 <a:solidFill>
                   <a:srgbClr val="52667B"/>
                 </a:solidFill>
@@ -9688,7 +11138,7 @@
                 <a:ea typeface="Arial"/>
                 <a:cs typeface="Arial"/>
               </a:rPr>
-              <a:t>Double-quoted literals, parentheses and // comments.</a:t>
+              <a:t>Double quotes, semicolons, parentheses and // comments.</a:t>
             </a:r>
           </a:p>
         </p:txBody>
@@ -9696,7 +11146,7 @@
     </p:spTree>
     <p:extLst>
       <p:ext uri="{BB962C8B-B14F-4D97-AF65-F5344CB8AC3E}">
-        <p14:creationId xmlns:p14="http://schemas.microsoft.com/office/powerpoint/2010/main" val="605341042"/>
+        <p14:creationId xmlns:p14="http://schemas.microsoft.com/office/powerpoint/2010/main" val="2030358410"/>
       </p:ext>
     </p:extLst>
   </p:cSld>
@@ -9727,7 +11177,7 @@
           <p:cNvPr id="7" name="COMPILER DESIGN">
             <a:extLst xmlns:a="http://schemas.openxmlformats.org/drawingml/2006/main">
               <a:ext uri="{FF2B5EF4-FFF2-40B4-BE49-F238E27FC236}">
-                <a16:creationId xmlns:a16="http://schemas.microsoft.com/office/drawing/2014/main" id="{922A5482-2393-46C6-A91C-2395A4D11A29}"/>
+                <a16:creationId xmlns:a16="http://schemas.microsoft.com/office/drawing/2014/main" id="{CDFE833B-DE1A-4A32-AC82-B6DCF50D28FB}"/>
               </a:ext>
             </a:extLst>
           </p:cNvPr>
@@ -9755,7 +11205,7 @@
             <a:defPPr>
               <a:defRPr sz="1125" b="1">
                 <a:solidFill>
-                  <a:srgbClr val="1A6383"/>
+                  <a:srgbClr val="DF6948"/>
                 </a:solidFill>
                 <a:latin typeface="Arial"/>
                 <a:ea typeface="Arial"/>
@@ -9765,7 +11215,7 @@
             <a:lvl1pPr>
               <a:defRPr sz="1125" b="1">
                 <a:solidFill>
-                  <a:srgbClr val="1A6383"/>
+                  <a:srgbClr val="DF6948"/>
                 </a:solidFill>
                 <a:latin typeface="Arial"/>
                 <a:ea typeface="Arial"/>
@@ -9775,7 +11225,7 @@
             <a:lvl2pPr>
               <a:defRPr sz="1125" b="1">
                 <a:solidFill>
-                  <a:srgbClr val="1A6383"/>
+                  <a:srgbClr val="DF6948"/>
                 </a:solidFill>
                 <a:latin typeface="Arial"/>
                 <a:ea typeface="Arial"/>
@@ -9785,7 +11235,7 @@
             <a:lvl3pPr>
               <a:defRPr sz="1125" b="1">
                 <a:solidFill>
-                  <a:srgbClr val="1A6383"/>
+                  <a:srgbClr val="DF6948"/>
                 </a:solidFill>
                 <a:latin typeface="Arial"/>
                 <a:ea typeface="Arial"/>
@@ -9795,7 +11245,7 @@
             <a:lvl4pPr>
               <a:defRPr sz="1125" b="1">
                 <a:solidFill>
-                  <a:srgbClr val="1A6383"/>
+                  <a:srgbClr val="DF6948"/>
                 </a:solidFill>
                 <a:latin typeface="Arial"/>
                 <a:ea typeface="Arial"/>
@@ -9805,7 +11255,7 @@
             <a:lvl5pPr>
               <a:defRPr sz="1125" b="1">
                 <a:solidFill>
-                  <a:srgbClr val="1A6383"/>
+                  <a:srgbClr val="DF6948"/>
                 </a:solidFill>
                 <a:latin typeface="Arial"/>
                 <a:ea typeface="Arial"/>
@@ -9815,7 +11265,7 @@
             <a:lvl6pPr>
               <a:defRPr sz="1125" b="1">
                 <a:solidFill>
-                  <a:srgbClr val="1A6383"/>
+                  <a:srgbClr val="DF6948"/>
                 </a:solidFill>
                 <a:latin typeface="Arial"/>
                 <a:ea typeface="Arial"/>
@@ -9825,7 +11275,7 @@
             <a:lvl7pPr>
               <a:defRPr sz="1125" b="1">
                 <a:solidFill>
-                  <a:srgbClr val="1A6383"/>
+                  <a:srgbClr val="DF6948"/>
                 </a:solidFill>
                 <a:latin typeface="Arial"/>
                 <a:ea typeface="Arial"/>
@@ -9835,7 +11285,7 @@
             <a:lvl8pPr>
               <a:defRPr sz="1125" b="1">
                 <a:solidFill>
-                  <a:srgbClr val="1A6383"/>
+                  <a:srgbClr val="DF6948"/>
                 </a:solidFill>
                 <a:latin typeface="Arial"/>
                 <a:ea typeface="Arial"/>
@@ -9845,7 +11295,7 @@
             <a:lvl9pPr>
               <a:defRPr sz="1125" b="1">
                 <a:solidFill>
-                  <a:srgbClr val="1A6383"/>
+                  <a:srgbClr val="DF6948"/>
                 </a:solidFill>
                 <a:latin typeface="Arial"/>
                 <a:ea typeface="Arial"/>
@@ -9857,7 +11307,7 @@
             <a:pPr>
               <a:defRPr sz="1125" b="1">
                 <a:solidFill>
-                  <a:srgbClr val="1A6383"/>
+                  <a:srgbClr val="DF6948"/>
                 </a:solidFill>
                 <a:latin typeface="Arial"/>
                 <a:ea typeface="Arial"/>
@@ -9867,7 +11317,7 @@
             <a:r>
               <a:rPr sz="1125" b="1">
                 <a:solidFill>
-                  <a:srgbClr val="1A6383"/>
+                  <a:srgbClr val="DF6948"/>
                 </a:solidFill>
                 <a:latin typeface="Arial"/>
                 <a:ea typeface="Arial"/>
@@ -9883,7 +11333,7 @@
           <p:cNvPr id="2" name="Slide title">
             <a:extLst xmlns:a="http://schemas.openxmlformats.org/drawingml/2006/main">
               <a:ext uri="{FF2B5EF4-FFF2-40B4-BE49-F238E27FC236}">
-                <a16:creationId xmlns:a16="http://schemas.microsoft.com/office/drawing/2014/main" id="{ADE5BD9C-C7F2-441A-8BA5-089F754FC73B}"/>
+                <a16:creationId xmlns:a16="http://schemas.microsoft.com/office/drawing/2014/main" id="{D9B73162-9748-4909-ABE3-3DE55F4E9002}"/>
               </a:ext>
             </a:extLst>
           </p:cNvPr>
@@ -10029,17 +11479,17 @@
                 <a:ea typeface="Arial"/>
                 <a:cs typeface="Arial"/>
               </a:rPr>
-              <a:t>Compiler pipeline</a:t>
+              <a:t>The browser compiler pipeline</a:t>
             </a:r>
           </a:p>
         </p:txBody>
       </p:sp>
       <p:sp>
         <p:nvSpPr>
-          <p:cNvPr id="3" name="String Processing Mini Compiler in ">
+          <p:cNvPr id="3" name="StringLab Browser Compiler Front En">
             <a:extLst xmlns:a="http://schemas.openxmlformats.org/drawingml/2006/main">
               <a:ext uri="{FF2B5EF4-FFF2-40B4-BE49-F238E27FC236}">
-                <a16:creationId xmlns:a16="http://schemas.microsoft.com/office/drawing/2014/main" id="{4BFC7408-585F-4330-8CDA-CD604B185976}"/>
+                <a16:creationId xmlns:a16="http://schemas.microsoft.com/office/drawing/2014/main" id="{6FDD23C2-2A5D-4C9D-872D-35E91C698794}"/>
               </a:ext>
             </a:extLst>
           </p:cNvPr>
@@ -10185,7 +11635,7 @@
                 <a:ea typeface="Arial"/>
                 <a:cs typeface="Arial"/>
               </a:rPr>
-              <a:t>String Processing Mini Compiler in C</a:t>
+              <a:t>StringLab Browser Compiler Front End</a:t>
             </a:r>
           </a:p>
         </p:txBody>
@@ -10195,7 +11645,7 @@
           <p:cNvPr id="4" name="03">
             <a:extLst xmlns:a="http://schemas.openxmlformats.org/drawingml/2006/main">
               <a:ext uri="{FF2B5EF4-FFF2-40B4-BE49-F238E27FC236}">
-                <a16:creationId xmlns:a16="http://schemas.microsoft.com/office/drawing/2014/main" id="{1CC6B208-BBA1-4633-9515-D67026A6EBD9}"/>
+                <a16:creationId xmlns:a16="http://schemas.microsoft.com/office/drawing/2014/main" id="{648A6FA8-FF8F-4545-AE7C-0727795FEF44}"/>
               </a:ext>
             </a:extLst>
           </p:cNvPr>
@@ -10348,10 +11798,10 @@
       </p:sp>
       <p:sp>
         <p:nvSpPr>
-          <p:cNvPr id="5" name="01   Source file and lexical analys">
+          <p:cNvPr id="5" name="01   Source and lexical analysis&#10;02">
             <a:extLst xmlns:a="http://schemas.openxmlformats.org/drawingml/2006/main">
               <a:ext uri="{FF2B5EF4-FFF2-40B4-BE49-F238E27FC236}">
-                <a16:creationId xmlns:a16="http://schemas.microsoft.com/office/drawing/2014/main" id="{AE016C78-6981-4A51-8CA9-78E117C14A38}"/>
+                <a16:creationId xmlns:a16="http://schemas.microsoft.com/office/drawing/2014/main" id="{01369C2D-D909-4469-8090-6114B14FB873}"/>
               </a:ext>
             </a:extLst>
           </p:cNvPr>
@@ -10362,8 +11812,8 @@
         </p:nvSpPr>
         <p:spPr>
           <a:xfrm xmlns:a="http://schemas.openxmlformats.org/drawingml/2006/main">
-            <a:off x="685800" y="1885950"/>
-            <a:ext cx="10820400" cy="2952750"/>
+            <a:off x="685800" y="1895475"/>
+            <a:ext cx="10820400" cy="2905125"/>
           </a:xfrm>
           <a:prstGeom xmlns:a="http://schemas.openxmlformats.org/drawingml/2006/main" prst="rect">
             <a:avLst/>
@@ -10497,7 +11947,7 @@
                 <a:ea typeface="Arial"/>
                 <a:cs typeface="Arial"/>
               </a:rPr>
-              <a:t>01   Source file and lexical analysis</a:t>
+              <a:t>01   Source and lexical analysis</a:t>
             </a:r>
           </a:p>
           <a:p xmlns:a="http://schemas.openxmlformats.org/drawingml/2006/main">
@@ -10566,17 +12016,17 @@
                 <a:ea typeface="Arial"/>
                 <a:cs typeface="Arial"/>
               </a:rPr>
-              <a:t>04   Accepted program and preview output</a:t>
+              <a:t>04   Accepted program and output preview</a:t>
             </a:r>
           </a:p>
         </p:txBody>
       </p:sp>
       <p:sp>
         <p:nvSpPr>
-          <p:cNvPr id="6" name="Diagnostics identify the phase, lin">
+          <p:cNvPr id="6" name="The interface makes every phase ins">
             <a:extLst xmlns:a="http://schemas.openxmlformats.org/drawingml/2006/main">
               <a:ext uri="{FF2B5EF4-FFF2-40B4-BE49-F238E27FC236}">
-                <a16:creationId xmlns:a16="http://schemas.microsoft.com/office/drawing/2014/main" id="{9A99C370-EB6B-466C-9662-C36824F30B14}"/>
+                <a16:creationId xmlns:a16="http://schemas.microsoft.com/office/drawing/2014/main" id="{01FA6612-A38E-48EC-A5A8-F4F85F7CE923}"/>
               </a:ext>
             </a:extLst>
           </p:cNvPr>
@@ -10587,8 +12037,8 @@
         </p:nvSpPr>
         <p:spPr>
           <a:xfrm xmlns:a="http://schemas.openxmlformats.org/drawingml/2006/main">
-            <a:off x="685800" y="5267325"/>
-            <a:ext cx="10820400" cy="571500"/>
+            <a:off x="685800" y="5305425"/>
+            <a:ext cx="10820400" cy="457200"/>
           </a:xfrm>
           <a:prstGeom xmlns:a="http://schemas.openxmlformats.org/drawingml/2006/main" prst="rect">
             <a:avLst/>
@@ -10602,7 +12052,7 @@
           <a:bodyPr xmlns:a="http://schemas.openxmlformats.org/drawingml/2006/main"/>
           <a:lstStyle xmlns:a="http://schemas.openxmlformats.org/drawingml/2006/main">
             <a:defPPr>
-              <a:defRPr sz="2025" b="0">
+              <a:defRPr sz="2100" b="0">
                 <a:solidFill>
                   <a:srgbClr val="52667B"/>
                 </a:solidFill>
@@ -10612,7 +12062,7 @@
               </a:defRPr>
             </a:defPPr>
             <a:lvl1pPr>
-              <a:defRPr sz="2025" b="0">
+              <a:defRPr sz="2100" b="0">
                 <a:solidFill>
                   <a:srgbClr val="52667B"/>
                 </a:solidFill>
@@ -10622,7 +12072,7 @@
               </a:defRPr>
             </a:lvl1pPr>
             <a:lvl2pPr>
-              <a:defRPr sz="2025" b="0">
+              <a:defRPr sz="2100" b="0">
                 <a:solidFill>
                   <a:srgbClr val="52667B"/>
                 </a:solidFill>
@@ -10632,7 +12082,7 @@
               </a:defRPr>
             </a:lvl2pPr>
             <a:lvl3pPr>
-              <a:defRPr sz="2025" b="0">
+              <a:defRPr sz="2100" b="0">
                 <a:solidFill>
                   <a:srgbClr val="52667B"/>
                 </a:solidFill>
@@ -10642,7 +12092,7 @@
               </a:defRPr>
             </a:lvl3pPr>
             <a:lvl4pPr>
-              <a:defRPr sz="2025" b="0">
+              <a:defRPr sz="2100" b="0">
                 <a:solidFill>
                   <a:srgbClr val="52667B"/>
                 </a:solidFill>
@@ -10652,7 +12102,7 @@
               </a:defRPr>
             </a:lvl4pPr>
             <a:lvl5pPr>
-              <a:defRPr sz="2025" b="0">
+              <a:defRPr sz="2100" b="0">
                 <a:solidFill>
                   <a:srgbClr val="52667B"/>
                 </a:solidFill>
@@ -10662,7 +12112,7 @@
               </a:defRPr>
             </a:lvl5pPr>
             <a:lvl6pPr>
-              <a:defRPr sz="2025" b="0">
+              <a:defRPr sz="2100" b="0">
                 <a:solidFill>
                   <a:srgbClr val="52667B"/>
                 </a:solidFill>
@@ -10672,7 +12122,7 @@
               </a:defRPr>
             </a:lvl6pPr>
             <a:lvl7pPr>
-              <a:defRPr sz="2025" b="0">
+              <a:defRPr sz="2100" b="0">
                 <a:solidFill>
                   <a:srgbClr val="52667B"/>
                 </a:solidFill>
@@ -10682,7 +12132,7 @@
               </a:defRPr>
             </a:lvl7pPr>
             <a:lvl8pPr>
-              <a:defRPr sz="2025" b="0">
+              <a:defRPr sz="2100" b="0">
                 <a:solidFill>
                   <a:srgbClr val="52667B"/>
                 </a:solidFill>
@@ -10692,7 +12142,7 @@
               </a:defRPr>
             </a:lvl8pPr>
             <a:lvl9pPr>
-              <a:defRPr sz="2025" b="0">
+              <a:defRPr sz="2100" b="0">
                 <a:solidFill>
                   <a:srgbClr val="52667B"/>
                 </a:solidFill>
@@ -10704,7 +12154,7 @@
           </a:lstStyle>
           <a:p xmlns:a="http://schemas.openxmlformats.org/drawingml/2006/main">
             <a:pPr>
-              <a:defRPr sz="2025" b="0">
+              <a:defRPr sz="2100" b="0">
                 <a:solidFill>
                   <a:srgbClr val="52667B"/>
                 </a:solidFill>
@@ -10714,7 +12164,7 @@
               </a:defRPr>
             </a:pPr>
             <a:r>
-              <a:rPr sz="2025" b="0">
+              <a:rPr sz="2100" b="0">
                 <a:solidFill>
                   <a:srgbClr val="52667B"/>
                 </a:solidFill>
@@ -10722,7 +12172,7 @@
                 <a:ea typeface="Arial"/>
                 <a:cs typeface="Arial"/>
               </a:rPr>
-              <a:t>Diagnostics identify the phase, line and byte column.</a:t>
+              <a:t>The interface makes every phase inspectable.</a:t>
             </a:r>
           </a:p>
         </p:txBody>
@@ -10730,7 +12180,7 @@
     </p:spTree>
     <p:extLst>
       <p:ext uri="{BB962C8B-B14F-4D97-AF65-F5344CB8AC3E}">
-        <p14:creationId xmlns:p14="http://schemas.microsoft.com/office/powerpoint/2010/main" val="537192718"/>
+        <p14:creationId xmlns:p14="http://schemas.microsoft.com/office/powerpoint/2010/main" val="394841599"/>
       </p:ext>
     </p:extLst>
   </p:cSld>
@@ -10761,7 +12211,7 @@
           <p:cNvPr id="7" name="COMPILER DESIGN">
             <a:extLst xmlns:a="http://schemas.openxmlformats.org/drawingml/2006/main">
               <a:ext uri="{FF2B5EF4-FFF2-40B4-BE49-F238E27FC236}">
-                <a16:creationId xmlns:a16="http://schemas.microsoft.com/office/drawing/2014/main" id="{62DCBF48-6AB7-4540-A2EA-A47512FF1464}"/>
+                <a16:creationId xmlns:a16="http://schemas.microsoft.com/office/drawing/2014/main" id="{FFA0DBAC-25EA-44EE-AF94-12EEC8C13522}"/>
               </a:ext>
             </a:extLst>
           </p:cNvPr>
@@ -10789,7 +12239,7 @@
             <a:defPPr>
               <a:defRPr sz="1125" b="1">
                 <a:solidFill>
-                  <a:srgbClr val="1A6383"/>
+                  <a:srgbClr val="DF6948"/>
                 </a:solidFill>
                 <a:latin typeface="Arial"/>
                 <a:ea typeface="Arial"/>
@@ -10799,7 +12249,7 @@
             <a:lvl1pPr>
               <a:defRPr sz="1125" b="1">
                 <a:solidFill>
-                  <a:srgbClr val="1A6383"/>
+                  <a:srgbClr val="DF6948"/>
                 </a:solidFill>
                 <a:latin typeface="Arial"/>
                 <a:ea typeface="Arial"/>
@@ -10809,7 +12259,7 @@
             <a:lvl2pPr>
               <a:defRPr sz="1125" b="1">
                 <a:solidFill>
-                  <a:srgbClr val="1A6383"/>
+                  <a:srgbClr val="DF6948"/>
                 </a:solidFill>
                 <a:latin typeface="Arial"/>
                 <a:ea typeface="Arial"/>
@@ -10819,7 +12269,7 @@
             <a:lvl3pPr>
               <a:defRPr sz="1125" b="1">
                 <a:solidFill>
-                  <a:srgbClr val="1A6383"/>
+                  <a:srgbClr val="DF6948"/>
                 </a:solidFill>
                 <a:latin typeface="Arial"/>
                 <a:ea typeface="Arial"/>
@@ -10829,7 +12279,7 @@
             <a:lvl4pPr>
               <a:defRPr sz="1125" b="1">
                 <a:solidFill>
-                  <a:srgbClr val="1A6383"/>
+                  <a:srgbClr val="DF6948"/>
                 </a:solidFill>
                 <a:latin typeface="Arial"/>
                 <a:ea typeface="Arial"/>
@@ -10839,7 +12289,7 @@
             <a:lvl5pPr>
               <a:defRPr sz="1125" b="1">
                 <a:solidFill>
-                  <a:srgbClr val="1A6383"/>
+                  <a:srgbClr val="DF6948"/>
                 </a:solidFill>
                 <a:latin typeface="Arial"/>
                 <a:ea typeface="Arial"/>
@@ -10849,7 +12299,7 @@
             <a:lvl6pPr>
               <a:defRPr sz="1125" b="1">
                 <a:solidFill>
-                  <a:srgbClr val="1A6383"/>
+                  <a:srgbClr val="DF6948"/>
                 </a:solidFill>
                 <a:latin typeface="Arial"/>
                 <a:ea typeface="Arial"/>
@@ -10859,7 +12309,7 @@
             <a:lvl7pPr>
               <a:defRPr sz="1125" b="1">
                 <a:solidFill>
-                  <a:srgbClr val="1A6383"/>
+                  <a:srgbClr val="DF6948"/>
                 </a:solidFill>
                 <a:latin typeface="Arial"/>
                 <a:ea typeface="Arial"/>
@@ -10869,7 +12319,7 @@
             <a:lvl8pPr>
               <a:defRPr sz="1125" b="1">
                 <a:solidFill>
-                  <a:srgbClr val="1A6383"/>
+                  <a:srgbClr val="DF6948"/>
                 </a:solidFill>
                 <a:latin typeface="Arial"/>
                 <a:ea typeface="Arial"/>
@@ -10879,7 +12329,7 @@
             <a:lvl9pPr>
               <a:defRPr sz="1125" b="1">
                 <a:solidFill>
-                  <a:srgbClr val="1A6383"/>
+                  <a:srgbClr val="DF6948"/>
                 </a:solidFill>
                 <a:latin typeface="Arial"/>
                 <a:ea typeface="Arial"/>
@@ -10891,7 +12341,7 @@
             <a:pPr>
               <a:defRPr sz="1125" b="1">
                 <a:solidFill>
-                  <a:srgbClr val="1A6383"/>
+                  <a:srgbClr val="DF6948"/>
                 </a:solidFill>
                 <a:latin typeface="Arial"/>
                 <a:ea typeface="Arial"/>
@@ -10901,7 +12351,7 @@
             <a:r>
               <a:rPr sz="1125" b="1">
                 <a:solidFill>
-                  <a:srgbClr val="1A6383"/>
+                  <a:srgbClr val="DF6948"/>
                 </a:solidFill>
                 <a:latin typeface="Arial"/>
                 <a:ea typeface="Arial"/>
@@ -10917,7 +12367,7 @@
           <p:cNvPr id="2" name="Slide title">
             <a:extLst xmlns:a="http://schemas.openxmlformats.org/drawingml/2006/main">
               <a:ext uri="{FF2B5EF4-FFF2-40B4-BE49-F238E27FC236}">
-                <a16:creationId xmlns:a16="http://schemas.microsoft.com/office/drawing/2014/main" id="{73AC7394-735E-4EB7-92C3-4F2F31EEDD83}"/>
+                <a16:creationId xmlns:a16="http://schemas.microsoft.com/office/drawing/2014/main" id="{8C37A6F0-0CFC-4D5A-B64C-7E5862DD9DBE}"/>
               </a:ext>
             </a:extLst>
           </p:cNvPr>
@@ -11063,17 +12513,17 @@
                 <a:ea typeface="Arial"/>
                 <a:cs typeface="Arial"/>
               </a:rPr>
-              <a:t>Lexical analyzer</a:t>
+              <a:t>Lexical analysis</a:t>
             </a:r>
           </a:p>
         </p:txBody>
       </p:sp>
       <p:sp>
         <p:nvSpPr>
-          <p:cNvPr id="3" name="String Processing Mini Compiler in ">
+          <p:cNvPr id="3" name="StringLab Browser Compiler Front En">
             <a:extLst xmlns:a="http://schemas.openxmlformats.org/drawingml/2006/main">
               <a:ext uri="{FF2B5EF4-FFF2-40B4-BE49-F238E27FC236}">
-                <a16:creationId xmlns:a16="http://schemas.microsoft.com/office/drawing/2014/main" id="{E07C6052-6FC7-4DCF-AA32-E9477D5CC2B8}"/>
+                <a16:creationId xmlns:a16="http://schemas.microsoft.com/office/drawing/2014/main" id="{A6B0F10B-B156-4977-98C3-349349DEFAAC}"/>
               </a:ext>
             </a:extLst>
           </p:cNvPr>
@@ -11219,7 +12669,7 @@
                 <a:ea typeface="Arial"/>
                 <a:cs typeface="Arial"/>
               </a:rPr>
-              <a:t>String Processing Mini Compiler in C</a:t>
+              <a:t>StringLab Browser Compiler Front End</a:t>
             </a:r>
           </a:p>
         </p:txBody>
@@ -11229,7 +12679,7 @@
           <p:cNvPr id="4" name="04">
             <a:extLst xmlns:a="http://schemas.openxmlformats.org/drawingml/2006/main">
               <a:ext uri="{FF2B5EF4-FFF2-40B4-BE49-F238E27FC236}">
-                <a16:creationId xmlns:a16="http://schemas.microsoft.com/office/drawing/2014/main" id="{CC681D50-B410-457E-A87A-A24BD6412249}"/>
+                <a16:creationId xmlns:a16="http://schemas.microsoft.com/office/drawing/2014/main" id="{550954C3-332F-4C86-9EF3-E50B94A65A09}"/>
               </a:ext>
             </a:extLst>
           </p:cNvPr>
@@ -11385,7 +12835,7 @@
           <p:cNvPr id="5" name="">
             <a:extLst xmlns:a="http://schemas.openxmlformats.org/drawingml/2006/main">
               <a:ext uri="{FF2B5EF4-FFF2-40B4-BE49-F238E27FC236}">
-                <a16:creationId xmlns:a16="http://schemas.microsoft.com/office/drawing/2014/main" id="{C9474F26-13D5-4C6F-8143-EE7B96E1448A}"/>
+                <a16:creationId xmlns:a16="http://schemas.microsoft.com/office/drawing/2014/main" id="{54F5C599-E2E4-41CE-B3C0-38C12EBDFC77}"/>
               </a:ext>
             </a:extLst>
           </p:cNvPr>
@@ -11395,13 +12845,13 @@
           <p:nvPr/>
         </p:nvPicPr>
         <p:blipFill>
-          <a:blip xmlns:r="http://schemas.openxmlformats.org/officeDocument/2006/relationships" xmlns:a="http://schemas.openxmlformats.org/drawingml/2006/main" r:embed="Rfdb197a82623404b"/>
+          <a:blip xmlns:r="http://schemas.openxmlformats.org/officeDocument/2006/relationships" xmlns:a="http://schemas.openxmlformats.org/drawingml/2006/main" r:embed="R07ac1001c84743d9"/>
           <a:stretch xmlns:a="http://schemas.openxmlformats.org/drawingml/2006/main"/>
         </p:blipFill>
         <p:spPr>
           <a:xfrm xmlns:a="http://schemas.openxmlformats.org/drawingml/2006/main">
-            <a:off x="685800" y="1852301"/>
-            <a:ext cx="7810500" cy="4001124"/>
+            <a:off x="1295032" y="1762125"/>
+            <a:ext cx="5687161" cy="4191000"/>
           </a:xfrm>
           <a:prstGeom xmlns:a="http://schemas.openxmlformats.org/drawingml/2006/main" prst="rect">
             <a:avLst/>
@@ -11410,10 +12860,10 @@
       </p:pic>
       <p:sp>
         <p:nvSpPr>
-          <p:cNvPr id="6" name="Positioned tokens&#10;&#10;Decoded literals">
+          <p:cNvPr id="6" name="Positioned tokens&#10;&#10;Raw lexemes&#10;&#10;Dec">
             <a:extLst xmlns:a="http://schemas.openxmlformats.org/drawingml/2006/main">
               <a:ext uri="{FF2B5EF4-FFF2-40B4-BE49-F238E27FC236}">
-                <a16:creationId xmlns:a16="http://schemas.microsoft.com/office/drawing/2014/main" id="{B63EC2A6-9D10-449F-997A-7EEFEC990D61}"/>
+                <a16:creationId xmlns:a16="http://schemas.microsoft.com/office/drawing/2014/main" id="{77ABDC49-3E97-407D-A82E-A7F719567D30}"/>
               </a:ext>
             </a:extLst>
           </p:cNvPr>
@@ -11424,8 +12874,8 @@
         </p:nvSpPr>
         <p:spPr>
           <a:xfrm xmlns:a="http://schemas.openxmlformats.org/drawingml/2006/main">
-            <a:off x="8810625" y="2076450"/>
-            <a:ext cx="2857500" cy="3048000"/>
+            <a:off x="8039100" y="2047875"/>
+            <a:ext cx="3476625" cy="3333750"/>
           </a:xfrm>
           <a:prstGeom xmlns:a="http://schemas.openxmlformats.org/drawingml/2006/main" prst="rect">
             <a:avLst/>
@@ -11439,7 +12889,7 @@
           <a:bodyPr xmlns:a="http://schemas.openxmlformats.org/drawingml/2006/main"/>
           <a:lstStyle xmlns:a="http://schemas.openxmlformats.org/drawingml/2006/main">
             <a:defPPr>
-              <a:defRPr sz="2025" b="0">
+              <a:defRPr sz="2100" b="0">
                 <a:solidFill>
                   <a:srgbClr val="142B43"/>
                 </a:solidFill>
@@ -11449,7 +12899,7 @@
               </a:defRPr>
             </a:defPPr>
             <a:lvl1pPr>
-              <a:defRPr sz="2025" b="0">
+              <a:defRPr sz="2100" b="0">
                 <a:solidFill>
                   <a:srgbClr val="142B43"/>
                 </a:solidFill>
@@ -11459,7 +12909,7 @@
               </a:defRPr>
             </a:lvl1pPr>
             <a:lvl2pPr>
-              <a:defRPr sz="2025" b="0">
+              <a:defRPr sz="2100" b="0">
                 <a:solidFill>
                   <a:srgbClr val="142B43"/>
                 </a:solidFill>
@@ -11469,7 +12919,7 @@
               </a:defRPr>
             </a:lvl2pPr>
             <a:lvl3pPr>
-              <a:defRPr sz="2025" b="0">
+              <a:defRPr sz="2100" b="0">
                 <a:solidFill>
                   <a:srgbClr val="142B43"/>
                 </a:solidFill>
@@ -11479,7 +12929,7 @@
               </a:defRPr>
             </a:lvl3pPr>
             <a:lvl4pPr>
-              <a:defRPr sz="2025" b="0">
+              <a:defRPr sz="2100" b="0">
                 <a:solidFill>
                   <a:srgbClr val="142B43"/>
                 </a:solidFill>
@@ -11489,7 +12939,7 @@
               </a:defRPr>
             </a:lvl4pPr>
             <a:lvl5pPr>
-              <a:defRPr sz="2025" b="0">
+              <a:defRPr sz="2100" b="0">
                 <a:solidFill>
                   <a:srgbClr val="142B43"/>
                 </a:solidFill>
@@ -11499,7 +12949,7 @@
               </a:defRPr>
             </a:lvl5pPr>
             <a:lvl6pPr>
-              <a:defRPr sz="2025" b="0">
+              <a:defRPr sz="2100" b="0">
                 <a:solidFill>
                   <a:srgbClr val="142B43"/>
                 </a:solidFill>
@@ -11509,7 +12959,7 @@
               </a:defRPr>
             </a:lvl6pPr>
             <a:lvl7pPr>
-              <a:defRPr sz="2025" b="0">
+              <a:defRPr sz="2100" b="0">
                 <a:solidFill>
                   <a:srgbClr val="142B43"/>
                 </a:solidFill>
@@ -11519,7 +12969,7 @@
               </a:defRPr>
             </a:lvl7pPr>
             <a:lvl8pPr>
-              <a:defRPr sz="2025" b="0">
+              <a:defRPr sz="2100" b="0">
                 <a:solidFill>
                   <a:srgbClr val="142B43"/>
                 </a:solidFill>
@@ -11529,7 +12979,7 @@
               </a:defRPr>
             </a:lvl8pPr>
             <a:lvl9pPr>
-              <a:defRPr sz="2025" b="0">
+              <a:defRPr sz="2100" b="0">
                 <a:solidFill>
                   <a:srgbClr val="142B43"/>
                 </a:solidFill>
@@ -11541,7 +12991,7 @@
           </a:lstStyle>
           <a:p xmlns:a="http://schemas.openxmlformats.org/drawingml/2006/main">
             <a:pPr>
-              <a:defRPr sz="2025" b="0">
+              <a:defRPr sz="2100" b="0">
                 <a:solidFill>
                   <a:srgbClr val="142B43"/>
                 </a:solidFill>
@@ -11551,7 +13001,7 @@
               </a:defRPr>
             </a:pPr>
             <a:r>
-              <a:rPr sz="2025" b="0">
+              <a:rPr sz="2100" b="0">
                 <a:solidFill>
                   <a:srgbClr val="142B43"/>
                 </a:solidFill>
@@ -11569,7 +13019,7 @@
           </a:p>
           <a:p xmlns:a="http://schemas.openxmlformats.org/drawingml/2006/main">
             <a:pPr>
-              <a:defRPr sz="2025" b="0">
+              <a:defRPr sz="2100" b="0">
                 <a:solidFill>
                   <a:srgbClr val="142B43"/>
                 </a:solidFill>
@@ -11579,7 +13029,35 @@
               </a:defRPr>
             </a:pPr>
             <a:r>
-              <a:rPr sz="2025" b="0">
+              <a:rPr sz="2100" b="0">
+                <a:solidFill>
+                  <a:srgbClr val="142B43"/>
+                </a:solidFill>
+                <a:latin typeface="Arial"/>
+                <a:ea typeface="Arial"/>
+                <a:cs typeface="Arial"/>
+              </a:rPr>
+              <a:t>Raw lexemes</a:t>
+            </a:r>
+          </a:p>
+          <a:p xmlns:a="http://schemas.openxmlformats.org/drawingml/2006/main">
+            <a:r>
+              <a:t/>
+            </a:r>
+          </a:p>
+          <a:p xmlns:a="http://schemas.openxmlformats.org/drawingml/2006/main">
+            <a:pPr>
+              <a:defRPr sz="2100" b="0">
+                <a:solidFill>
+                  <a:srgbClr val="142B43"/>
+                </a:solidFill>
+                <a:latin typeface="Arial"/>
+                <a:ea typeface="Arial"/>
+                <a:cs typeface="Arial"/>
+              </a:defRPr>
+            </a:pPr>
+            <a:r>
+              <a:rPr sz="2100" b="0">
                 <a:solidFill>
                   <a:srgbClr val="142B43"/>
                 </a:solidFill>
@@ -11597,7 +13075,7 @@
           </a:p>
           <a:p xmlns:a="http://schemas.openxmlformats.org/drawingml/2006/main">
             <a:pPr>
-              <a:defRPr sz="2025" b="0">
+              <a:defRPr sz="2100" b="0">
                 <a:solidFill>
                   <a:srgbClr val="142B43"/>
                 </a:solidFill>
@@ -11607,7 +13085,7 @@
               </a:defRPr>
             </a:pPr>
             <a:r>
-              <a:rPr sz="2025" b="0">
+              <a:rPr sz="2100" b="0">
                 <a:solidFill>
                   <a:srgbClr val="142B43"/>
                 </a:solidFill>
@@ -11623,7 +13101,7 @@
     </p:spTree>
     <p:extLst>
       <p:ext uri="{BB962C8B-B14F-4D97-AF65-F5344CB8AC3E}">
-        <p14:creationId xmlns:p14="http://schemas.microsoft.com/office/powerpoint/2010/main" val="851754093"/>
+        <p14:creationId xmlns:p14="http://schemas.microsoft.com/office/powerpoint/2010/main" val="1347051388"/>
       </p:ext>
     </p:extLst>
   </p:cSld>
@@ -11654,7 +13132,7 @@
           <p:cNvPr id="11" name="COMPILER DESIGN">
             <a:extLst xmlns:a="http://schemas.openxmlformats.org/drawingml/2006/main">
               <a:ext uri="{FF2B5EF4-FFF2-40B4-BE49-F238E27FC236}">
-                <a16:creationId xmlns:a16="http://schemas.microsoft.com/office/drawing/2014/main" id="{4A83FB74-1AAF-4BB9-B5FC-904E018A7B60}"/>
+                <a16:creationId xmlns:a16="http://schemas.microsoft.com/office/drawing/2014/main" id="{C1505330-8984-42F2-B28B-FECF61C94143}"/>
               </a:ext>
             </a:extLst>
           </p:cNvPr>
@@ -11682,7 +13160,7 @@
             <a:defPPr>
               <a:defRPr sz="1125" b="1">
                 <a:solidFill>
-                  <a:srgbClr val="1A6383"/>
+                  <a:srgbClr val="DF6948"/>
                 </a:solidFill>
                 <a:latin typeface="Arial"/>
                 <a:ea typeface="Arial"/>
@@ -11692,7 +13170,7 @@
             <a:lvl1pPr>
               <a:defRPr sz="1125" b="1">
                 <a:solidFill>
-                  <a:srgbClr val="1A6383"/>
+                  <a:srgbClr val="DF6948"/>
                 </a:solidFill>
                 <a:latin typeface="Arial"/>
                 <a:ea typeface="Arial"/>
@@ -11702,7 +13180,7 @@
             <a:lvl2pPr>
               <a:defRPr sz="1125" b="1">
                 <a:solidFill>
-                  <a:srgbClr val="1A6383"/>
+                  <a:srgbClr val="DF6948"/>
                 </a:solidFill>
                 <a:latin typeface="Arial"/>
                 <a:ea typeface="Arial"/>
@@ -11712,7 +13190,7 @@
             <a:lvl3pPr>
               <a:defRPr sz="1125" b="1">
                 <a:solidFill>
-                  <a:srgbClr val="1A6383"/>
+                  <a:srgbClr val="DF6948"/>
                 </a:solidFill>
                 <a:latin typeface="Arial"/>
                 <a:ea typeface="Arial"/>
@@ -11722,7 +13200,7 @@
             <a:lvl4pPr>
               <a:defRPr sz="1125" b="1">
                 <a:solidFill>
-                  <a:srgbClr val="1A6383"/>
+                  <a:srgbClr val="DF6948"/>
                 </a:solidFill>
                 <a:latin typeface="Arial"/>
                 <a:ea typeface="Arial"/>
@@ -11732,7 +13210,7 @@
             <a:lvl5pPr>
               <a:defRPr sz="1125" b="1">
                 <a:solidFill>
-                  <a:srgbClr val="1A6383"/>
+                  <a:srgbClr val="DF6948"/>
                 </a:solidFill>
                 <a:latin typeface="Arial"/>
                 <a:ea typeface="Arial"/>
@@ -11742,7 +13220,7 @@
             <a:lvl6pPr>
               <a:defRPr sz="1125" b="1">
                 <a:solidFill>
-                  <a:srgbClr val="1A6383"/>
+                  <a:srgbClr val="DF6948"/>
                 </a:solidFill>
                 <a:latin typeface="Arial"/>
                 <a:ea typeface="Arial"/>
@@ -11752,7 +13230,7 @@
             <a:lvl7pPr>
               <a:defRPr sz="1125" b="1">
                 <a:solidFill>
-                  <a:srgbClr val="1A6383"/>
+                  <a:srgbClr val="DF6948"/>
                 </a:solidFill>
                 <a:latin typeface="Arial"/>
                 <a:ea typeface="Arial"/>
@@ -11762,7 +13240,7 @@
             <a:lvl8pPr>
               <a:defRPr sz="1125" b="1">
                 <a:solidFill>
-                  <a:srgbClr val="1A6383"/>
+                  <a:srgbClr val="DF6948"/>
                 </a:solidFill>
                 <a:latin typeface="Arial"/>
                 <a:ea typeface="Arial"/>
@@ -11772,7 +13250,7 @@
             <a:lvl9pPr>
               <a:defRPr sz="1125" b="1">
                 <a:solidFill>
-                  <a:srgbClr val="1A6383"/>
+                  <a:srgbClr val="DF6948"/>
                 </a:solidFill>
                 <a:latin typeface="Arial"/>
                 <a:ea typeface="Arial"/>
@@ -11784,7 +13262,7 @@
             <a:pPr>
               <a:defRPr sz="1125" b="1">
                 <a:solidFill>
-                  <a:srgbClr val="1A6383"/>
+                  <a:srgbClr val="DF6948"/>
                 </a:solidFill>
                 <a:latin typeface="Arial"/>
                 <a:ea typeface="Arial"/>
@@ -11794,7 +13272,7 @@
             <a:r>
               <a:rPr sz="1125" b="1">
                 <a:solidFill>
-                  <a:srgbClr val="1A6383"/>
+                  <a:srgbClr val="DF6948"/>
                 </a:solidFill>
                 <a:latin typeface="Arial"/>
                 <a:ea typeface="Arial"/>
@@ -11810,7 +13288,7 @@
           <p:cNvPr id="2" name="Slide title">
             <a:extLst xmlns:a="http://schemas.openxmlformats.org/drawingml/2006/main">
               <a:ext uri="{FF2B5EF4-FFF2-40B4-BE49-F238E27FC236}">
-                <a16:creationId xmlns:a16="http://schemas.microsoft.com/office/drawing/2014/main" id="{84C9F3FC-B3D0-4E35-AB28-08B06556E78E}"/>
+                <a16:creationId xmlns:a16="http://schemas.microsoft.com/office/drawing/2014/main" id="{68163B9D-E779-4099-8BA8-FA491939747D}"/>
               </a:ext>
             </a:extLst>
           </p:cNvPr>
@@ -11963,10 +13441,10 @@
       </p:sp>
       <p:sp>
         <p:nvSpPr>
-          <p:cNvPr id="3" name="String Processing Mini Compiler in ">
+          <p:cNvPr id="3" name="StringLab Browser Compiler Front En">
             <a:extLst xmlns:a="http://schemas.openxmlformats.org/drawingml/2006/main">
               <a:ext uri="{FF2B5EF4-FFF2-40B4-BE49-F238E27FC236}">
-                <a16:creationId xmlns:a16="http://schemas.microsoft.com/office/drawing/2014/main" id="{56FFA630-A17B-4B6C-B9B2-F6D152657286}"/>
+                <a16:creationId xmlns:a16="http://schemas.microsoft.com/office/drawing/2014/main" id="{3E638C38-12D1-476D-B3E9-75925BC44FF8}"/>
               </a:ext>
             </a:extLst>
           </p:cNvPr>
@@ -12112,7 +13590,7 @@
                 <a:ea typeface="Arial"/>
                 <a:cs typeface="Arial"/>
               </a:rPr>
-              <a:t>String Processing Mini Compiler in C</a:t>
+              <a:t>StringLab Browser Compiler Front End</a:t>
             </a:r>
           </a:p>
         </p:txBody>
@@ -12122,7 +13600,7 @@
           <p:cNvPr id="4" name="05">
             <a:extLst xmlns:a="http://schemas.openxmlformats.org/drawingml/2006/main">
               <a:ext uri="{FF2B5EF4-FFF2-40B4-BE49-F238E27FC236}">
-                <a16:creationId xmlns:a16="http://schemas.microsoft.com/office/drawing/2014/main" id="{C7B42EF5-83C4-429E-86E7-D8222A5CFC11}"/>
+                <a16:creationId xmlns:a16="http://schemas.microsoft.com/office/drawing/2014/main" id="{16F32B6A-3220-4EA6-8177-0DD9D10F7F74}"/>
               </a:ext>
             </a:extLst>
           </p:cNvPr>
@@ -12278,7 +13756,7 @@
           <p:cNvPr id="5" name="Original expression">
             <a:extLst xmlns:a="http://schemas.openxmlformats.org/drawingml/2006/main">
               <a:ext uri="{FF2B5EF4-FFF2-40B4-BE49-F238E27FC236}">
-                <a16:creationId xmlns:a16="http://schemas.microsoft.com/office/drawing/2014/main" id="{0FD0E24C-A248-4BC9-8A2B-5B1E1D89467E}"/>
+                <a16:creationId xmlns:a16="http://schemas.microsoft.com/office/drawing/2014/main" id="{9B3E555E-1EEC-4F2D-9BAF-CD8DF78DBCA7}"/>
               </a:ext>
             </a:extLst>
           </p:cNvPr>
@@ -12434,7 +13912,7 @@
           <p:cNvPr id="6" name="Expr -&gt; Expr + Term&#10;      | Term">
             <a:extLst xmlns:a="http://schemas.openxmlformats.org/drawingml/2006/main">
               <a:ext uri="{FF2B5EF4-FFF2-40B4-BE49-F238E27FC236}">
-                <a16:creationId xmlns:a16="http://schemas.microsoft.com/office/drawing/2014/main" id="{B6C0CD4C-FA03-4F21-AC20-CFA3F3292B2A}"/>
+                <a16:creationId xmlns:a16="http://schemas.microsoft.com/office/drawing/2014/main" id="{B6DD9189-298A-46CA-9818-18DB20D58F3E}"/>
               </a:ext>
             </a:extLst>
           </p:cNvPr>
@@ -12613,7 +14091,7 @@
           <p:cNvPr id="7" name="After removing left recursion">
             <a:extLst xmlns:a="http://schemas.openxmlformats.org/drawingml/2006/main">
               <a:ext uri="{FF2B5EF4-FFF2-40B4-BE49-F238E27FC236}">
-                <a16:creationId xmlns:a16="http://schemas.microsoft.com/office/drawing/2014/main" id="{87BA94B7-E081-4B72-85C1-47F8676BCD0A}"/>
+                <a16:creationId xmlns:a16="http://schemas.microsoft.com/office/drawing/2014/main" id="{8D766BF5-8B99-469A-B107-5226C7DF33D5}"/>
               </a:ext>
             </a:extLst>
           </p:cNvPr>
@@ -12769,7 +14247,7 @@
           <p:cNvPr id="8" name="Expr -&gt; Term Tail&#10;Tail -&gt; + Term Ta">
             <a:extLst xmlns:a="http://schemas.openxmlformats.org/drawingml/2006/main">
               <a:ext uri="{FF2B5EF4-FFF2-40B4-BE49-F238E27FC236}">
-                <a16:creationId xmlns:a16="http://schemas.microsoft.com/office/drawing/2014/main" id="{D7DCB8A6-23CF-427F-8222-0E2F3BF55A66}"/>
+                <a16:creationId xmlns:a16="http://schemas.microsoft.com/office/drawing/2014/main" id="{15AA1DAA-2D18-4FAE-87A3-5FA9E46FD2F8}"/>
               </a:ext>
             </a:extLst>
           </p:cNvPr>
@@ -12971,7 +14449,7 @@
           <p:cNvPr id="9" name="Left-factored declaration">
             <a:extLst xmlns:a="http://schemas.openxmlformats.org/drawingml/2006/main">
               <a:ext uri="{FF2B5EF4-FFF2-40B4-BE49-F238E27FC236}">
-                <a16:creationId xmlns:a16="http://schemas.microsoft.com/office/drawing/2014/main" id="{A2D53453-1750-4F0A-AEA7-1075FF273FFE}"/>
+                <a16:creationId xmlns:a16="http://schemas.microsoft.com/office/drawing/2014/main" id="{56B8FAB7-A6F8-45E3-BD4A-CBD520355816}"/>
               </a:ext>
             </a:extLst>
           </p:cNvPr>
@@ -13127,7 +14605,7 @@
           <p:cNvPr id="10" name="Decl -&gt; string id Init ;&#10;Init -&gt; = ">
             <a:extLst xmlns:a="http://schemas.openxmlformats.org/drawingml/2006/main">
               <a:ext uri="{FF2B5EF4-FFF2-40B4-BE49-F238E27FC236}">
-                <a16:creationId xmlns:a16="http://schemas.microsoft.com/office/drawing/2014/main" id="{F953ADE4-A93B-42F0-A202-DDC80E9A1350}"/>
+                <a16:creationId xmlns:a16="http://schemas.microsoft.com/office/drawing/2014/main" id="{F0D20435-4608-46AD-B94E-297836B7D9B9}"/>
               </a:ext>
             </a:extLst>
           </p:cNvPr>
@@ -13304,7 +14782,7 @@
     </p:spTree>
     <p:extLst>
       <p:ext uri="{BB962C8B-B14F-4D97-AF65-F5344CB8AC3E}">
-        <p14:creationId xmlns:p14="http://schemas.microsoft.com/office/powerpoint/2010/main" val="1292193470"/>
+        <p14:creationId xmlns:p14="http://schemas.microsoft.com/office/powerpoint/2010/main" val="173660315"/>
       </p:ext>
     </p:extLst>
   </p:cSld>
@@ -13335,7 +14813,7 @@
           <p:cNvPr id="8" name="COMPILER DESIGN">
             <a:extLst xmlns:a="http://schemas.openxmlformats.org/drawingml/2006/main">
               <a:ext uri="{FF2B5EF4-FFF2-40B4-BE49-F238E27FC236}">
-                <a16:creationId xmlns:a16="http://schemas.microsoft.com/office/drawing/2014/main" id="{E37AEA28-4210-4BC6-B53E-ED8A994ACA46}"/>
+                <a16:creationId xmlns:a16="http://schemas.microsoft.com/office/drawing/2014/main" id="{D8E9A0D2-3CC5-4DA5-A385-25E3C04212AA}"/>
               </a:ext>
             </a:extLst>
           </p:cNvPr>
@@ -13363,7 +14841,7 @@
             <a:defPPr>
               <a:defRPr sz="1125" b="1">
                 <a:solidFill>
-                  <a:srgbClr val="1A6383"/>
+                  <a:srgbClr val="DF6948"/>
                 </a:solidFill>
                 <a:latin typeface="Arial"/>
                 <a:ea typeface="Arial"/>
@@ -13373,7 +14851,7 @@
             <a:lvl1pPr>
               <a:defRPr sz="1125" b="1">
                 <a:solidFill>
-                  <a:srgbClr val="1A6383"/>
+                  <a:srgbClr val="DF6948"/>
                 </a:solidFill>
                 <a:latin typeface="Arial"/>
                 <a:ea typeface="Arial"/>
@@ -13383,7 +14861,7 @@
             <a:lvl2pPr>
               <a:defRPr sz="1125" b="1">
                 <a:solidFill>
-                  <a:srgbClr val="1A6383"/>
+                  <a:srgbClr val="DF6948"/>
                 </a:solidFill>
                 <a:latin typeface="Arial"/>
                 <a:ea typeface="Arial"/>
@@ -13393,7 +14871,7 @@
             <a:lvl3pPr>
               <a:defRPr sz="1125" b="1">
                 <a:solidFill>
-                  <a:srgbClr val="1A6383"/>
+                  <a:srgbClr val="DF6948"/>
                 </a:solidFill>
                 <a:latin typeface="Arial"/>
                 <a:ea typeface="Arial"/>
@@ -13403,7 +14881,7 @@
             <a:lvl4pPr>
               <a:defRPr sz="1125" b="1">
                 <a:solidFill>
-                  <a:srgbClr val="1A6383"/>
+                  <a:srgbClr val="DF6948"/>
                 </a:solidFill>
                 <a:latin typeface="Arial"/>
                 <a:ea typeface="Arial"/>
@@ -13413,7 +14891,7 @@
             <a:lvl5pPr>
               <a:defRPr sz="1125" b="1">
                 <a:solidFill>
-                  <a:srgbClr val="1A6383"/>
+                  <a:srgbClr val="DF6948"/>
                 </a:solidFill>
                 <a:latin typeface="Arial"/>
                 <a:ea typeface="Arial"/>
@@ -13423,7 +14901,7 @@
             <a:lvl6pPr>
               <a:defRPr sz="1125" b="1">
                 <a:solidFill>
-                  <a:srgbClr val="1A6383"/>
+                  <a:srgbClr val="DF6948"/>
                 </a:solidFill>
                 <a:latin typeface="Arial"/>
                 <a:ea typeface="Arial"/>
@@ -13433,7 +14911,7 @@
             <a:lvl7pPr>
               <a:defRPr sz="1125" b="1">
                 <a:solidFill>
-                  <a:srgbClr val="1A6383"/>
+                  <a:srgbClr val="DF6948"/>
                 </a:solidFill>
                 <a:latin typeface="Arial"/>
                 <a:ea typeface="Arial"/>
@@ -13443,7 +14921,7 @@
             <a:lvl8pPr>
               <a:defRPr sz="1125" b="1">
                 <a:solidFill>
-                  <a:srgbClr val="1A6383"/>
+                  <a:srgbClr val="DF6948"/>
                 </a:solidFill>
                 <a:latin typeface="Arial"/>
                 <a:ea typeface="Arial"/>
@@ -13453,7 +14931,7 @@
             <a:lvl9pPr>
               <a:defRPr sz="1125" b="1">
                 <a:solidFill>
-                  <a:srgbClr val="1A6383"/>
+                  <a:srgbClr val="DF6948"/>
                 </a:solidFill>
                 <a:latin typeface="Arial"/>
                 <a:ea typeface="Arial"/>
@@ -13465,7 +14943,7 @@
             <a:pPr>
               <a:defRPr sz="1125" b="1">
                 <a:solidFill>
-                  <a:srgbClr val="1A6383"/>
+                  <a:srgbClr val="DF6948"/>
                 </a:solidFill>
                 <a:latin typeface="Arial"/>
                 <a:ea typeface="Arial"/>
@@ -13475,7 +14953,7 @@
             <a:r>
               <a:rPr sz="1125" b="1">
                 <a:solidFill>
-                  <a:srgbClr val="1A6383"/>
+                  <a:srgbClr val="DF6948"/>
                 </a:solidFill>
                 <a:latin typeface="Arial"/>
                 <a:ea typeface="Arial"/>
@@ -13491,7 +14969,7 @@
           <p:cNvPr id="2" name="Slide title">
             <a:extLst xmlns:a="http://schemas.openxmlformats.org/drawingml/2006/main">
               <a:ext uri="{FF2B5EF4-FFF2-40B4-BE49-F238E27FC236}">
-                <a16:creationId xmlns:a16="http://schemas.microsoft.com/office/drawing/2014/main" id="{B8F2C0A1-4CEA-4A2D-80F7-4F57E4BA0F85}"/>
+                <a16:creationId xmlns:a16="http://schemas.microsoft.com/office/drawing/2014/main" id="{9FC40079-3FFB-4D81-BA32-8A57223FB198}"/>
               </a:ext>
             </a:extLst>
           </p:cNvPr>
@@ -13644,10 +15122,10 @@
       </p:sp>
       <p:sp>
         <p:nvSpPr>
-          <p:cNvPr id="3" name="String Processing Mini Compiler in ">
+          <p:cNvPr id="3" name="StringLab Browser Compiler Front En">
             <a:extLst xmlns:a="http://schemas.openxmlformats.org/drawingml/2006/main">
               <a:ext uri="{FF2B5EF4-FFF2-40B4-BE49-F238E27FC236}">
-                <a16:creationId xmlns:a16="http://schemas.microsoft.com/office/drawing/2014/main" id="{786A0072-9F09-4A47-A5E6-8978F69B4D8F}"/>
+                <a16:creationId xmlns:a16="http://schemas.microsoft.com/office/drawing/2014/main" id="{BD2D9315-FA6F-4517-85D1-DA6A8913F263}"/>
               </a:ext>
             </a:extLst>
           </p:cNvPr>
@@ -13793,7 +15271,7 @@
                 <a:ea typeface="Arial"/>
                 <a:cs typeface="Arial"/>
               </a:rPr>
-              <a:t>String Processing Mini Compiler in C</a:t>
+              <a:t>StringLab Browser Compiler Front End</a:t>
             </a:r>
           </a:p>
         </p:txBody>
@@ -13803,7 +15281,7 @@
           <p:cNvPr id="4" name="06">
             <a:extLst xmlns:a="http://schemas.openxmlformats.org/drawingml/2006/main">
               <a:ext uri="{FF2B5EF4-FFF2-40B4-BE49-F238E27FC236}">
-                <a16:creationId xmlns:a16="http://schemas.microsoft.com/office/drawing/2014/main" id="{3343C8D2-6735-41EB-AAE7-45C4C78EC9FE}"/>
+                <a16:creationId xmlns:a16="http://schemas.microsoft.com/office/drawing/2014/main" id="{8836846F-89E1-4752-BA43-9450DF93C66B}"/>
               </a:ext>
             </a:extLst>
           </p:cNvPr>
@@ -13959,7 +15437,7 @@
           <p:cNvPr id="5" name="string a = &quot;Hi&quot;;&#10;print(a + &quot;!&quot;);">
             <a:extLst xmlns:a="http://schemas.openxmlformats.org/drawingml/2006/main">
               <a:ext uri="{FF2B5EF4-FFF2-40B4-BE49-F238E27FC236}">
-                <a16:creationId xmlns:a16="http://schemas.microsoft.com/office/drawing/2014/main" id="{8405A8EB-EC6F-4D28-8B63-E22F167A2D2E}"/>
+                <a16:creationId xmlns:a16="http://schemas.microsoft.com/office/drawing/2014/main" id="{D0537DA8-59FF-4B59-AD7D-097D4C4F33A9}"/>
               </a:ext>
             </a:extLst>
           </p:cNvPr>
@@ -13970,8 +15448,8 @@
         </p:nvSpPr>
         <p:spPr>
           <a:xfrm xmlns:a="http://schemas.openxmlformats.org/drawingml/2006/main">
-            <a:off x="685800" y="2095500"/>
-            <a:ext cx="5238750" cy="1524000"/>
+            <a:off x="685800" y="2200275"/>
+            <a:ext cx="4667250" cy="1428750"/>
           </a:xfrm>
           <a:prstGeom xmlns:a="http://schemas.openxmlformats.org/drawingml/2006/main" prst="rect">
             <a:avLst/>
@@ -13985,7 +15463,7 @@
           <a:bodyPr xmlns:a="http://schemas.openxmlformats.org/drawingml/2006/main"/>
           <a:lstStyle xmlns:a="http://schemas.openxmlformats.org/drawingml/2006/main">
             <a:defPPr>
-              <a:defRPr sz="2400" b="0">
+              <a:defRPr sz="2250" b="0">
                 <a:solidFill>
                   <a:srgbClr val="142B43"/>
                 </a:solidFill>
@@ -13995,7 +15473,7 @@
               </a:defRPr>
             </a:defPPr>
             <a:lvl1pPr>
-              <a:defRPr sz="2400" b="0">
+              <a:defRPr sz="2250" b="0">
                 <a:solidFill>
                   <a:srgbClr val="142B43"/>
                 </a:solidFill>
@@ -14005,7 +15483,7 @@
               </a:defRPr>
             </a:lvl1pPr>
             <a:lvl2pPr>
-              <a:defRPr sz="2400" b="0">
+              <a:defRPr sz="2250" b="0">
                 <a:solidFill>
                   <a:srgbClr val="142B43"/>
                 </a:solidFill>
@@ -14015,7 +15493,7 @@
               </a:defRPr>
             </a:lvl2pPr>
             <a:lvl3pPr>
-              <a:defRPr sz="2400" b="0">
+              <a:defRPr sz="2250" b="0">
                 <a:solidFill>
                   <a:srgbClr val="142B43"/>
                 </a:solidFill>
@@ -14025,7 +15503,7 @@
               </a:defRPr>
             </a:lvl3pPr>
             <a:lvl4pPr>
-              <a:defRPr sz="2400" b="0">
+              <a:defRPr sz="2250" b="0">
                 <a:solidFill>
                   <a:srgbClr val="142B43"/>
                 </a:solidFill>
@@ -14035,7 +15513,7 @@
               </a:defRPr>
             </a:lvl4pPr>
             <a:lvl5pPr>
-              <a:defRPr sz="2400" b="0">
+              <a:defRPr sz="2250" b="0">
                 <a:solidFill>
                   <a:srgbClr val="142B43"/>
                 </a:solidFill>
@@ -14045,7 +15523,7 @@
               </a:defRPr>
             </a:lvl5pPr>
             <a:lvl6pPr>
-              <a:defRPr sz="2400" b="0">
+              <a:defRPr sz="2250" b="0">
                 <a:solidFill>
                   <a:srgbClr val="142B43"/>
                 </a:solidFill>
@@ -14055,7 +15533,7 @@
               </a:defRPr>
             </a:lvl6pPr>
             <a:lvl7pPr>
-              <a:defRPr sz="2400" b="0">
+              <a:defRPr sz="2250" b="0">
                 <a:solidFill>
                   <a:srgbClr val="142B43"/>
                 </a:solidFill>
@@ -14065,7 +15543,7 @@
               </a:defRPr>
             </a:lvl7pPr>
             <a:lvl8pPr>
-              <a:defRPr sz="2400" b="0">
+              <a:defRPr sz="2250" b="0">
                 <a:solidFill>
                   <a:srgbClr val="142B43"/>
                 </a:solidFill>
@@ -14075,7 +15553,7 @@
               </a:defRPr>
             </a:lvl8pPr>
             <a:lvl9pPr>
-              <a:defRPr sz="2400" b="0">
+              <a:defRPr sz="2250" b="0">
                 <a:solidFill>
                   <a:srgbClr val="142B43"/>
                 </a:solidFill>
@@ -14087,7 +15565,7 @@
           </a:lstStyle>
           <a:p xmlns:a="http://schemas.openxmlformats.org/drawingml/2006/main">
             <a:pPr>
-              <a:defRPr sz="2400" b="0">
+              <a:defRPr sz="2250" b="0">
                 <a:solidFill>
                   <a:srgbClr val="142B43"/>
                 </a:solidFill>
@@ -14097,7 +15575,7 @@
               </a:defRPr>
             </a:pPr>
             <a:r>
-              <a:rPr sz="2400" b="0">
+              <a:rPr sz="2250" b="0">
                 <a:solidFill>
                   <a:srgbClr val="142B43"/>
                 </a:solidFill>
@@ -14110,7 +15588,7 @@
           </a:p>
           <a:p xmlns:a="http://schemas.openxmlformats.org/drawingml/2006/main">
             <a:pPr>
-              <a:defRPr sz="2400" b="0">
+              <a:defRPr sz="2250" b="0">
                 <a:solidFill>
                   <a:srgbClr val="142B43"/>
                 </a:solidFill>
@@ -14120,7 +15598,7 @@
               </a:defRPr>
             </a:pPr>
             <a:r>
-              <a:rPr sz="2400" b="0">
+              <a:rPr sz="2250" b="0">
                 <a:solidFill>
                   <a:srgbClr val="142B43"/>
                 </a:solidFill>
@@ -14135,10 +15613,10 @@
       </p:sp>
       <p:sp>
         <p:nvSpPr>
-          <p:cNvPr id="6" name="Program&#10;  Declaration a&#10;    Literal">
+          <p:cNvPr id="6" name="The transformed grammar is LL(1).&#10;O">
             <a:extLst xmlns:a="http://schemas.openxmlformats.org/drawingml/2006/main">
               <a:ext uri="{FF2B5EF4-FFF2-40B4-BE49-F238E27FC236}">
-                <a16:creationId xmlns:a16="http://schemas.microsoft.com/office/drawing/2014/main" id="{8ED9BF72-C04C-46B5-B364-9C03E66D3731}"/>
+                <a16:creationId xmlns:a16="http://schemas.microsoft.com/office/drawing/2014/main" id="{11437E9B-ED81-4CD8-B2BC-A292EB7A23B2}"/>
               </a:ext>
             </a:extLst>
           </p:cNvPr>
@@ -14149,302 +15627,8 @@
         </p:nvSpPr>
         <p:spPr>
           <a:xfrm xmlns:a="http://schemas.openxmlformats.org/drawingml/2006/main">
-            <a:off x="6477000" y="1857375"/>
-            <a:ext cx="5048250" cy="3524250"/>
-          </a:xfrm>
-          <a:prstGeom xmlns:a="http://schemas.openxmlformats.org/drawingml/2006/main" prst="rect">
-            <a:avLst/>
-          </a:prstGeom>
-          <a:noFill xmlns:a="http://schemas.openxmlformats.org/drawingml/2006/main"/>
-          <a:ln xmlns:a="http://schemas.openxmlformats.org/drawingml/2006/main" w="0">
-            <a:noFill/>
-          </a:ln>
-        </p:spPr>
-        <p:txBody>
-          <a:bodyPr xmlns:a="http://schemas.openxmlformats.org/drawingml/2006/main"/>
-          <a:lstStyle xmlns:a="http://schemas.openxmlformats.org/drawingml/2006/main">
-            <a:defPPr>
-              <a:defRPr sz="2175" b="0">
-                <a:solidFill>
-                  <a:srgbClr val="142B43"/>
-                </a:solidFill>
-                <a:latin typeface="Consolas"/>
-                <a:ea typeface="Consolas"/>
-                <a:cs typeface="Consolas"/>
-              </a:defRPr>
-            </a:defPPr>
-            <a:lvl1pPr>
-              <a:defRPr sz="2175" b="0">
-                <a:solidFill>
-                  <a:srgbClr val="142B43"/>
-                </a:solidFill>
-                <a:latin typeface="Consolas"/>
-                <a:ea typeface="Consolas"/>
-                <a:cs typeface="Consolas"/>
-              </a:defRPr>
-            </a:lvl1pPr>
-            <a:lvl2pPr>
-              <a:defRPr sz="2175" b="0">
-                <a:solidFill>
-                  <a:srgbClr val="142B43"/>
-                </a:solidFill>
-                <a:latin typeface="Consolas"/>
-                <a:ea typeface="Consolas"/>
-                <a:cs typeface="Consolas"/>
-              </a:defRPr>
-            </a:lvl2pPr>
-            <a:lvl3pPr>
-              <a:defRPr sz="2175" b="0">
-                <a:solidFill>
-                  <a:srgbClr val="142B43"/>
-                </a:solidFill>
-                <a:latin typeface="Consolas"/>
-                <a:ea typeface="Consolas"/>
-                <a:cs typeface="Consolas"/>
-              </a:defRPr>
-            </a:lvl3pPr>
-            <a:lvl4pPr>
-              <a:defRPr sz="2175" b="0">
-                <a:solidFill>
-                  <a:srgbClr val="142B43"/>
-                </a:solidFill>
-                <a:latin typeface="Consolas"/>
-                <a:ea typeface="Consolas"/>
-                <a:cs typeface="Consolas"/>
-              </a:defRPr>
-            </a:lvl4pPr>
-            <a:lvl5pPr>
-              <a:defRPr sz="2175" b="0">
-                <a:solidFill>
-                  <a:srgbClr val="142B43"/>
-                </a:solidFill>
-                <a:latin typeface="Consolas"/>
-                <a:ea typeface="Consolas"/>
-                <a:cs typeface="Consolas"/>
-              </a:defRPr>
-            </a:lvl5pPr>
-            <a:lvl6pPr>
-              <a:defRPr sz="2175" b="0">
-                <a:solidFill>
-                  <a:srgbClr val="142B43"/>
-                </a:solidFill>
-                <a:latin typeface="Consolas"/>
-                <a:ea typeface="Consolas"/>
-                <a:cs typeface="Consolas"/>
-              </a:defRPr>
-            </a:lvl6pPr>
-            <a:lvl7pPr>
-              <a:defRPr sz="2175" b="0">
-                <a:solidFill>
-                  <a:srgbClr val="142B43"/>
-                </a:solidFill>
-                <a:latin typeface="Consolas"/>
-                <a:ea typeface="Consolas"/>
-                <a:cs typeface="Consolas"/>
-              </a:defRPr>
-            </a:lvl7pPr>
-            <a:lvl8pPr>
-              <a:defRPr sz="2175" b="0">
-                <a:solidFill>
-                  <a:srgbClr val="142B43"/>
-                </a:solidFill>
-                <a:latin typeface="Consolas"/>
-                <a:ea typeface="Consolas"/>
-                <a:cs typeface="Consolas"/>
-              </a:defRPr>
-            </a:lvl8pPr>
-            <a:lvl9pPr>
-              <a:defRPr sz="2175" b="0">
-                <a:solidFill>
-                  <a:srgbClr val="142B43"/>
-                </a:solidFill>
-                <a:latin typeface="Consolas"/>
-                <a:ea typeface="Consolas"/>
-                <a:cs typeface="Consolas"/>
-              </a:defRPr>
-            </a:lvl9pPr>
-          </a:lstStyle>
-          <a:p xmlns:a="http://schemas.openxmlformats.org/drawingml/2006/main">
-            <a:pPr>
-              <a:defRPr sz="2175" b="0">
-                <a:solidFill>
-                  <a:srgbClr val="142B43"/>
-                </a:solidFill>
-                <a:latin typeface="Consolas"/>
-                <a:ea typeface="Consolas"/>
-                <a:cs typeface="Consolas"/>
-              </a:defRPr>
-            </a:pPr>
-            <a:r>
-              <a:rPr sz="2175" b="0">
-                <a:solidFill>
-                  <a:srgbClr val="142B43"/>
-                </a:solidFill>
-                <a:latin typeface="Consolas"/>
-                <a:ea typeface="Consolas"/>
-                <a:cs typeface="Consolas"/>
-              </a:rPr>
-              <a:t>Program</a:t>
-            </a:r>
-          </a:p>
-          <a:p xmlns:a="http://schemas.openxmlformats.org/drawingml/2006/main">
-            <a:pPr>
-              <a:defRPr sz="2175" b="0">
-                <a:solidFill>
-                  <a:srgbClr val="142B43"/>
-                </a:solidFill>
-                <a:latin typeface="Consolas"/>
-                <a:ea typeface="Consolas"/>
-                <a:cs typeface="Consolas"/>
-              </a:defRPr>
-            </a:pPr>
-            <a:r>
-              <a:rPr sz="2175" b="0">
-                <a:solidFill>
-                  <a:srgbClr val="142B43"/>
-                </a:solidFill>
-                <a:latin typeface="Consolas"/>
-                <a:ea typeface="Consolas"/>
-                <a:cs typeface="Consolas"/>
-              </a:rPr>
-              <a:t>  Declaration a</a:t>
-            </a:r>
-          </a:p>
-          <a:p xmlns:a="http://schemas.openxmlformats.org/drawingml/2006/main">
-            <a:pPr>
-              <a:defRPr sz="2175" b="0">
-                <a:solidFill>
-                  <a:srgbClr val="142B43"/>
-                </a:solidFill>
-                <a:latin typeface="Consolas"/>
-                <a:ea typeface="Consolas"/>
-                <a:cs typeface="Consolas"/>
-              </a:defRPr>
-            </a:pPr>
-            <a:r>
-              <a:rPr sz="2175" b="0">
-                <a:solidFill>
-                  <a:srgbClr val="142B43"/>
-                </a:solidFill>
-                <a:latin typeface="Consolas"/>
-                <a:ea typeface="Consolas"/>
-                <a:cs typeface="Consolas"/>
-              </a:rPr>
-              <a:t>    Literal "Hi"</a:t>
-            </a:r>
-          </a:p>
-          <a:p xmlns:a="http://schemas.openxmlformats.org/drawingml/2006/main">
-            <a:pPr>
-              <a:defRPr sz="2175" b="0">
-                <a:solidFill>
-                  <a:srgbClr val="142B43"/>
-                </a:solidFill>
-                <a:latin typeface="Consolas"/>
-                <a:ea typeface="Consolas"/>
-                <a:cs typeface="Consolas"/>
-              </a:defRPr>
-            </a:pPr>
-            <a:r>
-              <a:rPr sz="2175" b="0">
-                <a:solidFill>
-                  <a:srgbClr val="142B43"/>
-                </a:solidFill>
-                <a:latin typeface="Consolas"/>
-                <a:ea typeface="Consolas"/>
-                <a:cs typeface="Consolas"/>
-              </a:rPr>
-              <a:t>  Print</a:t>
-            </a:r>
-          </a:p>
-          <a:p xmlns:a="http://schemas.openxmlformats.org/drawingml/2006/main">
-            <a:pPr>
-              <a:defRPr sz="2175" b="0">
-                <a:solidFill>
-                  <a:srgbClr val="142B43"/>
-                </a:solidFill>
-                <a:latin typeface="Consolas"/>
-                <a:ea typeface="Consolas"/>
-                <a:cs typeface="Consolas"/>
-              </a:defRPr>
-            </a:pPr>
-            <a:r>
-              <a:rPr sz="2175" b="0">
-                <a:solidFill>
-                  <a:srgbClr val="142B43"/>
-                </a:solidFill>
-                <a:latin typeface="Consolas"/>
-                <a:ea typeface="Consolas"/>
-                <a:cs typeface="Consolas"/>
-              </a:rPr>
-              <a:t>    Concat</a:t>
-            </a:r>
-          </a:p>
-          <a:p xmlns:a="http://schemas.openxmlformats.org/drawingml/2006/main">
-            <a:pPr>
-              <a:defRPr sz="2175" b="0">
-                <a:solidFill>
-                  <a:srgbClr val="142B43"/>
-                </a:solidFill>
-                <a:latin typeface="Consolas"/>
-                <a:ea typeface="Consolas"/>
-                <a:cs typeface="Consolas"/>
-              </a:defRPr>
-            </a:pPr>
-            <a:r>
-              <a:rPr sz="2175" b="0">
-                <a:solidFill>
-                  <a:srgbClr val="142B43"/>
-                </a:solidFill>
-                <a:latin typeface="Consolas"/>
-                <a:ea typeface="Consolas"/>
-                <a:cs typeface="Consolas"/>
-              </a:rPr>
-              <a:t>      Identifier a</a:t>
-            </a:r>
-          </a:p>
-          <a:p xmlns:a="http://schemas.openxmlformats.org/drawingml/2006/main">
-            <a:pPr>
-              <a:defRPr sz="2175" b="0">
-                <a:solidFill>
-                  <a:srgbClr val="142B43"/>
-                </a:solidFill>
-                <a:latin typeface="Consolas"/>
-                <a:ea typeface="Consolas"/>
-                <a:cs typeface="Consolas"/>
-              </a:defRPr>
-            </a:pPr>
-            <a:r>
-              <a:rPr sz="2175" b="0">
-                <a:solidFill>
-                  <a:srgbClr val="142B43"/>
-                </a:solidFill>
-                <a:latin typeface="Consolas"/>
-                <a:ea typeface="Consolas"/>
-                <a:cs typeface="Consolas"/>
-              </a:rPr>
-              <a:t>      Literal "!"</a:t>
-            </a:r>
-          </a:p>
-        </p:txBody>
-      </p:sp>
-      <p:sp>
-        <p:nvSpPr>
-          <p:cNvPr id="7" name="The parser uses the transformed LL(">
-            <a:extLst xmlns:a="http://schemas.openxmlformats.org/drawingml/2006/main">
-              <a:ext uri="{FF2B5EF4-FFF2-40B4-BE49-F238E27FC236}">
-                <a16:creationId xmlns:a16="http://schemas.microsoft.com/office/drawing/2014/main" id="{43B47FDB-F3F7-4077-835F-72ABDB330DCA}"/>
-              </a:ext>
-            </a:extLst>
-          </p:cNvPr>
-          <p:cNvSpPr>
-            <a:spLocks xmlns:a="http://schemas.openxmlformats.org/drawingml/2006/main" noGrp="1"/>
-          </p:cNvSpPr>
-          <p:nvPr/>
-        </p:nvSpPr>
-        <p:spPr>
-          <a:xfrm xmlns:a="http://schemas.openxmlformats.org/drawingml/2006/main">
-            <a:off x="685800" y="5353050"/>
-            <a:ext cx="5429250" cy="619125"/>
+            <a:off x="685800" y="4305300"/>
+            <a:ext cx="4762500" cy="1238250"/>
           </a:xfrm>
           <a:prstGeom xmlns:a="http://schemas.openxmlformats.org/drawingml/2006/main" prst="rect">
             <a:avLst/>
@@ -14578,15 +15762,66 @@
                 <a:ea typeface="Arial"/>
                 <a:cs typeface="Arial"/>
               </a:rPr>
-              <a:t>The parser uses the transformed LL(1) grammar.</a:t>
+              <a:t>The transformed grammar is LL(1).</a:t>
+            </a:r>
+          </a:p>
+          <a:p xmlns:a="http://schemas.openxmlformats.org/drawingml/2006/main">
+            <a:pPr>
+              <a:defRPr sz="2025" b="0">
+                <a:solidFill>
+                  <a:srgbClr val="52667B"/>
+                </a:solidFill>
+                <a:latin typeface="Arial"/>
+                <a:ea typeface="Arial"/>
+                <a:cs typeface="Arial"/>
+              </a:defRPr>
+            </a:pPr>
+            <a:r>
+              <a:rPr sz="2025" b="0">
+                <a:solidFill>
+                  <a:srgbClr val="52667B"/>
+                </a:solidFill>
+                <a:latin typeface="Arial"/>
+                <a:ea typeface="Arial"/>
+                <a:cs typeface="Arial"/>
+              </a:rPr>
+              <a:t>One token of lookahead is enough.</a:t>
             </a:r>
           </a:p>
         </p:txBody>
       </p:sp>
+      <p:pic>
+        <p:nvPicPr>
+          <p:cNvPr id="7" name="">
+            <a:extLst xmlns:a="http://schemas.openxmlformats.org/drawingml/2006/main">
+              <a:ext uri="{FF2B5EF4-FFF2-40B4-BE49-F238E27FC236}">
+                <a16:creationId xmlns:a16="http://schemas.microsoft.com/office/drawing/2014/main" id="{A9EF52CB-2997-42D1-B478-AE56B63DCB0D}"/>
+              </a:ext>
+            </a:extLst>
+          </p:cNvPr>
+          <p:cNvPicPr>
+            <a:picLocks xmlns:a="http://schemas.openxmlformats.org/drawingml/2006/main" noChangeAspect="1"/>
+          </p:cNvPicPr>
+          <p:nvPr/>
+        </p:nvPicPr>
+        <p:blipFill>
+          <a:blip xmlns:r="http://schemas.openxmlformats.org/officeDocument/2006/relationships" xmlns:a="http://schemas.openxmlformats.org/drawingml/2006/main" r:embed="R4935194003ca4b47"/>
+          <a:stretch xmlns:a="http://schemas.openxmlformats.org/drawingml/2006/main"/>
+        </p:blipFill>
+        <p:spPr>
+          <a:xfrm xmlns:a="http://schemas.openxmlformats.org/drawingml/2006/main">
+            <a:off x="5829300" y="1756381"/>
+            <a:ext cx="5676900" cy="4183439"/>
+          </a:xfrm>
+          <a:prstGeom xmlns:a="http://schemas.openxmlformats.org/drawingml/2006/main" prst="rect">
+            <a:avLst/>
+          </a:prstGeom>
+        </p:spPr>
+      </p:pic>
     </p:spTree>
     <p:extLst>
       <p:ext uri="{BB962C8B-B14F-4D97-AF65-F5344CB8AC3E}">
-        <p14:creationId xmlns:p14="http://schemas.microsoft.com/office/powerpoint/2010/main" val="1689144374"/>
+        <p14:creationId xmlns:p14="http://schemas.microsoft.com/office/powerpoint/2010/main" val="1227106597"/>
       </p:ext>
     </p:extLst>
   </p:cSld>
@@ -14617,7 +15852,7 @@
           <p:cNvPr id="7" name="COMPILER DESIGN">
             <a:extLst xmlns:a="http://schemas.openxmlformats.org/drawingml/2006/main">
               <a:ext uri="{FF2B5EF4-FFF2-40B4-BE49-F238E27FC236}">
-                <a16:creationId xmlns:a16="http://schemas.microsoft.com/office/drawing/2014/main" id="{4632960A-C564-4DBE-B16E-9C977376AFDC}"/>
+                <a16:creationId xmlns:a16="http://schemas.microsoft.com/office/drawing/2014/main" id="{112A5497-9DF3-4D55-A4E5-716595EAEFD7}"/>
               </a:ext>
             </a:extLst>
           </p:cNvPr>
@@ -14645,7 +15880,7 @@
             <a:defPPr>
               <a:defRPr sz="1125" b="1">
                 <a:solidFill>
-                  <a:srgbClr val="1A6383"/>
+                  <a:srgbClr val="DF6948"/>
                 </a:solidFill>
                 <a:latin typeface="Arial"/>
                 <a:ea typeface="Arial"/>
@@ -14655,7 +15890,7 @@
             <a:lvl1pPr>
               <a:defRPr sz="1125" b="1">
                 <a:solidFill>
-                  <a:srgbClr val="1A6383"/>
+                  <a:srgbClr val="DF6948"/>
                 </a:solidFill>
                 <a:latin typeface="Arial"/>
                 <a:ea typeface="Arial"/>
@@ -14665,7 +15900,7 @@
             <a:lvl2pPr>
               <a:defRPr sz="1125" b="1">
                 <a:solidFill>
-                  <a:srgbClr val="1A6383"/>
+                  <a:srgbClr val="DF6948"/>
                 </a:solidFill>
                 <a:latin typeface="Arial"/>
                 <a:ea typeface="Arial"/>
@@ -14675,7 +15910,7 @@
             <a:lvl3pPr>
               <a:defRPr sz="1125" b="1">
                 <a:solidFill>
-                  <a:srgbClr val="1A6383"/>
+                  <a:srgbClr val="DF6948"/>
                 </a:solidFill>
                 <a:latin typeface="Arial"/>
                 <a:ea typeface="Arial"/>
@@ -14685,7 +15920,7 @@
             <a:lvl4pPr>
               <a:defRPr sz="1125" b="1">
                 <a:solidFill>
-                  <a:srgbClr val="1A6383"/>
+                  <a:srgbClr val="DF6948"/>
                 </a:solidFill>
                 <a:latin typeface="Arial"/>
                 <a:ea typeface="Arial"/>
@@ -14695,7 +15930,7 @@
             <a:lvl5pPr>
               <a:defRPr sz="1125" b="1">
                 <a:solidFill>
-                  <a:srgbClr val="1A6383"/>
+                  <a:srgbClr val="DF6948"/>
                 </a:solidFill>
                 <a:latin typeface="Arial"/>
                 <a:ea typeface="Arial"/>
@@ -14705,7 +15940,7 @@
             <a:lvl6pPr>
               <a:defRPr sz="1125" b="1">
                 <a:solidFill>
-                  <a:srgbClr val="1A6383"/>
+                  <a:srgbClr val="DF6948"/>
                 </a:solidFill>
                 <a:latin typeface="Arial"/>
                 <a:ea typeface="Arial"/>
@@ -14715,7 +15950,7 @@
             <a:lvl7pPr>
               <a:defRPr sz="1125" b="1">
                 <a:solidFill>
-                  <a:srgbClr val="1A6383"/>
+                  <a:srgbClr val="DF6948"/>
                 </a:solidFill>
                 <a:latin typeface="Arial"/>
                 <a:ea typeface="Arial"/>
@@ -14725,7 +15960,7 @@
             <a:lvl8pPr>
               <a:defRPr sz="1125" b="1">
                 <a:solidFill>
-                  <a:srgbClr val="1A6383"/>
+                  <a:srgbClr val="DF6948"/>
                 </a:solidFill>
                 <a:latin typeface="Arial"/>
                 <a:ea typeface="Arial"/>
@@ -14735,7 +15970,7 @@
             <a:lvl9pPr>
               <a:defRPr sz="1125" b="1">
                 <a:solidFill>
-                  <a:srgbClr val="1A6383"/>
+                  <a:srgbClr val="DF6948"/>
                 </a:solidFill>
                 <a:latin typeface="Arial"/>
                 <a:ea typeface="Arial"/>
@@ -14747,7 +15982,7 @@
             <a:pPr>
               <a:defRPr sz="1125" b="1">
                 <a:solidFill>
-                  <a:srgbClr val="1A6383"/>
+                  <a:srgbClr val="DF6948"/>
                 </a:solidFill>
                 <a:latin typeface="Arial"/>
                 <a:ea typeface="Arial"/>
@@ -14757,7 +15992,7 @@
             <a:r>
               <a:rPr sz="1125" b="1">
                 <a:solidFill>
-                  <a:srgbClr val="1A6383"/>
+                  <a:srgbClr val="DF6948"/>
                 </a:solidFill>
                 <a:latin typeface="Arial"/>
                 <a:ea typeface="Arial"/>
@@ -14773,7 +16008,7 @@
           <p:cNvPr id="2" name="Slide title">
             <a:extLst xmlns:a="http://schemas.openxmlformats.org/drawingml/2006/main">
               <a:ext uri="{FF2B5EF4-FFF2-40B4-BE49-F238E27FC236}">
-                <a16:creationId xmlns:a16="http://schemas.microsoft.com/office/drawing/2014/main" id="{457BEDEA-8D9B-47D8-BDB1-14551CE0BB4C}"/>
+                <a16:creationId xmlns:a16="http://schemas.microsoft.com/office/drawing/2014/main" id="{C979F04F-54D1-4851-B81E-72C930639DA9}"/>
               </a:ext>
             </a:extLst>
           </p:cNvPr>
@@ -14926,10 +16161,10 @@
       </p:sp>
       <p:sp>
         <p:nvSpPr>
-          <p:cNvPr id="3" name="String Processing Mini Compiler in ">
+          <p:cNvPr id="3" name="StringLab Browser Compiler Front En">
             <a:extLst xmlns:a="http://schemas.openxmlformats.org/drawingml/2006/main">
               <a:ext uri="{FF2B5EF4-FFF2-40B4-BE49-F238E27FC236}">
-                <a16:creationId xmlns:a16="http://schemas.microsoft.com/office/drawing/2014/main" id="{4BDFD505-3C15-4781-A1CC-4FE8ADC33564}"/>
+                <a16:creationId xmlns:a16="http://schemas.microsoft.com/office/drawing/2014/main" id="{1BB5A969-DAF4-4275-9EF4-B24A171BF404}"/>
               </a:ext>
             </a:extLst>
           </p:cNvPr>
@@ -15075,7 +16310,7 @@
                 <a:ea typeface="Arial"/>
                 <a:cs typeface="Arial"/>
               </a:rPr>
-              <a:t>String Processing Mini Compiler in C</a:t>
+              <a:t>StringLab Browser Compiler Front End</a:t>
             </a:r>
           </a:p>
         </p:txBody>
@@ -15085,7 +16320,7 @@
           <p:cNvPr id="4" name="07">
             <a:extLst xmlns:a="http://schemas.openxmlformats.org/drawingml/2006/main">
               <a:ext uri="{FF2B5EF4-FFF2-40B4-BE49-F238E27FC236}">
-                <a16:creationId xmlns:a16="http://schemas.microsoft.com/office/drawing/2014/main" id="{0A540BD5-338C-4A65-9570-4139C746BC86}"/>
+                <a16:creationId xmlns:a16="http://schemas.microsoft.com/office/drawing/2014/main" id="{AC80E0D7-8DD0-4256-9F60-489FD6A2A782}"/>
               </a:ext>
             </a:extLst>
           </p:cNvPr>
@@ -15238,10 +16473,10 @@
       </p:sp>
       <p:sp>
         <p:nvSpPr>
-          <p:cNvPr id="5" name="Declaration before use&#10;Initializati">
+          <p:cNvPr id="5" name="Declare a name before using it&#10;Init">
             <a:extLst xmlns:a="http://schemas.openxmlformats.org/drawingml/2006/main">
               <a:ext uri="{FF2B5EF4-FFF2-40B4-BE49-F238E27FC236}">
-                <a16:creationId xmlns:a16="http://schemas.microsoft.com/office/drawing/2014/main" id="{A43C15FF-C931-4458-8177-30B68F1C436B}"/>
+                <a16:creationId xmlns:a16="http://schemas.microsoft.com/office/drawing/2014/main" id="{393E000D-832C-4A8F-BE87-42138C648F76}"/>
               </a:ext>
             </a:extLst>
           </p:cNvPr>
@@ -15267,7 +16502,7 @@
           <a:bodyPr xmlns:a="http://schemas.openxmlformats.org/drawingml/2006/main"/>
           <a:lstStyle xmlns:a="http://schemas.openxmlformats.org/drawingml/2006/main">
             <a:defPPr>
-              <a:defRPr sz="2625" b="0">
+              <a:defRPr sz="2550" b="0">
                 <a:solidFill>
                   <a:srgbClr val="142B43"/>
                 </a:solidFill>
@@ -15277,7 +16512,7 @@
               </a:defRPr>
             </a:defPPr>
             <a:lvl1pPr>
-              <a:defRPr sz="2625" b="0">
+              <a:defRPr sz="2550" b="0">
                 <a:solidFill>
                   <a:srgbClr val="142B43"/>
                 </a:solidFill>
@@ -15287,7 +16522,7 @@
               </a:defRPr>
             </a:lvl1pPr>
             <a:lvl2pPr>
-              <a:defRPr sz="2625" b="0">
+              <a:defRPr sz="2550" b="0">
                 <a:solidFill>
                   <a:srgbClr val="142B43"/>
                 </a:solidFill>
@@ -15297,7 +16532,7 @@
               </a:defRPr>
             </a:lvl2pPr>
             <a:lvl3pPr>
-              <a:defRPr sz="2625" b="0">
+              <a:defRPr sz="2550" b="0">
                 <a:solidFill>
                   <a:srgbClr val="142B43"/>
                 </a:solidFill>
@@ -15307,7 +16542,7 @@
               </a:defRPr>
             </a:lvl3pPr>
             <a:lvl4pPr>
-              <a:defRPr sz="2625" b="0">
+              <a:defRPr sz="2550" b="0">
                 <a:solidFill>
                   <a:srgbClr val="142B43"/>
                 </a:solidFill>
@@ -15317,7 +16552,7 @@
               </a:defRPr>
             </a:lvl4pPr>
             <a:lvl5pPr>
-              <a:defRPr sz="2625" b="0">
+              <a:defRPr sz="2550" b="0">
                 <a:solidFill>
                   <a:srgbClr val="142B43"/>
                 </a:solidFill>
@@ -15327,7 +16562,7 @@
               </a:defRPr>
             </a:lvl5pPr>
             <a:lvl6pPr>
-              <a:defRPr sz="2625" b="0">
+              <a:defRPr sz="2550" b="0">
                 <a:solidFill>
                   <a:srgbClr val="142B43"/>
                 </a:solidFill>
@@ -15337,7 +16572,7 @@
               </a:defRPr>
             </a:lvl6pPr>
             <a:lvl7pPr>
-              <a:defRPr sz="2625" b="0">
+              <a:defRPr sz="2550" b="0">
                 <a:solidFill>
                   <a:srgbClr val="142B43"/>
                 </a:solidFill>
@@ -15347,7 +16582,7 @@
               </a:defRPr>
             </a:lvl7pPr>
             <a:lvl8pPr>
-              <a:defRPr sz="2625" b="0">
+              <a:defRPr sz="2550" b="0">
                 <a:solidFill>
                   <a:srgbClr val="142B43"/>
                 </a:solidFill>
@@ -15357,7 +16592,7 @@
               </a:defRPr>
             </a:lvl8pPr>
             <a:lvl9pPr>
-              <a:defRPr sz="2625" b="0">
+              <a:defRPr sz="2550" b="0">
                 <a:solidFill>
                   <a:srgbClr val="142B43"/>
                 </a:solidFill>
@@ -15369,7 +16604,7 @@
           </a:lstStyle>
           <a:p xmlns:a="http://schemas.openxmlformats.org/drawingml/2006/main">
             <a:pPr>
-              <a:defRPr sz="2625" b="0">
+              <a:defRPr sz="2550" b="0">
                 <a:solidFill>
                   <a:srgbClr val="142B43"/>
                 </a:solidFill>
@@ -15379,7 +16614,7 @@
               </a:defRPr>
             </a:pPr>
             <a:r>
-              <a:rPr sz="2625" b="0">
+              <a:rPr sz="2550" b="0">
                 <a:solidFill>
                   <a:srgbClr val="142B43"/>
                 </a:solidFill>
@@ -15387,12 +16622,12 @@
                 <a:ea typeface="Arial"/>
                 <a:cs typeface="Arial"/>
               </a:rPr>
-              <a:t>Declaration before use</a:t>
+              <a:t>Declare a name before using it</a:t>
             </a:r>
           </a:p>
           <a:p xmlns:a="http://schemas.openxmlformats.org/drawingml/2006/main">
             <a:pPr>
-              <a:defRPr sz="2625" b="0">
+              <a:defRPr sz="2550" b="0">
                 <a:solidFill>
                   <a:srgbClr val="142B43"/>
                 </a:solidFill>
@@ -15402,7 +16637,7 @@
               </a:defRPr>
             </a:pPr>
             <a:r>
-              <a:rPr sz="2625" b="0">
+              <a:rPr sz="2550" b="0">
                 <a:solidFill>
                   <a:srgbClr val="142B43"/>
                 </a:solidFill>
@@ -15410,12 +16645,12 @@
                 <a:ea typeface="Arial"/>
                 <a:cs typeface="Arial"/>
               </a:rPr>
-              <a:t>Initialization before reading</a:t>
+              <a:t>Initialize a string before reading it</a:t>
             </a:r>
           </a:p>
           <a:p xmlns:a="http://schemas.openxmlformats.org/drawingml/2006/main">
             <a:pPr>
-              <a:defRPr sz="2625" b="0">
+              <a:defRPr sz="2550" b="0">
                 <a:solidFill>
                   <a:srgbClr val="142B43"/>
                 </a:solidFill>
@@ -15425,7 +16660,7 @@
               </a:defRPr>
             </a:pPr>
             <a:r>
-              <a:rPr sz="2625" b="0">
+              <a:rPr sz="2550" b="0">
                 <a:solidFill>
                   <a:srgbClr val="142B43"/>
                 </a:solidFill>
@@ -15433,12 +16668,12 @@
                 <a:ea typeface="Arial"/>
                 <a:cs typeface="Arial"/>
               </a:rPr>
-              <a:t>No duplicate declarations</a:t>
+              <a:t>Reject duplicate declarations</a:t>
             </a:r>
           </a:p>
           <a:p xmlns:a="http://schemas.openxmlformats.org/drawingml/2006/main">
             <a:pPr>
-              <a:defRPr sz="2625" b="0">
+              <a:defRPr sz="2550" b="0">
                 <a:solidFill>
                   <a:srgbClr val="142B43"/>
                 </a:solidFill>
@@ -15448,7 +16683,7 @@
               </a:defRPr>
             </a:pPr>
             <a:r>
-              <a:rPr sz="2625" b="0">
+              <a:rPr sz="2550" b="0">
                 <a:solidFill>
                   <a:srgbClr val="142B43"/>
                 </a:solidFill>
@@ -15456,17 +16691,17 @@
                 <a:ea typeface="Arial"/>
                 <a:cs typeface="Arial"/>
               </a:rPr>
-              <a:t>String values within 1023 bytes</a:t>
+              <a:t>Check concatenated string lengths</a:t>
             </a:r>
           </a:p>
         </p:txBody>
       </p:sp>
       <p:sp>
         <p:nvSpPr>
-          <p:cNvPr id="6" name="string x;&#10;print(x);  // semantic er">
+          <p:cNvPr id="6" name="string x;&#10;print(x);  // uninitializ">
             <a:extLst xmlns:a="http://schemas.openxmlformats.org/drawingml/2006/main">
               <a:ext uri="{FF2B5EF4-FFF2-40B4-BE49-F238E27FC236}">
-                <a16:creationId xmlns:a16="http://schemas.microsoft.com/office/drawing/2014/main" id="{AB02940B-7DBB-4482-833E-1B5A555B0A67}"/>
+                <a16:creationId xmlns:a16="http://schemas.microsoft.com/office/drawing/2014/main" id="{C58AD9F1-4101-47EF-9207-0EFEC286DAFE}"/>
               </a:ext>
             </a:extLst>
           </p:cNvPr>
@@ -15635,7 +16870,7 @@
                 <a:ea typeface="Consolas"/>
                 <a:cs typeface="Consolas"/>
               </a:rPr>
-              <a:t>print(x);  // semantic error</a:t>
+              <a:t>print(x);  // uninitialized use</a:t>
             </a:r>
           </a:p>
         </p:txBody>
@@ -15643,7 +16878,7 @@
     </p:spTree>
     <p:extLst>
       <p:ext uri="{BB962C8B-B14F-4D97-AF65-F5344CB8AC3E}">
-        <p14:creationId xmlns:p14="http://schemas.microsoft.com/office/powerpoint/2010/main" val="622730521"/>
+        <p14:creationId xmlns:p14="http://schemas.microsoft.com/office/powerpoint/2010/main" val="1964563307"/>
       </p:ext>
     </p:extLst>
   </p:cSld>
@@ -15674,7 +16909,7 @@
           <p:cNvPr id="8" name="COMPILER DESIGN">
             <a:extLst xmlns:a="http://schemas.openxmlformats.org/drawingml/2006/main">
               <a:ext uri="{FF2B5EF4-FFF2-40B4-BE49-F238E27FC236}">
-                <a16:creationId xmlns:a16="http://schemas.microsoft.com/office/drawing/2014/main" id="{027D8F5C-6DFD-4315-966D-E952E0FAD4D4}"/>
+                <a16:creationId xmlns:a16="http://schemas.microsoft.com/office/drawing/2014/main" id="{2FA3C06B-BE13-4085-B071-59FAB769929A}"/>
               </a:ext>
             </a:extLst>
           </p:cNvPr>
@@ -15702,7 +16937,7 @@
             <a:defPPr>
               <a:defRPr sz="1125" b="1">
                 <a:solidFill>
-                  <a:srgbClr val="1A6383"/>
+                  <a:srgbClr val="DF6948"/>
                 </a:solidFill>
                 <a:latin typeface="Arial"/>
                 <a:ea typeface="Arial"/>
@@ -15712,7 +16947,7 @@
             <a:lvl1pPr>
               <a:defRPr sz="1125" b="1">
                 <a:solidFill>
-                  <a:srgbClr val="1A6383"/>
+                  <a:srgbClr val="DF6948"/>
                 </a:solidFill>
                 <a:latin typeface="Arial"/>
                 <a:ea typeface="Arial"/>
@@ -15722,7 +16957,7 @@
             <a:lvl2pPr>
               <a:defRPr sz="1125" b="1">
                 <a:solidFill>
-                  <a:srgbClr val="1A6383"/>
+                  <a:srgbClr val="DF6948"/>
                 </a:solidFill>
                 <a:latin typeface="Arial"/>
                 <a:ea typeface="Arial"/>
@@ -15732,7 +16967,7 @@
             <a:lvl3pPr>
               <a:defRPr sz="1125" b="1">
                 <a:solidFill>
-                  <a:srgbClr val="1A6383"/>
+                  <a:srgbClr val="DF6948"/>
                 </a:solidFill>
                 <a:latin typeface="Arial"/>
                 <a:ea typeface="Arial"/>
@@ -15742,7 +16977,7 @@
             <a:lvl4pPr>
               <a:defRPr sz="1125" b="1">
                 <a:solidFill>
-                  <a:srgbClr val="1A6383"/>
+                  <a:srgbClr val="DF6948"/>
                 </a:solidFill>
                 <a:latin typeface="Arial"/>
                 <a:ea typeface="Arial"/>
@@ -15752,7 +16987,7 @@
             <a:lvl5pPr>
               <a:defRPr sz="1125" b="1">
                 <a:solidFill>
-                  <a:srgbClr val="1A6383"/>
+                  <a:srgbClr val="DF6948"/>
                 </a:solidFill>
                 <a:latin typeface="Arial"/>
                 <a:ea typeface="Arial"/>
@@ -15762,7 +16997,7 @@
             <a:lvl6pPr>
               <a:defRPr sz="1125" b="1">
                 <a:solidFill>
-                  <a:srgbClr val="1A6383"/>
+                  <a:srgbClr val="DF6948"/>
                 </a:solidFill>
                 <a:latin typeface="Arial"/>
                 <a:ea typeface="Arial"/>
@@ -15772,7 +17007,7 @@
             <a:lvl7pPr>
               <a:defRPr sz="1125" b="1">
                 <a:solidFill>
-                  <a:srgbClr val="1A6383"/>
+                  <a:srgbClr val="DF6948"/>
                 </a:solidFill>
                 <a:latin typeface="Arial"/>
                 <a:ea typeface="Arial"/>
@@ -15782,7 +17017,7 @@
             <a:lvl8pPr>
               <a:defRPr sz="1125" b="1">
                 <a:solidFill>
-                  <a:srgbClr val="1A6383"/>
+                  <a:srgbClr val="DF6948"/>
                 </a:solidFill>
                 <a:latin typeface="Arial"/>
                 <a:ea typeface="Arial"/>
@@ -15792,7 +17027,7 @@
             <a:lvl9pPr>
               <a:defRPr sz="1125" b="1">
                 <a:solidFill>
-                  <a:srgbClr val="1A6383"/>
+                  <a:srgbClr val="DF6948"/>
                 </a:solidFill>
                 <a:latin typeface="Arial"/>
                 <a:ea typeface="Arial"/>
@@ -15804,7 +17039,7 @@
             <a:pPr>
               <a:defRPr sz="1125" b="1">
                 <a:solidFill>
-                  <a:srgbClr val="1A6383"/>
+                  <a:srgbClr val="DF6948"/>
                 </a:solidFill>
                 <a:latin typeface="Arial"/>
                 <a:ea typeface="Arial"/>
@@ -15814,7 +17049,7 @@
             <a:r>
               <a:rPr sz="1125" b="1">
                 <a:solidFill>
-                  <a:srgbClr val="1A6383"/>
+                  <a:srgbClr val="DF6948"/>
                 </a:solidFill>
                 <a:latin typeface="Arial"/>
                 <a:ea typeface="Arial"/>
@@ -15830,7 +17065,7 @@
           <p:cNvPr id="2" name="Slide title">
             <a:extLst xmlns:a="http://schemas.openxmlformats.org/drawingml/2006/main">
               <a:ext uri="{FF2B5EF4-FFF2-40B4-BE49-F238E27FC236}">
-                <a16:creationId xmlns:a16="http://schemas.microsoft.com/office/drawing/2014/main" id="{AFD144A1-9ADC-4D95-B476-CD70D7F4A157}"/>
+                <a16:creationId xmlns:a16="http://schemas.microsoft.com/office/drawing/2014/main" id="{3A3FD9BB-C5B6-4969-88CA-2EE340F0D859}"/>
               </a:ext>
             </a:extLst>
           </p:cNvPr>
@@ -15983,10 +17218,10 @@
       </p:sp>
       <p:sp>
         <p:nvSpPr>
-          <p:cNvPr id="3" name="String Processing Mini Compiler in ">
+          <p:cNvPr id="3" name="StringLab Browser Compiler Front En">
             <a:extLst xmlns:a="http://schemas.openxmlformats.org/drawingml/2006/main">
               <a:ext uri="{FF2B5EF4-FFF2-40B4-BE49-F238E27FC236}">
-                <a16:creationId xmlns:a16="http://schemas.microsoft.com/office/drawing/2014/main" id="{6225D705-6264-49F6-9DF7-BCA8AF66EA91}"/>
+                <a16:creationId xmlns:a16="http://schemas.microsoft.com/office/drawing/2014/main" id="{E082826B-1FA7-4841-B3AC-C306C075A2DC}"/>
               </a:ext>
             </a:extLst>
           </p:cNvPr>
@@ -16132,7 +17367,7 @@
                 <a:ea typeface="Arial"/>
                 <a:cs typeface="Arial"/>
               </a:rPr>
-              <a:t>String Processing Mini Compiler in C</a:t>
+              <a:t>StringLab Browser Compiler Front End</a:t>
             </a:r>
           </a:p>
         </p:txBody>
@@ -16142,7 +17377,7 @@
           <p:cNvPr id="4" name="08">
             <a:extLst xmlns:a="http://schemas.openxmlformats.org/drawingml/2006/main">
               <a:ext uri="{FF2B5EF4-FFF2-40B4-BE49-F238E27FC236}">
-                <a16:creationId xmlns:a16="http://schemas.microsoft.com/office/drawing/2014/main" id="{01F076DF-CBA9-4304-9099-086DEEF1489E}"/>
+                <a16:creationId xmlns:a16="http://schemas.microsoft.com/office/drawing/2014/main" id="{3DBB3358-07DF-4809-99CB-62E98671B645}"/>
               </a:ext>
             </a:extLst>
           </p:cNvPr>
@@ -16298,7 +17533,7 @@
           <p:cNvPr id="5" name="print(&quot;A\nB&quot;);&#10;print(&quot;She said: \&quot;H">
             <a:extLst xmlns:a="http://schemas.openxmlformats.org/drawingml/2006/main">
               <a:ext uri="{FF2B5EF4-FFF2-40B4-BE49-F238E27FC236}">
-                <a16:creationId xmlns:a16="http://schemas.microsoft.com/office/drawing/2014/main" id="{68DCE6BD-8A36-4B0F-9F3F-EC606F3CCFCD}"/>
+                <a16:creationId xmlns:a16="http://schemas.microsoft.com/office/drawing/2014/main" id="{EE5AF0D5-A344-4BBC-BD57-9A9CDA3DB12D}"/>
               </a:ext>
             </a:extLst>
           </p:cNvPr>
@@ -16500,7 +17735,7 @@
           <p:cNvPr id="6" name="Accepted escapes:  \n  \t  \r  \\  ">
             <a:extLst xmlns:a="http://schemas.openxmlformats.org/drawingml/2006/main">
               <a:ext uri="{FF2B5EF4-FFF2-40B4-BE49-F238E27FC236}">
-                <a16:creationId xmlns:a16="http://schemas.microsoft.com/office/drawing/2014/main" id="{CE508210-1A6C-4DB3-9908-2E533A0036B5}"/>
+                <a16:creationId xmlns:a16="http://schemas.microsoft.com/office/drawing/2014/main" id="{BBB669A7-2131-4F18-A961-49775863C587}"/>
               </a:ext>
             </a:extLst>
           </p:cNvPr>
@@ -16653,10 +17888,10 @@
       </p:sp>
       <p:sp>
         <p:nvSpPr>
-          <p:cNvPr id="7" name="Empty strings are valid. Invalid es">
+          <p:cNvPr id="7" name="Empty strings are valid. Escape dec">
             <a:extLst xmlns:a="http://schemas.openxmlformats.org/drawingml/2006/main">
               <a:ext uri="{FF2B5EF4-FFF2-40B4-BE49-F238E27FC236}">
-                <a16:creationId xmlns:a16="http://schemas.microsoft.com/office/drawing/2014/main" id="{818848A4-B2D6-4910-A11D-446E0EE1A699}"/>
+                <a16:creationId xmlns:a16="http://schemas.microsoft.com/office/drawing/2014/main" id="{B8FDD25F-6998-4889-BFC7-952BE78806BF}"/>
               </a:ext>
             </a:extLst>
           </p:cNvPr>
@@ -16802,7 +18037,7 @@
                 <a:ea typeface="Arial"/>
                 <a:cs typeface="Arial"/>
               </a:rPr>
-              <a:t>Empty strings are valid. Invalid escapes stop compilation.</a:t>
+              <a:t>Empty strings are valid. Escape decoding happens once.</a:t>
             </a:r>
           </a:p>
         </p:txBody>
@@ -16810,7 +18045,7 @@
     </p:spTree>
     <p:extLst>
       <p:ext uri="{BB962C8B-B14F-4D97-AF65-F5344CB8AC3E}">
-        <p14:creationId xmlns:p14="http://schemas.microsoft.com/office/powerpoint/2010/main" val="334251940"/>
+        <p14:creationId xmlns:p14="http://schemas.microsoft.com/office/powerpoint/2010/main" val="1204342263"/>
       </p:ext>
     </p:extLst>
   </p:cSld>
@@ -16841,7 +18076,7 @@
           <p:cNvPr id="6" name="COMPILER DESIGN">
             <a:extLst xmlns:a="http://schemas.openxmlformats.org/drawingml/2006/main">
               <a:ext uri="{FF2B5EF4-FFF2-40B4-BE49-F238E27FC236}">
-                <a16:creationId xmlns:a16="http://schemas.microsoft.com/office/drawing/2014/main" id="{AC5AB5D1-7B83-483B-9790-4918B5229146}"/>
+                <a16:creationId xmlns:a16="http://schemas.microsoft.com/office/drawing/2014/main" id="{5156FF2D-DEFE-463F-93CA-192EDBFB006E}"/>
               </a:ext>
             </a:extLst>
           </p:cNvPr>
@@ -16869,7 +18104,7 @@
             <a:defPPr>
               <a:defRPr sz="1125" b="1">
                 <a:solidFill>
-                  <a:srgbClr val="1A6383"/>
+                  <a:srgbClr val="DF6948"/>
                 </a:solidFill>
                 <a:latin typeface="Arial"/>
                 <a:ea typeface="Arial"/>
@@ -16879,7 +18114,7 @@
             <a:lvl1pPr>
               <a:defRPr sz="1125" b="1">
                 <a:solidFill>
-                  <a:srgbClr val="1A6383"/>
+                  <a:srgbClr val="DF6948"/>
                 </a:solidFill>
                 <a:latin typeface="Arial"/>
                 <a:ea typeface="Arial"/>
@@ -16889,7 +18124,7 @@
             <a:lvl2pPr>
               <a:defRPr sz="1125" b="1">
                 <a:solidFill>
-                  <a:srgbClr val="1A6383"/>
+                  <a:srgbClr val="DF6948"/>
                 </a:solidFill>
                 <a:latin typeface="Arial"/>
                 <a:ea typeface="Arial"/>
@@ -16899,7 +18134,7 @@
             <a:lvl3pPr>
               <a:defRPr sz="1125" b="1">
                 <a:solidFill>
-                  <a:srgbClr val="1A6383"/>
+                  <a:srgbClr val="DF6948"/>
                 </a:solidFill>
                 <a:latin typeface="Arial"/>
                 <a:ea typeface="Arial"/>
@@ -16909,7 +18144,7 @@
             <a:lvl4pPr>
               <a:defRPr sz="1125" b="1">
                 <a:solidFill>
-                  <a:srgbClr val="1A6383"/>
+                  <a:srgbClr val="DF6948"/>
                 </a:solidFill>
                 <a:latin typeface="Arial"/>
                 <a:ea typeface="Arial"/>
@@ -16919,7 +18154,7 @@
             <a:lvl5pPr>
               <a:defRPr sz="1125" b="1">
                 <a:solidFill>
-                  <a:srgbClr val="1A6383"/>
+                  <a:srgbClr val="DF6948"/>
                 </a:solidFill>
                 <a:latin typeface="Arial"/>
                 <a:ea typeface="Arial"/>
@@ -16929,7 +18164,7 @@
             <a:lvl6pPr>
               <a:defRPr sz="1125" b="1">
                 <a:solidFill>
-                  <a:srgbClr val="1A6383"/>
+                  <a:srgbClr val="DF6948"/>
                 </a:solidFill>
                 <a:latin typeface="Arial"/>
                 <a:ea typeface="Arial"/>
@@ -16939,7 +18174,7 @@
             <a:lvl7pPr>
               <a:defRPr sz="1125" b="1">
                 <a:solidFill>
-                  <a:srgbClr val="1A6383"/>
+                  <a:srgbClr val="DF6948"/>
                 </a:solidFill>
                 <a:latin typeface="Arial"/>
                 <a:ea typeface="Arial"/>
@@ -16949,7 +18184,7 @@
             <a:lvl8pPr>
               <a:defRPr sz="1125" b="1">
                 <a:solidFill>
-                  <a:srgbClr val="1A6383"/>
+                  <a:srgbClr val="DF6948"/>
                 </a:solidFill>
                 <a:latin typeface="Arial"/>
                 <a:ea typeface="Arial"/>
@@ -16959,7 +18194,7 @@
             <a:lvl9pPr>
               <a:defRPr sz="1125" b="1">
                 <a:solidFill>
-                  <a:srgbClr val="1A6383"/>
+                  <a:srgbClr val="DF6948"/>
                 </a:solidFill>
                 <a:latin typeface="Arial"/>
                 <a:ea typeface="Arial"/>
@@ -16971,7 +18206,7 @@
             <a:pPr>
               <a:defRPr sz="1125" b="1">
                 <a:solidFill>
-                  <a:srgbClr val="1A6383"/>
+                  <a:srgbClr val="DF6948"/>
                 </a:solidFill>
                 <a:latin typeface="Arial"/>
                 <a:ea typeface="Arial"/>
@@ -16981,7 +18216,7 @@
             <a:r>
               <a:rPr sz="1125" b="1">
                 <a:solidFill>
-                  <a:srgbClr val="1A6383"/>
+                  <a:srgbClr val="DF6948"/>
                 </a:solidFill>
                 <a:latin typeface="Arial"/>
                 <a:ea typeface="Arial"/>
@@ -16997,7 +18232,7 @@
           <p:cNvPr id="2" name="Slide title">
             <a:extLst xmlns:a="http://schemas.openxmlformats.org/drawingml/2006/main">
               <a:ext uri="{FF2B5EF4-FFF2-40B4-BE49-F238E27FC236}">
-                <a16:creationId xmlns:a16="http://schemas.microsoft.com/office/drawing/2014/main" id="{24ABC225-ACE2-479F-AF6C-9850068F12E1}"/>
+                <a16:creationId xmlns:a16="http://schemas.microsoft.com/office/drawing/2014/main" id="{BCD56D61-0D09-46E8-8178-52A01052639E}"/>
               </a:ext>
             </a:extLst>
           </p:cNvPr>
@@ -17143,17 +18378,17 @@
                 <a:ea typeface="Arial"/>
                 <a:cs typeface="Arial"/>
               </a:rPr>
-              <a:t>Successful program demonstration</a:t>
+              <a:t>Interactive demonstration</a:t>
             </a:r>
           </a:p>
         </p:txBody>
       </p:sp>
       <p:sp>
         <p:nvSpPr>
-          <p:cNvPr id="3" name="String Processing Mini Compiler in ">
+          <p:cNvPr id="3" name="StringLab Browser Compiler Front En">
             <a:extLst xmlns:a="http://schemas.openxmlformats.org/drawingml/2006/main">
               <a:ext uri="{FF2B5EF4-FFF2-40B4-BE49-F238E27FC236}">
-                <a16:creationId xmlns:a16="http://schemas.microsoft.com/office/drawing/2014/main" id="{3D022DDD-351D-49CB-B81C-A401BBDDA4C1}"/>
+                <a16:creationId xmlns:a16="http://schemas.microsoft.com/office/drawing/2014/main" id="{9661BA65-0BA4-46FD-AE08-90DA20C45E69}"/>
               </a:ext>
             </a:extLst>
           </p:cNvPr>
@@ -17299,7 +18534,7 @@
                 <a:ea typeface="Arial"/>
                 <a:cs typeface="Arial"/>
               </a:rPr>
-              <a:t>String Processing Mini Compiler in C</a:t>
+              <a:t>StringLab Browser Compiler Front End</a:t>
             </a:r>
           </a:p>
         </p:txBody>
@@ -17309,7 +18544,7 @@
           <p:cNvPr id="4" name="09">
             <a:extLst xmlns:a="http://schemas.openxmlformats.org/drawingml/2006/main">
               <a:ext uri="{FF2B5EF4-FFF2-40B4-BE49-F238E27FC236}">
-                <a16:creationId xmlns:a16="http://schemas.microsoft.com/office/drawing/2014/main" id="{65D35767-F295-4D6A-94BF-9B7A511741E7}"/>
+                <a16:creationId xmlns:a16="http://schemas.microsoft.com/office/drawing/2014/main" id="{CA7E568F-005F-45D8-AF5D-F90116969318}"/>
               </a:ext>
             </a:extLst>
           </p:cNvPr>
@@ -17465,7 +18700,7 @@
           <p:cNvPr id="5" name="">
             <a:extLst xmlns:a="http://schemas.openxmlformats.org/drawingml/2006/main">
               <a:ext uri="{FF2B5EF4-FFF2-40B4-BE49-F238E27FC236}">
-                <a16:creationId xmlns:a16="http://schemas.microsoft.com/office/drawing/2014/main" id="{418C7279-3E76-443B-9786-6B22C847F842}"/>
+                <a16:creationId xmlns:a16="http://schemas.microsoft.com/office/drawing/2014/main" id="{9C058B55-2C5E-468C-A820-F79184531B39}"/>
               </a:ext>
             </a:extLst>
           </p:cNvPr>
@@ -17475,13 +18710,13 @@
           <p:nvPr/>
         </p:nvPicPr>
         <p:blipFill>
-          <a:blip xmlns:r="http://schemas.openxmlformats.org/officeDocument/2006/relationships" xmlns:a="http://schemas.openxmlformats.org/drawingml/2006/main" r:embed="Rebca01e0f18b4bf0"/>
+          <a:blip xmlns:r="http://schemas.openxmlformats.org/officeDocument/2006/relationships" xmlns:a="http://schemas.openxmlformats.org/drawingml/2006/main" r:embed="R27f940736b214fa7"/>
           <a:stretch xmlns:a="http://schemas.openxmlformats.org/drawingml/2006/main"/>
         </p:blipFill>
         <p:spPr>
           <a:xfrm xmlns:a="http://schemas.openxmlformats.org/drawingml/2006/main">
-            <a:off x="685800" y="1886121"/>
-            <a:ext cx="10820400" cy="3904907"/>
+            <a:off x="2003757" y="1743075"/>
+            <a:ext cx="8184486" cy="4210050"/>
           </a:xfrm>
           <a:prstGeom xmlns:a="http://schemas.openxmlformats.org/drawingml/2006/main" prst="rect">
             <a:avLst/>
@@ -17491,7 +18726,7 @@
     </p:spTree>
     <p:extLst>
       <p:ext uri="{BB962C8B-B14F-4D97-AF65-F5344CB8AC3E}">
-        <p14:creationId xmlns:p14="http://schemas.microsoft.com/office/powerpoint/2010/main" val="788177967"/>
+        <p14:creationId xmlns:p14="http://schemas.microsoft.com/office/powerpoint/2010/main" val="663774250"/>
       </p:ext>
     </p:extLst>
   </p:cSld>
